--- a/public/fun/pack/pptx/talk/발표템플릿_19_모임·동호회소개_반딧불마을.pptx
+++ b/public/fun/pack/pptx/talk/발표템플릿_19_모임·동호회소개_반딧불마을.pptx
@@ -3286,14 +3286,6 @@
 <file path=ppt/slides/slide1.xml><?xml version="1.0" encoding="utf-8"?>
 <p:sld xmlns:a="http://schemas.openxmlformats.org/drawingml/2006/main" xmlns:p="http://schemas.openxmlformats.org/presentationml/2006/main" xmlns:r="http://schemas.openxmlformats.org/officeDocument/2006/relationships">
   <p:cSld>
-    <p:bg>
-      <p:bgPr>
-        <a:solidFill>
-          <a:srgbClr val="FFFFFF"/>
-        </a:solidFill>
-        <a:effectLst/>
-      </p:bgPr>
-    </p:bg>
     <p:spTree>
       <p:nvGrpSpPr>
         <p:cNvPr id="1" name=""/>
@@ -3301,238 +3293,30 @@
         <p:nvPr/>
       </p:nvGrpSpPr>
       <p:grpSpPr/>
-      <p:sp>
-        <p:nvSpPr>
-          <p:cNvPr id="3" name="장식"/>
-          <p:cNvSpPr/>
+      <p:pic>
+        <p:nvPicPr>
+          <p:cNvPr id="3" name="표지 그림" descr="talk-19.jpg"/>
+          <p:cNvPicPr>
+            <a:picLocks noChangeAspect="1"/>
+          </p:cNvPicPr>
           <p:nvPr/>
-        </p:nvSpPr>
-        <p:spPr>
-          <a:xfrm>
-            <a:off x="7071183" y="-1714500"/>
-            <a:ext cx="7886700" cy="7886700"/>
-          </a:xfrm>
-          <a:prstGeom prst="ellipse">
+        </p:nvPicPr>
+        <p:blipFill>
+          <a:blip r:embed="rId2"/>
+          <a:stretch>
+            <a:fillRect/>
+          </a:stretch>
+        </p:blipFill>
+        <p:spPr>
+          <a:xfrm>
+            <a:off x="0" y="0"/>
+            <a:ext cx="12191695" cy="6858000"/>
+          </a:xfrm>
+          <a:prstGeom prst="rect">
             <a:avLst/>
           </a:prstGeom>
-          <a:solidFill>
-            <a:srgbClr val="D0F1E6"/>
-          </a:solidFill>
-          <a:ln>
-            <a:noFill/>
-          </a:ln>
-        </p:spPr>
-        <p:txBody>
-          <a:bodyPr rtlCol="0" anchor="ctr"/>
-          <a:lstStyle/>
-          <a:p>
-            <a:pPr algn="ctr"/>
-          </a:p>
-        </p:txBody>
-      </p:sp>
-      <p:sp>
-        <p:nvSpPr>
-          <p:cNvPr id="4" name="장식"/>
-          <p:cNvSpPr/>
-          <p:nvPr/>
-        </p:nvSpPr>
-        <p:spPr>
-          <a:xfrm>
-            <a:off x="9509522" y="3977639"/>
-            <a:ext cx="3429000" cy="3429000"/>
-          </a:xfrm>
-          <a:prstGeom prst="ellipse">
-            <a:avLst/>
-          </a:prstGeom>
-          <a:solidFill>
-            <a:srgbClr val="246B53"/>
-          </a:solidFill>
-          <a:ln>
-            <a:noFill/>
-          </a:ln>
-        </p:spPr>
-        <p:txBody>
-          <a:bodyPr rtlCol="0" anchor="ctr"/>
-          <a:lstStyle/>
-          <a:p>
-            <a:pPr algn="ctr"/>
-          </a:p>
-        </p:txBody>
-      </p:sp>
-      <p:sp>
-        <p:nvSpPr>
-          <p:cNvPr id="5" name="장식"/>
-          <p:cNvSpPr/>
-          <p:nvPr/>
-        </p:nvSpPr>
-        <p:spPr>
-          <a:xfrm rot="47073">
-            <a:off x="10370041" y="1303642"/>
-            <a:ext cx="972669" cy="972669"/>
-          </a:xfrm>
-          <a:prstGeom prst="star5">
-            <a:avLst/>
-          </a:prstGeom>
-          <a:solidFill>
-            <a:srgbClr val="246B53"/>
-          </a:solidFill>
-          <a:ln>
-            <a:noFill/>
-          </a:ln>
-        </p:spPr>
-        <p:txBody>
-          <a:bodyPr rtlCol="0" anchor="ctr"/>
-          <a:lstStyle/>
-          <a:p>
-            <a:pPr algn="ctr"/>
-          </a:p>
-        </p:txBody>
-      </p:sp>
-      <p:sp>
-        <p:nvSpPr>
-          <p:cNvPr id="6" name="장식"/>
-          <p:cNvSpPr/>
-          <p:nvPr/>
-        </p:nvSpPr>
-        <p:spPr>
-          <a:xfrm rot="616000">
-            <a:off x="10966056" y="404965"/>
-            <a:ext cx="415579" cy="415579"/>
-          </a:xfrm>
-          <a:prstGeom prst="star5">
-            <a:avLst/>
-          </a:prstGeom>
-          <a:solidFill>
-            <a:srgbClr val="D0F1E6"/>
-          </a:solidFill>
-          <a:ln>
-            <a:noFill/>
-          </a:ln>
-        </p:spPr>
-        <p:txBody>
-          <a:bodyPr rtlCol="0" anchor="ctr"/>
-          <a:lstStyle/>
-          <a:p>
-            <a:pPr algn="ctr"/>
-          </a:p>
-        </p:txBody>
-      </p:sp>
-      <p:sp>
-        <p:nvSpPr>
-          <p:cNvPr id="7" name="장식"/>
-          <p:cNvSpPr/>
-          <p:nvPr/>
-        </p:nvSpPr>
-        <p:spPr>
-          <a:xfrm rot="291727">
-            <a:off x="8517029" y="1857812"/>
-            <a:ext cx="743304" cy="743304"/>
-          </a:xfrm>
-          <a:prstGeom prst="star5">
-            <a:avLst/>
-          </a:prstGeom>
-          <a:solidFill>
-            <a:srgbClr val="913B83"/>
-          </a:solidFill>
-          <a:ln>
-            <a:noFill/>
-          </a:ln>
-        </p:spPr>
-        <p:txBody>
-          <a:bodyPr rtlCol="0" anchor="ctr"/>
-          <a:lstStyle/>
-          <a:p>
-            <a:pPr algn="ctr"/>
-          </a:p>
-        </p:txBody>
-      </p:sp>
-      <p:sp>
-        <p:nvSpPr>
-          <p:cNvPr id="8" name="장식"/>
-          <p:cNvSpPr/>
-          <p:nvPr/>
-        </p:nvSpPr>
-        <p:spPr>
-          <a:xfrm rot="486238">
-            <a:off x="10732199" y="2536825"/>
-            <a:ext cx="862336" cy="862336"/>
-          </a:xfrm>
-          <a:prstGeom prst="star5">
-            <a:avLst/>
-          </a:prstGeom>
-          <a:solidFill>
-            <a:srgbClr val="246B53"/>
-          </a:solidFill>
-          <a:ln>
-            <a:noFill/>
-          </a:ln>
-        </p:spPr>
-        <p:txBody>
-          <a:bodyPr rtlCol="0" anchor="ctr"/>
-          <a:lstStyle/>
-          <a:p>
-            <a:pPr algn="ctr"/>
-          </a:p>
-        </p:txBody>
-      </p:sp>
-      <p:sp>
-        <p:nvSpPr>
-          <p:cNvPr id="9" name="장식"/>
-          <p:cNvSpPr/>
-          <p:nvPr/>
-        </p:nvSpPr>
-        <p:spPr>
-          <a:xfrm rot="21114457">
-            <a:off x="10694079" y="2423818"/>
-            <a:ext cx="852890" cy="852890"/>
-          </a:xfrm>
-          <a:prstGeom prst="star5">
-            <a:avLst/>
-          </a:prstGeom>
-          <a:solidFill>
-            <a:srgbClr val="D0F1E6"/>
-          </a:solidFill>
-          <a:ln>
-            <a:noFill/>
-          </a:ln>
-        </p:spPr>
-        <p:txBody>
-          <a:bodyPr rtlCol="0" anchor="ctr"/>
-          <a:lstStyle/>
-          <a:p>
-            <a:pPr algn="ctr"/>
-          </a:p>
-        </p:txBody>
-      </p:sp>
-      <p:sp>
-        <p:nvSpPr>
-          <p:cNvPr id="10" name="장식"/>
-          <p:cNvSpPr/>
-          <p:nvPr/>
-        </p:nvSpPr>
-        <p:spPr>
-          <a:xfrm rot="21340827">
-            <a:off x="10442192" y="1296230"/>
-            <a:ext cx="435134" cy="435134"/>
-          </a:xfrm>
-          <a:prstGeom prst="star5">
-            <a:avLst/>
-          </a:prstGeom>
-          <a:solidFill>
-            <a:srgbClr val="913B83"/>
-          </a:solidFill>
-          <a:ln>
-            <a:noFill/>
-          </a:ln>
-        </p:spPr>
-        <p:txBody>
-          <a:bodyPr rtlCol="0" anchor="ctr"/>
-          <a:lstStyle/>
-          <a:p>
-            <a:pPr algn="ctr"/>
-          </a:p>
-        </p:txBody>
-      </p:sp>
+        </p:spPr>
+      </p:pic>
       <p:sp>
         <p:nvSpPr>
           <p:cNvPr id="2" name="Title 1"/>
@@ -3546,7 +3330,7 @@
         <p:spPr>
           <a:xfrm>
             <a:off x="853418" y="2057400"/>
-            <a:ext cx="6705432" cy="1463040"/>
+            <a:ext cx="6095847" cy="1554480"/>
           </a:xfrm>
         </p:spPr>
         <p:txBody>
@@ -3573,13 +3357,13 @@
       </p:sp>
       <p:sp>
         <p:nvSpPr>
-          <p:cNvPr id="11" name="한 줄 문구"/>
+          <p:cNvPr id="4" name="한 줄 문구"/>
           <p:cNvSpPr txBox="1"/>
           <p:nvPr/>
         </p:nvSpPr>
         <p:spPr>
           <a:xfrm>
-            <a:off x="853418" y="3611880"/>
+            <a:off x="853418" y="3749039"/>
             <a:ext cx="6095847" cy="822960"/>
           </a:xfrm>
           <a:prstGeom prst="rect">
@@ -3604,20 +3388,20 @@
                   <a:srgbClr val="143D30"/>
                 </a:solidFill>
               </a:rPr>
-              <a:t>작은 불빛이 모여 환해지는 아이디어</a:t>
-            </a:r>
-          </a:p>
-        </p:txBody>
-      </p:sp>
-      <p:sp>
-        <p:nvSpPr>
-          <p:cNvPr id="12" name="안내 문구"/>
+              <a:t>한 달에 한 번, 이렇게 모입니다</a:t>
+            </a:r>
+          </a:p>
+        </p:txBody>
+      </p:sp>
+      <p:sp>
+        <p:nvSpPr>
+          <p:cNvPr id="5" name="안내 문구"/>
           <p:cNvSpPr txBox="1"/>
           <p:nvPr/>
         </p:nvSpPr>
         <p:spPr>
           <a:xfrm>
-            <a:off x="853418" y="4480560"/>
+            <a:off x="853418" y="4617720"/>
             <a:ext cx="6095847" cy="914400"/>
           </a:xfrm>
           <a:prstGeom prst="rect">
@@ -3657,7 +3441,7 @@
                   <a:srgbClr val="666666"/>
                 </a:solidFill>
               </a:rPr>
-              <a:t>2026. 00. 00</a:t>
+              <a:t>2027. 00. 00</a:t>
             </a:r>
           </a:p>
         </p:txBody>
@@ -3748,180 +3532,6 @@
       </p:sp>
       <p:sp>
         <p:nvSpPr>
-          <p:cNvPr id="5" name="장식"/>
-          <p:cNvSpPr/>
-          <p:nvPr/>
-        </p:nvSpPr>
-        <p:spPr>
-          <a:xfrm rot="47073">
-            <a:off x="11538365" y="657714"/>
-            <a:ext cx="339662" cy="339662"/>
-          </a:xfrm>
-          <a:prstGeom prst="star5">
-            <a:avLst/>
-          </a:prstGeom>
-          <a:solidFill>
-            <a:srgbClr val="246B53"/>
-          </a:solidFill>
-          <a:ln>
-            <a:noFill/>
-          </a:ln>
-        </p:spPr>
-        <p:txBody>
-          <a:bodyPr rtlCol="0" anchor="ctr"/>
-          <a:lstStyle/>
-          <a:p>
-            <a:pPr algn="ctr"/>
-          </a:p>
-        </p:txBody>
-      </p:sp>
-      <p:sp>
-        <p:nvSpPr>
-          <p:cNvPr id="6" name="장식"/>
-          <p:cNvSpPr/>
-          <p:nvPr/>
-        </p:nvSpPr>
-        <p:spPr>
-          <a:xfrm rot="616000">
-            <a:off x="11746497" y="343890"/>
-            <a:ext cx="145122" cy="145122"/>
-          </a:xfrm>
-          <a:prstGeom prst="star5">
-            <a:avLst/>
-          </a:prstGeom>
-          <a:solidFill>
-            <a:srgbClr val="D0F1E6"/>
-          </a:solidFill>
-          <a:ln>
-            <a:noFill/>
-          </a:ln>
-        </p:spPr>
-        <p:txBody>
-          <a:bodyPr rtlCol="0" anchor="ctr"/>
-          <a:lstStyle/>
-          <a:p>
-            <a:pPr algn="ctr"/>
-          </a:p>
-        </p:txBody>
-      </p:sp>
-      <p:sp>
-        <p:nvSpPr>
-          <p:cNvPr id="7" name="장식"/>
-          <p:cNvSpPr/>
-          <p:nvPr/>
-        </p:nvSpPr>
-        <p:spPr>
-          <a:xfrm rot="291727">
-            <a:off x="10891282" y="851234"/>
-            <a:ext cx="259566" cy="259566"/>
-          </a:xfrm>
-          <a:prstGeom prst="star5">
-            <a:avLst/>
-          </a:prstGeom>
-          <a:solidFill>
-            <a:srgbClr val="913B83"/>
-          </a:solidFill>
-          <a:ln>
-            <a:noFill/>
-          </a:ln>
-        </p:spPr>
-        <p:txBody>
-          <a:bodyPr rtlCol="0" anchor="ctr"/>
-          <a:lstStyle/>
-          <a:p>
-            <a:pPr algn="ctr"/>
-          </a:p>
-        </p:txBody>
-      </p:sp>
-      <p:sp>
-        <p:nvSpPr>
-          <p:cNvPr id="8" name="장식"/>
-          <p:cNvSpPr/>
-          <p:nvPr/>
-        </p:nvSpPr>
-        <p:spPr>
-          <a:xfrm rot="486238">
-            <a:off x="11664833" y="1088349"/>
-            <a:ext cx="301133" cy="301133"/>
-          </a:xfrm>
-          <a:prstGeom prst="star5">
-            <a:avLst/>
-          </a:prstGeom>
-          <a:solidFill>
-            <a:srgbClr val="246B53"/>
-          </a:solidFill>
-          <a:ln>
-            <a:noFill/>
-          </a:ln>
-        </p:spPr>
-        <p:txBody>
-          <a:bodyPr rtlCol="0" anchor="ctr"/>
-          <a:lstStyle/>
-          <a:p>
-            <a:pPr algn="ctr"/>
-          </a:p>
-        </p:txBody>
-      </p:sp>
-      <p:sp>
-        <p:nvSpPr>
-          <p:cNvPr id="9" name="장식"/>
-          <p:cNvSpPr/>
-          <p:nvPr/>
-        </p:nvSpPr>
-        <p:spPr>
-          <a:xfrm rot="21114457">
-            <a:off x="11651521" y="1048887"/>
-            <a:ext cx="297834" cy="297834"/>
-          </a:xfrm>
-          <a:prstGeom prst="star5">
-            <a:avLst/>
-          </a:prstGeom>
-          <a:solidFill>
-            <a:srgbClr val="D0F1E6"/>
-          </a:solidFill>
-          <a:ln>
-            <a:noFill/>
-          </a:ln>
-        </p:spPr>
-        <p:txBody>
-          <a:bodyPr rtlCol="0" anchor="ctr"/>
-          <a:lstStyle/>
-          <a:p>
-            <a:pPr algn="ctr"/>
-          </a:p>
-        </p:txBody>
-      </p:sp>
-      <p:sp>
-        <p:nvSpPr>
-          <p:cNvPr id="10" name="장식"/>
-          <p:cNvSpPr/>
-          <p:nvPr/>
-        </p:nvSpPr>
-        <p:spPr>
-          <a:xfrm rot="21340827">
-            <a:off x="11563561" y="655126"/>
-            <a:ext cx="151951" cy="151951"/>
-          </a:xfrm>
-          <a:prstGeom prst="star5">
-            <a:avLst/>
-          </a:prstGeom>
-          <a:solidFill>
-            <a:srgbClr val="913B83"/>
-          </a:solidFill>
-          <a:ln>
-            <a:noFill/>
-          </a:ln>
-        </p:spPr>
-        <p:txBody>
-          <a:bodyPr rtlCol="0" anchor="ctr"/>
-          <a:lstStyle/>
-          <a:p>
-            <a:pPr algn="ctr"/>
-          </a:p>
-        </p:txBody>
-      </p:sp>
-      <p:sp>
-        <p:nvSpPr>
           <p:cNvPr id="2" name="Title 1"/>
           <p:cNvSpPr>
             <a:spLocks noGrp="1"/>
@@ -3960,7 +3570,7 @@
       </p:sp>
       <p:sp>
         <p:nvSpPr>
-          <p:cNvPr id="11" name="줄 1"/>
+          <p:cNvPr id="5" name="줄 1"/>
           <p:cNvSpPr/>
           <p:nvPr/>
         </p:nvSpPr>
@@ -3993,7 +3603,7 @@
       </p:sp>
       <p:sp>
         <p:nvSpPr>
-          <p:cNvPr id="12" name="번호 1"/>
+          <p:cNvPr id="6" name="번호 1"/>
           <p:cNvSpPr/>
           <p:nvPr/>
         </p:nvSpPr>
@@ -4036,7 +3646,7 @@
       </p:sp>
       <p:sp>
         <p:nvSpPr>
-          <p:cNvPr id="13" name="TextBox 12"/>
+          <p:cNvPr id="7" name="TextBox 6"/>
           <p:cNvSpPr txBox="1"/>
           <p:nvPr/>
         </p:nvSpPr>
@@ -4074,7 +3684,7 @@
       </p:sp>
       <p:sp>
         <p:nvSpPr>
-          <p:cNvPr id="14" name="TextBox 13"/>
+          <p:cNvPr id="8" name="TextBox 7"/>
           <p:cNvSpPr txBox="1"/>
           <p:nvPr/>
         </p:nvSpPr>
@@ -4112,7 +3722,7 @@
       </p:sp>
       <p:sp>
         <p:nvSpPr>
-          <p:cNvPr id="15" name="줄 2"/>
+          <p:cNvPr id="9" name="줄 2"/>
           <p:cNvSpPr/>
           <p:nvPr/>
         </p:nvSpPr>
@@ -4145,7 +3755,7 @@
       </p:sp>
       <p:sp>
         <p:nvSpPr>
-          <p:cNvPr id="16" name="번호 2"/>
+          <p:cNvPr id="10" name="번호 2"/>
           <p:cNvSpPr/>
           <p:nvPr/>
         </p:nvSpPr>
@@ -4188,7 +3798,7 @@
       </p:sp>
       <p:sp>
         <p:nvSpPr>
-          <p:cNvPr id="17" name="TextBox 16"/>
+          <p:cNvPr id="11" name="TextBox 10"/>
           <p:cNvSpPr txBox="1"/>
           <p:nvPr/>
         </p:nvSpPr>
@@ -4226,7 +3836,7 @@
       </p:sp>
       <p:sp>
         <p:nvSpPr>
-          <p:cNvPr id="18" name="TextBox 17"/>
+          <p:cNvPr id="12" name="TextBox 11"/>
           <p:cNvSpPr txBox="1"/>
           <p:nvPr/>
         </p:nvSpPr>
@@ -4264,7 +3874,7 @@
       </p:sp>
       <p:sp>
         <p:nvSpPr>
-          <p:cNvPr id="19" name="줄 3"/>
+          <p:cNvPr id="13" name="줄 3"/>
           <p:cNvSpPr/>
           <p:nvPr/>
         </p:nvSpPr>
@@ -4297,7 +3907,7 @@
       </p:sp>
       <p:sp>
         <p:nvSpPr>
-          <p:cNvPr id="20" name="번호 3"/>
+          <p:cNvPr id="14" name="번호 3"/>
           <p:cNvSpPr/>
           <p:nvPr/>
         </p:nvSpPr>
@@ -4340,7 +3950,7 @@
       </p:sp>
       <p:sp>
         <p:nvSpPr>
-          <p:cNvPr id="21" name="TextBox 20"/>
+          <p:cNvPr id="15" name="TextBox 14"/>
           <p:cNvSpPr txBox="1"/>
           <p:nvPr/>
         </p:nvSpPr>
@@ -4378,7 +3988,7 @@
       </p:sp>
       <p:sp>
         <p:nvSpPr>
-          <p:cNvPr id="22" name="TextBox 21"/>
+          <p:cNvPr id="16" name="TextBox 15"/>
           <p:cNvSpPr txBox="1"/>
           <p:nvPr/>
         </p:nvSpPr>
@@ -4416,7 +4026,7 @@
       </p:sp>
       <p:sp>
         <p:nvSpPr>
-          <p:cNvPr id="23" name="줄 4"/>
+          <p:cNvPr id="17" name="줄 4"/>
           <p:cNvSpPr/>
           <p:nvPr/>
         </p:nvSpPr>
@@ -4449,7 +4059,7 @@
       </p:sp>
       <p:sp>
         <p:nvSpPr>
-          <p:cNvPr id="24" name="번호 4"/>
+          <p:cNvPr id="18" name="번호 4"/>
           <p:cNvSpPr/>
           <p:nvPr/>
         </p:nvSpPr>
@@ -4492,7 +4102,7 @@
       </p:sp>
       <p:sp>
         <p:nvSpPr>
-          <p:cNvPr id="25" name="TextBox 24"/>
+          <p:cNvPr id="19" name="TextBox 18"/>
           <p:cNvSpPr txBox="1"/>
           <p:nvPr/>
         </p:nvSpPr>
@@ -4530,7 +4140,7 @@
       </p:sp>
       <p:sp>
         <p:nvSpPr>
-          <p:cNvPr id="26" name="TextBox 25"/>
+          <p:cNvPr id="20" name="TextBox 19"/>
           <p:cNvSpPr txBox="1"/>
           <p:nvPr/>
         </p:nvSpPr>
@@ -4652,180 +4262,6 @@
       </p:sp>
       <p:sp>
         <p:nvSpPr>
-          <p:cNvPr id="5" name="장식"/>
-          <p:cNvSpPr/>
-          <p:nvPr/>
-        </p:nvSpPr>
-        <p:spPr>
-          <a:xfrm rot="47073">
-            <a:off x="11538365" y="657714"/>
-            <a:ext cx="339662" cy="339662"/>
-          </a:xfrm>
-          <a:prstGeom prst="star5">
-            <a:avLst/>
-          </a:prstGeom>
-          <a:solidFill>
-            <a:srgbClr val="246B53"/>
-          </a:solidFill>
-          <a:ln>
-            <a:noFill/>
-          </a:ln>
-        </p:spPr>
-        <p:txBody>
-          <a:bodyPr rtlCol="0" anchor="ctr"/>
-          <a:lstStyle/>
-          <a:p>
-            <a:pPr algn="ctr"/>
-          </a:p>
-        </p:txBody>
-      </p:sp>
-      <p:sp>
-        <p:nvSpPr>
-          <p:cNvPr id="6" name="장식"/>
-          <p:cNvSpPr/>
-          <p:nvPr/>
-        </p:nvSpPr>
-        <p:spPr>
-          <a:xfrm rot="616000">
-            <a:off x="11746497" y="343890"/>
-            <a:ext cx="145122" cy="145122"/>
-          </a:xfrm>
-          <a:prstGeom prst="star5">
-            <a:avLst/>
-          </a:prstGeom>
-          <a:solidFill>
-            <a:srgbClr val="D0F1E6"/>
-          </a:solidFill>
-          <a:ln>
-            <a:noFill/>
-          </a:ln>
-        </p:spPr>
-        <p:txBody>
-          <a:bodyPr rtlCol="0" anchor="ctr"/>
-          <a:lstStyle/>
-          <a:p>
-            <a:pPr algn="ctr"/>
-          </a:p>
-        </p:txBody>
-      </p:sp>
-      <p:sp>
-        <p:nvSpPr>
-          <p:cNvPr id="7" name="장식"/>
-          <p:cNvSpPr/>
-          <p:nvPr/>
-        </p:nvSpPr>
-        <p:spPr>
-          <a:xfrm rot="291727">
-            <a:off x="10891282" y="851234"/>
-            <a:ext cx="259566" cy="259566"/>
-          </a:xfrm>
-          <a:prstGeom prst="star5">
-            <a:avLst/>
-          </a:prstGeom>
-          <a:solidFill>
-            <a:srgbClr val="913B83"/>
-          </a:solidFill>
-          <a:ln>
-            <a:noFill/>
-          </a:ln>
-        </p:spPr>
-        <p:txBody>
-          <a:bodyPr rtlCol="0" anchor="ctr"/>
-          <a:lstStyle/>
-          <a:p>
-            <a:pPr algn="ctr"/>
-          </a:p>
-        </p:txBody>
-      </p:sp>
-      <p:sp>
-        <p:nvSpPr>
-          <p:cNvPr id="8" name="장식"/>
-          <p:cNvSpPr/>
-          <p:nvPr/>
-        </p:nvSpPr>
-        <p:spPr>
-          <a:xfrm rot="486238">
-            <a:off x="11664833" y="1088349"/>
-            <a:ext cx="301133" cy="301133"/>
-          </a:xfrm>
-          <a:prstGeom prst="star5">
-            <a:avLst/>
-          </a:prstGeom>
-          <a:solidFill>
-            <a:srgbClr val="246B53"/>
-          </a:solidFill>
-          <a:ln>
-            <a:noFill/>
-          </a:ln>
-        </p:spPr>
-        <p:txBody>
-          <a:bodyPr rtlCol="0" anchor="ctr"/>
-          <a:lstStyle/>
-          <a:p>
-            <a:pPr algn="ctr"/>
-          </a:p>
-        </p:txBody>
-      </p:sp>
-      <p:sp>
-        <p:nvSpPr>
-          <p:cNvPr id="9" name="장식"/>
-          <p:cNvSpPr/>
-          <p:nvPr/>
-        </p:nvSpPr>
-        <p:spPr>
-          <a:xfrm rot="21114457">
-            <a:off x="11651521" y="1048887"/>
-            <a:ext cx="297834" cy="297834"/>
-          </a:xfrm>
-          <a:prstGeom prst="star5">
-            <a:avLst/>
-          </a:prstGeom>
-          <a:solidFill>
-            <a:srgbClr val="D0F1E6"/>
-          </a:solidFill>
-          <a:ln>
-            <a:noFill/>
-          </a:ln>
-        </p:spPr>
-        <p:txBody>
-          <a:bodyPr rtlCol="0" anchor="ctr"/>
-          <a:lstStyle/>
-          <a:p>
-            <a:pPr algn="ctr"/>
-          </a:p>
-        </p:txBody>
-      </p:sp>
-      <p:sp>
-        <p:nvSpPr>
-          <p:cNvPr id="10" name="장식"/>
-          <p:cNvSpPr/>
-          <p:nvPr/>
-        </p:nvSpPr>
-        <p:spPr>
-          <a:xfrm rot="21340827">
-            <a:off x="11563561" y="655126"/>
-            <a:ext cx="151951" cy="151951"/>
-          </a:xfrm>
-          <a:prstGeom prst="star5">
-            <a:avLst/>
-          </a:prstGeom>
-          <a:solidFill>
-            <a:srgbClr val="913B83"/>
-          </a:solidFill>
-          <a:ln>
-            <a:noFill/>
-          </a:ln>
-        </p:spPr>
-        <p:txBody>
-          <a:bodyPr rtlCol="0" anchor="ctr"/>
-          <a:lstStyle/>
-          <a:p>
-            <a:pPr algn="ctr"/>
-          </a:p>
-        </p:txBody>
-      </p:sp>
-      <p:sp>
-        <p:nvSpPr>
           <p:cNvPr id="2" name="Title 1"/>
           <p:cNvSpPr>
             <a:spLocks noGrp="1"/>
@@ -4864,7 +4300,7 @@
       </p:sp>
       <p:sp>
         <p:nvSpPr>
-          <p:cNvPr id="11" name="핵심 문장"/>
+          <p:cNvPr id="5" name="핵심 문장"/>
           <p:cNvSpPr txBox="1"/>
           <p:nvPr/>
         </p:nvSpPr>
@@ -4902,7 +4338,7 @@
       </p:sp>
       <p:sp>
         <p:nvSpPr>
-          <p:cNvPr id="12" name="카드 1"/>
+          <p:cNvPr id="6" name="카드 1"/>
           <p:cNvSpPr/>
           <p:nvPr/>
         </p:nvSpPr>
@@ -4935,7 +4371,7 @@
       </p:sp>
       <p:sp>
         <p:nvSpPr>
-          <p:cNvPr id="13" name="번호 1"/>
+          <p:cNvPr id="7" name="번호 1"/>
           <p:cNvSpPr/>
           <p:nvPr/>
         </p:nvSpPr>
@@ -4978,7 +4414,7 @@
       </p:sp>
       <p:sp>
         <p:nvSpPr>
-          <p:cNvPr id="14" name="TextBox 13"/>
+          <p:cNvPr id="8" name="TextBox 7"/>
           <p:cNvSpPr txBox="1"/>
           <p:nvPr/>
         </p:nvSpPr>
@@ -5016,7 +4452,7 @@
       </p:sp>
       <p:sp>
         <p:nvSpPr>
-          <p:cNvPr id="15" name="TextBox 14"/>
+          <p:cNvPr id="9" name="TextBox 8"/>
           <p:cNvSpPr txBox="1"/>
           <p:nvPr/>
         </p:nvSpPr>
@@ -5069,7 +4505,7 @@
       </p:sp>
       <p:sp>
         <p:nvSpPr>
-          <p:cNvPr id="16" name="카드 2"/>
+          <p:cNvPr id="10" name="카드 2"/>
           <p:cNvSpPr/>
           <p:nvPr/>
         </p:nvSpPr>
@@ -5102,7 +4538,7 @@
       </p:sp>
       <p:sp>
         <p:nvSpPr>
-          <p:cNvPr id="17" name="번호 2"/>
+          <p:cNvPr id="11" name="번호 2"/>
           <p:cNvSpPr/>
           <p:nvPr/>
         </p:nvSpPr>
@@ -5145,7 +4581,7 @@
       </p:sp>
       <p:sp>
         <p:nvSpPr>
-          <p:cNvPr id="18" name="TextBox 17"/>
+          <p:cNvPr id="12" name="TextBox 11"/>
           <p:cNvSpPr txBox="1"/>
           <p:nvPr/>
         </p:nvSpPr>
@@ -5183,7 +4619,7 @@
       </p:sp>
       <p:sp>
         <p:nvSpPr>
-          <p:cNvPr id="19" name="TextBox 18"/>
+          <p:cNvPr id="13" name="TextBox 12"/>
           <p:cNvSpPr txBox="1"/>
           <p:nvPr/>
         </p:nvSpPr>
@@ -5236,7 +4672,7 @@
       </p:sp>
       <p:sp>
         <p:nvSpPr>
-          <p:cNvPr id="20" name="카드 3"/>
+          <p:cNvPr id="14" name="카드 3"/>
           <p:cNvSpPr/>
           <p:nvPr/>
         </p:nvSpPr>
@@ -5269,7 +4705,7 @@
       </p:sp>
       <p:sp>
         <p:nvSpPr>
-          <p:cNvPr id="21" name="번호 3"/>
+          <p:cNvPr id="15" name="번호 3"/>
           <p:cNvSpPr/>
           <p:nvPr/>
         </p:nvSpPr>
@@ -5312,7 +4748,7 @@
       </p:sp>
       <p:sp>
         <p:nvSpPr>
-          <p:cNvPr id="22" name="TextBox 21"/>
+          <p:cNvPr id="16" name="TextBox 15"/>
           <p:cNvSpPr txBox="1"/>
           <p:nvPr/>
         </p:nvSpPr>
@@ -5350,7 +4786,7 @@
       </p:sp>
       <p:sp>
         <p:nvSpPr>
-          <p:cNvPr id="23" name="TextBox 22"/>
+          <p:cNvPr id="17" name="TextBox 16"/>
           <p:cNvSpPr txBox="1"/>
           <p:nvPr/>
         </p:nvSpPr>
@@ -5487,180 +4923,6 @@
       </p:sp>
       <p:sp>
         <p:nvSpPr>
-          <p:cNvPr id="5" name="장식"/>
-          <p:cNvSpPr/>
-          <p:nvPr/>
-        </p:nvSpPr>
-        <p:spPr>
-          <a:xfrm rot="47073">
-            <a:off x="11538365" y="657714"/>
-            <a:ext cx="339662" cy="339662"/>
-          </a:xfrm>
-          <a:prstGeom prst="star5">
-            <a:avLst/>
-          </a:prstGeom>
-          <a:solidFill>
-            <a:srgbClr val="246B53"/>
-          </a:solidFill>
-          <a:ln>
-            <a:noFill/>
-          </a:ln>
-        </p:spPr>
-        <p:txBody>
-          <a:bodyPr rtlCol="0" anchor="ctr"/>
-          <a:lstStyle/>
-          <a:p>
-            <a:pPr algn="ctr"/>
-          </a:p>
-        </p:txBody>
-      </p:sp>
-      <p:sp>
-        <p:nvSpPr>
-          <p:cNvPr id="6" name="장식"/>
-          <p:cNvSpPr/>
-          <p:nvPr/>
-        </p:nvSpPr>
-        <p:spPr>
-          <a:xfrm rot="616000">
-            <a:off x="11746497" y="343890"/>
-            <a:ext cx="145122" cy="145122"/>
-          </a:xfrm>
-          <a:prstGeom prst="star5">
-            <a:avLst/>
-          </a:prstGeom>
-          <a:solidFill>
-            <a:srgbClr val="D0F1E6"/>
-          </a:solidFill>
-          <a:ln>
-            <a:noFill/>
-          </a:ln>
-        </p:spPr>
-        <p:txBody>
-          <a:bodyPr rtlCol="0" anchor="ctr"/>
-          <a:lstStyle/>
-          <a:p>
-            <a:pPr algn="ctr"/>
-          </a:p>
-        </p:txBody>
-      </p:sp>
-      <p:sp>
-        <p:nvSpPr>
-          <p:cNvPr id="7" name="장식"/>
-          <p:cNvSpPr/>
-          <p:nvPr/>
-        </p:nvSpPr>
-        <p:spPr>
-          <a:xfrm rot="291727">
-            <a:off x="10891282" y="851234"/>
-            <a:ext cx="259566" cy="259566"/>
-          </a:xfrm>
-          <a:prstGeom prst="star5">
-            <a:avLst/>
-          </a:prstGeom>
-          <a:solidFill>
-            <a:srgbClr val="913B83"/>
-          </a:solidFill>
-          <a:ln>
-            <a:noFill/>
-          </a:ln>
-        </p:spPr>
-        <p:txBody>
-          <a:bodyPr rtlCol="0" anchor="ctr"/>
-          <a:lstStyle/>
-          <a:p>
-            <a:pPr algn="ctr"/>
-          </a:p>
-        </p:txBody>
-      </p:sp>
-      <p:sp>
-        <p:nvSpPr>
-          <p:cNvPr id="8" name="장식"/>
-          <p:cNvSpPr/>
-          <p:nvPr/>
-        </p:nvSpPr>
-        <p:spPr>
-          <a:xfrm rot="486238">
-            <a:off x="11664833" y="1088349"/>
-            <a:ext cx="301133" cy="301133"/>
-          </a:xfrm>
-          <a:prstGeom prst="star5">
-            <a:avLst/>
-          </a:prstGeom>
-          <a:solidFill>
-            <a:srgbClr val="246B53"/>
-          </a:solidFill>
-          <a:ln>
-            <a:noFill/>
-          </a:ln>
-        </p:spPr>
-        <p:txBody>
-          <a:bodyPr rtlCol="0" anchor="ctr"/>
-          <a:lstStyle/>
-          <a:p>
-            <a:pPr algn="ctr"/>
-          </a:p>
-        </p:txBody>
-      </p:sp>
-      <p:sp>
-        <p:nvSpPr>
-          <p:cNvPr id="9" name="장식"/>
-          <p:cNvSpPr/>
-          <p:nvPr/>
-        </p:nvSpPr>
-        <p:spPr>
-          <a:xfrm rot="21114457">
-            <a:off x="11651521" y="1048887"/>
-            <a:ext cx="297834" cy="297834"/>
-          </a:xfrm>
-          <a:prstGeom prst="star5">
-            <a:avLst/>
-          </a:prstGeom>
-          <a:solidFill>
-            <a:srgbClr val="D0F1E6"/>
-          </a:solidFill>
-          <a:ln>
-            <a:noFill/>
-          </a:ln>
-        </p:spPr>
-        <p:txBody>
-          <a:bodyPr rtlCol="0" anchor="ctr"/>
-          <a:lstStyle/>
-          <a:p>
-            <a:pPr algn="ctr"/>
-          </a:p>
-        </p:txBody>
-      </p:sp>
-      <p:sp>
-        <p:nvSpPr>
-          <p:cNvPr id="10" name="장식"/>
-          <p:cNvSpPr/>
-          <p:nvPr/>
-        </p:nvSpPr>
-        <p:spPr>
-          <a:xfrm rot="21340827">
-            <a:off x="11563561" y="655126"/>
-            <a:ext cx="151951" cy="151951"/>
-          </a:xfrm>
-          <a:prstGeom prst="star5">
-            <a:avLst/>
-          </a:prstGeom>
-          <a:solidFill>
-            <a:srgbClr val="913B83"/>
-          </a:solidFill>
-          <a:ln>
-            <a:noFill/>
-          </a:ln>
-        </p:spPr>
-        <p:txBody>
-          <a:bodyPr rtlCol="0" anchor="ctr"/>
-          <a:lstStyle/>
-          <a:p>
-            <a:pPr algn="ctr"/>
-          </a:p>
-        </p:txBody>
-      </p:sp>
-      <p:sp>
-        <p:nvSpPr>
           <p:cNvPr id="2" name="Title 1"/>
           <p:cNvSpPr>
             <a:spLocks noGrp="1"/>
@@ -5699,7 +4961,7 @@
       </p:sp>
       <p:sp>
         <p:nvSpPr>
-          <p:cNvPr id="11" name="왼쪽 칸"/>
+          <p:cNvPr id="5" name="왼쪽 칸"/>
           <p:cNvSpPr/>
           <p:nvPr/>
         </p:nvSpPr>
@@ -5732,7 +4994,7 @@
       </p:sp>
       <p:sp>
         <p:nvSpPr>
-          <p:cNvPr id="12" name="칸 제목 바"/>
+          <p:cNvPr id="6" name="칸 제목 바"/>
           <p:cNvSpPr/>
           <p:nvPr/>
         </p:nvSpPr>
@@ -5763,7 +5025,7 @@
       </p:sp>
       <p:sp>
         <p:nvSpPr>
-          <p:cNvPr id="13" name="TextBox 12"/>
+          <p:cNvPr id="7" name="TextBox 6"/>
           <p:cNvSpPr txBox="1"/>
           <p:nvPr/>
         </p:nvSpPr>
@@ -5801,7 +5063,7 @@
       </p:sp>
       <p:sp>
         <p:nvSpPr>
-          <p:cNvPr id="14" name="TextBox 13"/>
+          <p:cNvPr id="8" name="TextBox 7"/>
           <p:cNvSpPr txBox="1"/>
           <p:nvPr/>
         </p:nvSpPr>
@@ -5884,7 +5146,7 @@
       </p:sp>
       <p:sp>
         <p:nvSpPr>
-          <p:cNvPr id="15" name="오른쪽 칸"/>
+          <p:cNvPr id="9" name="오른쪽 칸"/>
           <p:cNvSpPr/>
           <p:nvPr/>
         </p:nvSpPr>
@@ -5917,7 +5179,7 @@
       </p:sp>
       <p:sp>
         <p:nvSpPr>
-          <p:cNvPr id="16" name="칸 제목 바"/>
+          <p:cNvPr id="10" name="칸 제목 바"/>
           <p:cNvSpPr/>
           <p:nvPr/>
         </p:nvSpPr>
@@ -5948,7 +5210,7 @@
       </p:sp>
       <p:sp>
         <p:nvSpPr>
-          <p:cNvPr id="17" name="TextBox 16"/>
+          <p:cNvPr id="11" name="TextBox 10"/>
           <p:cNvSpPr txBox="1"/>
           <p:nvPr/>
         </p:nvSpPr>
@@ -5986,7 +5248,7 @@
       </p:sp>
       <p:sp>
         <p:nvSpPr>
-          <p:cNvPr id="18" name="TextBox 17"/>
+          <p:cNvPr id="12" name="TextBox 11"/>
           <p:cNvSpPr txBox="1"/>
           <p:nvPr/>
         </p:nvSpPr>
@@ -6153,180 +5415,6 @@
       </p:sp>
       <p:sp>
         <p:nvSpPr>
-          <p:cNvPr id="5" name="장식"/>
-          <p:cNvSpPr/>
-          <p:nvPr/>
-        </p:nvSpPr>
-        <p:spPr>
-          <a:xfrm rot="47073">
-            <a:off x="11538365" y="657714"/>
-            <a:ext cx="339662" cy="339662"/>
-          </a:xfrm>
-          <a:prstGeom prst="star5">
-            <a:avLst/>
-          </a:prstGeom>
-          <a:solidFill>
-            <a:srgbClr val="246B53"/>
-          </a:solidFill>
-          <a:ln>
-            <a:noFill/>
-          </a:ln>
-        </p:spPr>
-        <p:txBody>
-          <a:bodyPr rtlCol="0" anchor="ctr"/>
-          <a:lstStyle/>
-          <a:p>
-            <a:pPr algn="ctr"/>
-          </a:p>
-        </p:txBody>
-      </p:sp>
-      <p:sp>
-        <p:nvSpPr>
-          <p:cNvPr id="6" name="장식"/>
-          <p:cNvSpPr/>
-          <p:nvPr/>
-        </p:nvSpPr>
-        <p:spPr>
-          <a:xfrm rot="616000">
-            <a:off x="11746497" y="343890"/>
-            <a:ext cx="145122" cy="145122"/>
-          </a:xfrm>
-          <a:prstGeom prst="star5">
-            <a:avLst/>
-          </a:prstGeom>
-          <a:solidFill>
-            <a:srgbClr val="D0F1E6"/>
-          </a:solidFill>
-          <a:ln>
-            <a:noFill/>
-          </a:ln>
-        </p:spPr>
-        <p:txBody>
-          <a:bodyPr rtlCol="0" anchor="ctr"/>
-          <a:lstStyle/>
-          <a:p>
-            <a:pPr algn="ctr"/>
-          </a:p>
-        </p:txBody>
-      </p:sp>
-      <p:sp>
-        <p:nvSpPr>
-          <p:cNvPr id="7" name="장식"/>
-          <p:cNvSpPr/>
-          <p:nvPr/>
-        </p:nvSpPr>
-        <p:spPr>
-          <a:xfrm rot="291727">
-            <a:off x="10891282" y="851234"/>
-            <a:ext cx="259566" cy="259566"/>
-          </a:xfrm>
-          <a:prstGeom prst="star5">
-            <a:avLst/>
-          </a:prstGeom>
-          <a:solidFill>
-            <a:srgbClr val="913B83"/>
-          </a:solidFill>
-          <a:ln>
-            <a:noFill/>
-          </a:ln>
-        </p:spPr>
-        <p:txBody>
-          <a:bodyPr rtlCol="0" anchor="ctr"/>
-          <a:lstStyle/>
-          <a:p>
-            <a:pPr algn="ctr"/>
-          </a:p>
-        </p:txBody>
-      </p:sp>
-      <p:sp>
-        <p:nvSpPr>
-          <p:cNvPr id="8" name="장식"/>
-          <p:cNvSpPr/>
-          <p:nvPr/>
-        </p:nvSpPr>
-        <p:spPr>
-          <a:xfrm rot="486238">
-            <a:off x="11664833" y="1088349"/>
-            <a:ext cx="301133" cy="301133"/>
-          </a:xfrm>
-          <a:prstGeom prst="star5">
-            <a:avLst/>
-          </a:prstGeom>
-          <a:solidFill>
-            <a:srgbClr val="246B53"/>
-          </a:solidFill>
-          <a:ln>
-            <a:noFill/>
-          </a:ln>
-        </p:spPr>
-        <p:txBody>
-          <a:bodyPr rtlCol="0" anchor="ctr"/>
-          <a:lstStyle/>
-          <a:p>
-            <a:pPr algn="ctr"/>
-          </a:p>
-        </p:txBody>
-      </p:sp>
-      <p:sp>
-        <p:nvSpPr>
-          <p:cNvPr id="9" name="장식"/>
-          <p:cNvSpPr/>
-          <p:nvPr/>
-        </p:nvSpPr>
-        <p:spPr>
-          <a:xfrm rot="21114457">
-            <a:off x="11651521" y="1048887"/>
-            <a:ext cx="297834" cy="297834"/>
-          </a:xfrm>
-          <a:prstGeom prst="star5">
-            <a:avLst/>
-          </a:prstGeom>
-          <a:solidFill>
-            <a:srgbClr val="D0F1E6"/>
-          </a:solidFill>
-          <a:ln>
-            <a:noFill/>
-          </a:ln>
-        </p:spPr>
-        <p:txBody>
-          <a:bodyPr rtlCol="0" anchor="ctr"/>
-          <a:lstStyle/>
-          <a:p>
-            <a:pPr algn="ctr"/>
-          </a:p>
-        </p:txBody>
-      </p:sp>
-      <p:sp>
-        <p:nvSpPr>
-          <p:cNvPr id="10" name="장식"/>
-          <p:cNvSpPr/>
-          <p:nvPr/>
-        </p:nvSpPr>
-        <p:spPr>
-          <a:xfrm rot="21340827">
-            <a:off x="11563561" y="655126"/>
-            <a:ext cx="151951" cy="151951"/>
-          </a:xfrm>
-          <a:prstGeom prst="star5">
-            <a:avLst/>
-          </a:prstGeom>
-          <a:solidFill>
-            <a:srgbClr val="913B83"/>
-          </a:solidFill>
-          <a:ln>
-            <a:noFill/>
-          </a:ln>
-        </p:spPr>
-        <p:txBody>
-          <a:bodyPr rtlCol="0" anchor="ctr"/>
-          <a:lstStyle/>
-          <a:p>
-            <a:pPr algn="ctr"/>
-          </a:p>
-        </p:txBody>
-      </p:sp>
-      <p:sp>
-        <p:nvSpPr>
           <p:cNvPr id="2" name="Title 1"/>
           <p:cNvSpPr>
             <a:spLocks noGrp="1"/>
@@ -6365,7 +5453,7 @@
       </p:sp>
       <p:graphicFrame>
         <p:nvGraphicFramePr>
-          <p:cNvPr id="11" name="표"/>
+          <p:cNvPr id="5" name="표"/>
           <p:cNvGraphicFramePr>
             <a:graphicFrameLocks noGrp="1"/>
           </p:cNvGraphicFramePr>
@@ -7518,14 +6606,6 @@
 <file path=ppt/slides/slide6.xml><?xml version="1.0" encoding="utf-8"?>
 <p:sld xmlns:a="http://schemas.openxmlformats.org/drawingml/2006/main" xmlns:p="http://schemas.openxmlformats.org/presentationml/2006/main" xmlns:r="http://schemas.openxmlformats.org/officeDocument/2006/relationships">
   <p:cSld>
-    <p:bg>
-      <p:bgPr>
-        <a:solidFill>
-          <a:srgbClr val="FFFFFF"/>
-        </a:solidFill>
-        <a:effectLst/>
-      </p:bgPr>
-    </p:bg>
     <p:spTree>
       <p:nvGrpSpPr>
         <p:cNvPr id="1" name=""/>
@@ -7533,238 +6613,30 @@
         <p:nvPr/>
       </p:nvGrpSpPr>
       <p:grpSpPr/>
-      <p:sp>
-        <p:nvSpPr>
-          <p:cNvPr id="3" name="장식"/>
-          <p:cNvSpPr/>
+      <p:pic>
+        <p:nvPicPr>
+          <p:cNvPr id="3" name="표지 그림" descr="talk-19.jpg"/>
+          <p:cNvPicPr>
+            <a:picLocks noChangeAspect="1"/>
+          </p:cNvPicPr>
           <p:nvPr/>
-        </p:nvSpPr>
-        <p:spPr>
-          <a:xfrm>
-            <a:off x="7071183" y="-1714500"/>
-            <a:ext cx="7886700" cy="7886700"/>
-          </a:xfrm>
-          <a:prstGeom prst="ellipse">
+        </p:nvPicPr>
+        <p:blipFill>
+          <a:blip r:embed="rId2"/>
+          <a:stretch>
+            <a:fillRect/>
+          </a:stretch>
+        </p:blipFill>
+        <p:spPr>
+          <a:xfrm>
+            <a:off x="0" y="0"/>
+            <a:ext cx="12191695" cy="6858000"/>
+          </a:xfrm>
+          <a:prstGeom prst="rect">
             <a:avLst/>
           </a:prstGeom>
-          <a:solidFill>
-            <a:srgbClr val="D0F1E6"/>
-          </a:solidFill>
-          <a:ln>
-            <a:noFill/>
-          </a:ln>
-        </p:spPr>
-        <p:txBody>
-          <a:bodyPr rtlCol="0" anchor="ctr"/>
-          <a:lstStyle/>
-          <a:p>
-            <a:pPr algn="ctr"/>
-          </a:p>
-        </p:txBody>
-      </p:sp>
-      <p:sp>
-        <p:nvSpPr>
-          <p:cNvPr id="4" name="장식"/>
-          <p:cNvSpPr/>
-          <p:nvPr/>
-        </p:nvSpPr>
-        <p:spPr>
-          <a:xfrm>
-            <a:off x="9509522" y="3977639"/>
-            <a:ext cx="3429000" cy="3429000"/>
-          </a:xfrm>
-          <a:prstGeom prst="ellipse">
-            <a:avLst/>
-          </a:prstGeom>
-          <a:solidFill>
-            <a:srgbClr val="246B53"/>
-          </a:solidFill>
-          <a:ln>
-            <a:noFill/>
-          </a:ln>
-        </p:spPr>
-        <p:txBody>
-          <a:bodyPr rtlCol="0" anchor="ctr"/>
-          <a:lstStyle/>
-          <a:p>
-            <a:pPr algn="ctr"/>
-          </a:p>
-        </p:txBody>
-      </p:sp>
-      <p:sp>
-        <p:nvSpPr>
-          <p:cNvPr id="5" name="장식"/>
-          <p:cNvSpPr/>
-          <p:nvPr/>
-        </p:nvSpPr>
-        <p:spPr>
-          <a:xfrm rot="47073">
-            <a:off x="10370041" y="1303642"/>
-            <a:ext cx="972669" cy="972669"/>
-          </a:xfrm>
-          <a:prstGeom prst="star5">
-            <a:avLst/>
-          </a:prstGeom>
-          <a:solidFill>
-            <a:srgbClr val="246B53"/>
-          </a:solidFill>
-          <a:ln>
-            <a:noFill/>
-          </a:ln>
-        </p:spPr>
-        <p:txBody>
-          <a:bodyPr rtlCol="0" anchor="ctr"/>
-          <a:lstStyle/>
-          <a:p>
-            <a:pPr algn="ctr"/>
-          </a:p>
-        </p:txBody>
-      </p:sp>
-      <p:sp>
-        <p:nvSpPr>
-          <p:cNvPr id="6" name="장식"/>
-          <p:cNvSpPr/>
-          <p:nvPr/>
-        </p:nvSpPr>
-        <p:spPr>
-          <a:xfrm rot="616000">
-            <a:off x="10966056" y="404965"/>
-            <a:ext cx="415579" cy="415579"/>
-          </a:xfrm>
-          <a:prstGeom prst="star5">
-            <a:avLst/>
-          </a:prstGeom>
-          <a:solidFill>
-            <a:srgbClr val="D0F1E6"/>
-          </a:solidFill>
-          <a:ln>
-            <a:noFill/>
-          </a:ln>
-        </p:spPr>
-        <p:txBody>
-          <a:bodyPr rtlCol="0" anchor="ctr"/>
-          <a:lstStyle/>
-          <a:p>
-            <a:pPr algn="ctr"/>
-          </a:p>
-        </p:txBody>
-      </p:sp>
-      <p:sp>
-        <p:nvSpPr>
-          <p:cNvPr id="7" name="장식"/>
-          <p:cNvSpPr/>
-          <p:nvPr/>
-        </p:nvSpPr>
-        <p:spPr>
-          <a:xfrm rot="291727">
-            <a:off x="8517029" y="1857812"/>
-            <a:ext cx="743304" cy="743304"/>
-          </a:xfrm>
-          <a:prstGeom prst="star5">
-            <a:avLst/>
-          </a:prstGeom>
-          <a:solidFill>
-            <a:srgbClr val="913B83"/>
-          </a:solidFill>
-          <a:ln>
-            <a:noFill/>
-          </a:ln>
-        </p:spPr>
-        <p:txBody>
-          <a:bodyPr rtlCol="0" anchor="ctr"/>
-          <a:lstStyle/>
-          <a:p>
-            <a:pPr algn="ctr"/>
-          </a:p>
-        </p:txBody>
-      </p:sp>
-      <p:sp>
-        <p:nvSpPr>
-          <p:cNvPr id="8" name="장식"/>
-          <p:cNvSpPr/>
-          <p:nvPr/>
-        </p:nvSpPr>
-        <p:spPr>
-          <a:xfrm rot="486238">
-            <a:off x="10732199" y="2536825"/>
-            <a:ext cx="862336" cy="862336"/>
-          </a:xfrm>
-          <a:prstGeom prst="star5">
-            <a:avLst/>
-          </a:prstGeom>
-          <a:solidFill>
-            <a:srgbClr val="246B53"/>
-          </a:solidFill>
-          <a:ln>
-            <a:noFill/>
-          </a:ln>
-        </p:spPr>
-        <p:txBody>
-          <a:bodyPr rtlCol="0" anchor="ctr"/>
-          <a:lstStyle/>
-          <a:p>
-            <a:pPr algn="ctr"/>
-          </a:p>
-        </p:txBody>
-      </p:sp>
-      <p:sp>
-        <p:nvSpPr>
-          <p:cNvPr id="9" name="장식"/>
-          <p:cNvSpPr/>
-          <p:nvPr/>
-        </p:nvSpPr>
-        <p:spPr>
-          <a:xfrm rot="21114457">
-            <a:off x="10694079" y="2423818"/>
-            <a:ext cx="852890" cy="852890"/>
-          </a:xfrm>
-          <a:prstGeom prst="star5">
-            <a:avLst/>
-          </a:prstGeom>
-          <a:solidFill>
-            <a:srgbClr val="D0F1E6"/>
-          </a:solidFill>
-          <a:ln>
-            <a:noFill/>
-          </a:ln>
-        </p:spPr>
-        <p:txBody>
-          <a:bodyPr rtlCol="0" anchor="ctr"/>
-          <a:lstStyle/>
-          <a:p>
-            <a:pPr algn="ctr"/>
-          </a:p>
-        </p:txBody>
-      </p:sp>
-      <p:sp>
-        <p:nvSpPr>
-          <p:cNvPr id="10" name="장식"/>
-          <p:cNvSpPr/>
-          <p:nvPr/>
-        </p:nvSpPr>
-        <p:spPr>
-          <a:xfrm rot="21340827">
-            <a:off x="10442192" y="1296230"/>
-            <a:ext cx="435134" cy="435134"/>
-          </a:xfrm>
-          <a:prstGeom prst="star5">
-            <a:avLst/>
-          </a:prstGeom>
-          <a:solidFill>
-            <a:srgbClr val="913B83"/>
-          </a:solidFill>
-          <a:ln>
-            <a:noFill/>
-          </a:ln>
-        </p:spPr>
-        <p:txBody>
-          <a:bodyPr rtlCol="0" anchor="ctr"/>
-          <a:lstStyle/>
-          <a:p>
-            <a:pPr algn="ctr"/>
-          </a:p>
-        </p:txBody>
-      </p:sp>
+        </p:spPr>
+      </p:pic>
       <p:sp>
         <p:nvSpPr>
           <p:cNvPr id="2" name="Title 1"/>
@@ -7778,7 +6650,7 @@
         <p:spPr>
           <a:xfrm>
             <a:off x="853418" y="2057400"/>
-            <a:ext cx="6705432" cy="1463040"/>
+            <a:ext cx="6095847" cy="1554480"/>
           </a:xfrm>
         </p:spPr>
         <p:txBody>
@@ -7805,13 +6677,13 @@
       </p:sp>
       <p:sp>
         <p:nvSpPr>
-          <p:cNvPr id="11" name="한 줄 문구"/>
+          <p:cNvPr id="4" name="한 줄 문구"/>
           <p:cNvSpPr txBox="1"/>
           <p:nvPr/>
         </p:nvSpPr>
         <p:spPr>
           <a:xfrm>
-            <a:off x="853418" y="3611880"/>
+            <a:off x="853418" y="3749039"/>
             <a:ext cx="6095847" cy="822960"/>
           </a:xfrm>
           <a:prstGeom prst="rect">
@@ -7836,20 +6708,20 @@
                   <a:srgbClr val="143D30"/>
                 </a:solidFill>
               </a:rPr>
-              <a:t>들어 주셔서 고맙습니다</a:t>
-            </a:r>
-          </a:p>
-        </p:txBody>
-      </p:sp>
-      <p:sp>
-        <p:nvSpPr>
-          <p:cNvPr id="12" name="안내 문구"/>
+              <a:t>끝까지 들어 주셔서 고맙습니다</a:t>
+            </a:r>
+          </a:p>
+        </p:txBody>
+      </p:sp>
+      <p:sp>
+        <p:nvSpPr>
+          <p:cNvPr id="5" name="안내 문구"/>
           <p:cNvSpPr txBox="1"/>
           <p:nvPr/>
         </p:nvSpPr>
         <p:spPr>
           <a:xfrm>
-            <a:off x="853418" y="4480560"/>
+            <a:off x="853418" y="4617720"/>
             <a:ext cx="6095847" cy="914400"/>
           </a:xfrm>
           <a:prstGeom prst="rect">

--- a/public/fun/pack/pptx/talk/발표템플릿_19_모임·동호회소개_반딧불마을.pptx
+++ b/public/fun/pack/pptx/talk/발표템플릿_19_모임·동호회소개_반딧불마을.pptx
@@ -3347,7 +3347,7 @@
             <a:r>
               <a:rPr sz="3600" b="1" i="0">
                 <a:solidFill>
-                  <a:srgbClr val="143D30"/>
+                  <a:srgbClr val="115F45"/>
                 </a:solidFill>
               </a:rPr>
               <a:t>발표 제목을 입력하세요</a:t>
@@ -3385,7 +3385,7 @@
             <a:r>
               <a:rPr sz="1700" b="0" i="1">
                 <a:solidFill>
-                  <a:srgbClr val="143D30"/>
+                  <a:srgbClr val="115F45"/>
                 </a:solidFill>
               </a:rPr>
               <a:t>한 달에 한 번, 이렇게 모입니다</a:t>
@@ -3487,7 +3487,7 @@
             <a:avLst/>
           </a:prstGeom>
           <a:solidFill>
-            <a:srgbClr val="D0F1E6"/>
+            <a:srgbClr val="D1FAEC"/>
           </a:solidFill>
           <a:ln>
             <a:noFill/>
@@ -3516,7 +3516,7 @@
             <a:avLst/>
           </a:prstGeom>
           <a:solidFill>
-            <a:srgbClr val="246B53"/>
+            <a:srgbClr val="26C590"/>
           </a:solidFill>
           <a:ln>
             <a:noFill/>
@@ -3560,7 +3560,7 @@
             <a:r>
               <a:rPr sz="3000" b="1" i="0">
                 <a:solidFill>
-                  <a:srgbClr val="143D30"/>
+                  <a:srgbClr val="115F45"/>
                 </a:solidFill>
               </a:rPr>
               <a:t>목차</a:t>
@@ -3585,11 +3585,11 @@
             </a:avLst>
           </a:prstGeom>
           <a:solidFill>
-            <a:srgbClr val="F0FAF6"/>
+            <a:srgbClr val="EEFCF7"/>
           </a:solidFill>
           <a:ln w="12700">
             <a:solidFill>
-              <a:srgbClr val="D0F1E6"/>
+              <a:srgbClr val="D1FAEC"/>
             </a:solidFill>
           </a:ln>
         </p:spPr>
@@ -3616,7 +3616,7 @@
             <a:avLst/>
           </a:prstGeom>
           <a:solidFill>
-            <a:srgbClr val="246B53"/>
+            <a:srgbClr val="26C590"/>
           </a:solidFill>
           <a:ln>
             <a:noFill/>
@@ -3674,7 +3674,7 @@
             <a:r>
               <a:rPr sz="1800" b="1" i="0">
                 <a:solidFill>
-                  <a:srgbClr val="143D30"/>
+                  <a:srgbClr val="115F45"/>
                 </a:solidFill>
               </a:rPr>
               <a:t>우리 모임 소개</a:t>
@@ -3737,11 +3737,11 @@
             </a:avLst>
           </a:prstGeom>
           <a:solidFill>
-            <a:srgbClr val="F0FAF6"/>
+            <a:srgbClr val="EEFCF7"/>
           </a:solidFill>
           <a:ln w="12700">
             <a:solidFill>
-              <a:srgbClr val="D0F1E6"/>
+              <a:srgbClr val="D1FAEC"/>
             </a:solidFill>
           </a:ln>
         </p:spPr>
@@ -3768,7 +3768,7 @@
             <a:avLst/>
           </a:prstGeom>
           <a:solidFill>
-            <a:srgbClr val="246B53"/>
+            <a:srgbClr val="26C590"/>
           </a:solidFill>
           <a:ln>
             <a:noFill/>
@@ -3826,7 +3826,7 @@
             <a:r>
               <a:rPr sz="1800" b="1" i="0">
                 <a:solidFill>
-                  <a:srgbClr val="143D30"/>
+                  <a:srgbClr val="115F45"/>
                 </a:solidFill>
               </a:rPr>
               <a:t>활동 이야기</a:t>
@@ -3889,11 +3889,11 @@
             </a:avLst>
           </a:prstGeom>
           <a:solidFill>
-            <a:srgbClr val="F0FAF6"/>
+            <a:srgbClr val="EEFCF7"/>
           </a:solidFill>
           <a:ln w="12700">
             <a:solidFill>
-              <a:srgbClr val="D0F1E6"/>
+              <a:srgbClr val="D1FAEC"/>
             </a:solidFill>
           </a:ln>
         </p:spPr>
@@ -3920,7 +3920,7 @@
             <a:avLst/>
           </a:prstGeom>
           <a:solidFill>
-            <a:srgbClr val="246B53"/>
+            <a:srgbClr val="26C590"/>
           </a:solidFill>
           <a:ln>
             <a:noFill/>
@@ -3978,7 +3978,7 @@
             <a:r>
               <a:rPr sz="1800" b="1" i="0">
                 <a:solidFill>
-                  <a:srgbClr val="143D30"/>
+                  <a:srgbClr val="115F45"/>
                 </a:solidFill>
               </a:rPr>
               <a:t>함께하는 사람들</a:t>
@@ -4041,11 +4041,11 @@
             </a:avLst>
           </a:prstGeom>
           <a:solidFill>
-            <a:srgbClr val="F0FAF6"/>
+            <a:srgbClr val="EEFCF7"/>
           </a:solidFill>
           <a:ln w="12700">
             <a:solidFill>
-              <a:srgbClr val="D0F1E6"/>
+              <a:srgbClr val="D1FAEC"/>
             </a:solidFill>
           </a:ln>
         </p:spPr>
@@ -4072,7 +4072,7 @@
             <a:avLst/>
           </a:prstGeom>
           <a:solidFill>
-            <a:srgbClr val="246B53"/>
+            <a:srgbClr val="26C590"/>
           </a:solidFill>
           <a:ln>
             <a:noFill/>
@@ -4130,7 +4130,7 @@
             <a:r>
               <a:rPr sz="1800" b="1" i="0">
                 <a:solidFill>
-                  <a:srgbClr val="143D30"/>
+                  <a:srgbClr val="115F45"/>
                 </a:solidFill>
               </a:rPr>
               <a:t>참여 방법</a:t>
@@ -4217,7 +4217,7 @@
             <a:avLst/>
           </a:prstGeom>
           <a:solidFill>
-            <a:srgbClr val="D0F1E6"/>
+            <a:srgbClr val="D1FAEC"/>
           </a:solidFill>
           <a:ln>
             <a:noFill/>
@@ -4246,7 +4246,7 @@
             <a:avLst/>
           </a:prstGeom>
           <a:solidFill>
-            <a:srgbClr val="246B53"/>
+            <a:srgbClr val="26C590"/>
           </a:solidFill>
           <a:ln>
             <a:noFill/>
@@ -4290,7 +4290,7 @@
             <a:r>
               <a:rPr sz="3000" b="1" i="0">
                 <a:solidFill>
-                  <a:srgbClr val="143D30"/>
+                  <a:srgbClr val="115F45"/>
                 </a:solidFill>
               </a:rPr>
               <a:t>핵심 메시지</a:t>
@@ -4328,7 +4328,7 @@
             <a:r>
               <a:rPr sz="2600" b="1" i="0">
                 <a:solidFill>
-                  <a:srgbClr val="143D30"/>
+                  <a:srgbClr val="115F45"/>
                 </a:solidFill>
               </a:rPr>
               <a:t>한 문장으로 말하면 — 여기에 핵심 메시지를 입력하세요</a:t>
@@ -4353,11 +4353,11 @@
             </a:avLst>
           </a:prstGeom>
           <a:solidFill>
-            <a:srgbClr val="F0FAF6"/>
+            <a:srgbClr val="EEFCF7"/>
           </a:solidFill>
           <a:ln w="15875">
             <a:solidFill>
-              <a:srgbClr val="D0F1E6"/>
+              <a:srgbClr val="D1FAEC"/>
             </a:solidFill>
           </a:ln>
         </p:spPr>
@@ -4384,7 +4384,7 @@
             <a:avLst/>
           </a:prstGeom>
           <a:solidFill>
-            <a:srgbClr val="246B53"/>
+            <a:srgbClr val="26C590"/>
           </a:solidFill>
           <a:ln>
             <a:noFill/>
@@ -4442,7 +4442,7 @@
             <a:r>
               <a:rPr sz="1800" b="1" i="0">
                 <a:solidFill>
-                  <a:srgbClr val="143D30"/>
+                  <a:srgbClr val="115F45"/>
                 </a:solidFill>
               </a:rPr>
               <a:t>모임의 취지</a:t>
@@ -4520,11 +4520,11 @@
             </a:avLst>
           </a:prstGeom>
           <a:solidFill>
-            <a:srgbClr val="F0FAF6"/>
+            <a:srgbClr val="EEFCF7"/>
           </a:solidFill>
           <a:ln w="15875">
             <a:solidFill>
-              <a:srgbClr val="D0F1E6"/>
+              <a:srgbClr val="D1FAEC"/>
             </a:solidFill>
           </a:ln>
         </p:spPr>
@@ -4551,7 +4551,7 @@
             <a:avLst/>
           </a:prstGeom>
           <a:solidFill>
-            <a:srgbClr val="246B53"/>
+            <a:srgbClr val="26C590"/>
           </a:solidFill>
           <a:ln>
             <a:noFill/>
@@ -4609,7 +4609,7 @@
             <a:r>
               <a:rPr sz="1800" b="1" i="0">
                 <a:solidFill>
-                  <a:srgbClr val="143D30"/>
+                  <a:srgbClr val="115F45"/>
                 </a:solidFill>
               </a:rPr>
               <a:t>활동 내용</a:t>
@@ -4687,11 +4687,11 @@
             </a:avLst>
           </a:prstGeom>
           <a:solidFill>
-            <a:srgbClr val="F0FAF6"/>
+            <a:srgbClr val="EEFCF7"/>
           </a:solidFill>
           <a:ln w="15875">
             <a:solidFill>
-              <a:srgbClr val="D0F1E6"/>
+              <a:srgbClr val="D1FAEC"/>
             </a:solidFill>
           </a:ln>
         </p:spPr>
@@ -4718,7 +4718,7 @@
             <a:avLst/>
           </a:prstGeom>
           <a:solidFill>
-            <a:srgbClr val="246B53"/>
+            <a:srgbClr val="26C590"/>
           </a:solidFill>
           <a:ln>
             <a:noFill/>
@@ -4776,7 +4776,7 @@
             <a:r>
               <a:rPr sz="1800" b="1" i="0">
                 <a:solidFill>
-                  <a:srgbClr val="143D30"/>
+                  <a:srgbClr val="115F45"/>
                 </a:solidFill>
               </a:rPr>
               <a:t>참여 혜택</a:t>
@@ -4878,7 +4878,7 @@
             <a:avLst/>
           </a:prstGeom>
           <a:solidFill>
-            <a:srgbClr val="D0F1E6"/>
+            <a:srgbClr val="D1FAEC"/>
           </a:solidFill>
           <a:ln>
             <a:noFill/>
@@ -4907,7 +4907,7 @@
             <a:avLst/>
           </a:prstGeom>
           <a:solidFill>
-            <a:srgbClr val="246B53"/>
+            <a:srgbClr val="26C590"/>
           </a:solidFill>
           <a:ln>
             <a:noFill/>
@@ -4951,7 +4951,7 @@
             <a:r>
               <a:rPr sz="3000" b="1" i="0">
                 <a:solidFill>
-                  <a:srgbClr val="143D30"/>
+                  <a:srgbClr val="115F45"/>
                 </a:solidFill>
               </a:rPr>
               <a:t>한눈에 비교</a:t>
@@ -4976,11 +4976,11 @@
             </a:avLst>
           </a:prstGeom>
           <a:solidFill>
-            <a:srgbClr val="F0FAF6"/>
+            <a:srgbClr val="EEFCF7"/>
           </a:solidFill>
           <a:ln w="12700">
             <a:solidFill>
-              <a:srgbClr val="D0F1E6"/>
+              <a:srgbClr val="D1FAEC"/>
             </a:solidFill>
           </a:ln>
         </p:spPr>
@@ -5009,7 +5009,7 @@
             </a:avLst>
           </a:prstGeom>
           <a:solidFill>
-            <a:srgbClr val="246B53"/>
+            <a:srgbClr val="26C590"/>
           </a:solidFill>
           <a:ln>
             <a:noFill/>
@@ -5161,11 +5161,11 @@
             </a:avLst>
           </a:prstGeom>
           <a:solidFill>
-            <a:srgbClr val="D0F1E6"/>
+            <a:srgbClr val="D1FAEC"/>
           </a:solidFill>
           <a:ln w="12700">
             <a:solidFill>
-              <a:srgbClr val="D0F1E6"/>
+              <a:srgbClr val="D1FAEC"/>
             </a:solidFill>
           </a:ln>
         </p:spPr>
@@ -5194,7 +5194,7 @@
             </a:avLst>
           </a:prstGeom>
           <a:solidFill>
-            <a:srgbClr val="143D30"/>
+            <a:srgbClr val="115F45"/>
           </a:solidFill>
           <a:ln>
             <a:noFill/>
@@ -5370,7 +5370,7 @@
             <a:avLst/>
           </a:prstGeom>
           <a:solidFill>
-            <a:srgbClr val="D0F1E6"/>
+            <a:srgbClr val="D1FAEC"/>
           </a:solidFill>
           <a:ln>
             <a:noFill/>
@@ -5399,7 +5399,7 @@
             <a:avLst/>
           </a:prstGeom>
           <a:solidFill>
-            <a:srgbClr val="246B53"/>
+            <a:srgbClr val="26C590"/>
           </a:solidFill>
           <a:ln>
             <a:noFill/>
@@ -5443,7 +5443,7 @@
             <a:r>
               <a:rPr sz="3000" b="1" i="0">
                 <a:solidFill>
-                  <a:srgbClr val="143D30"/>
+                  <a:srgbClr val="115F45"/>
                 </a:solidFill>
               </a:rPr>
               <a:t>일정·현황</a:t>
@@ -5495,30 +5495,30 @@
                   <a:tcPr anchor="ctr" marL="73152" marR="73152">
                     <a:lnL w="9525" cap="flat" cmpd="sng" algn="ctr">
                       <a:solidFill>
-                        <a:srgbClr val="246B53"/>
+                        <a:srgbClr val="26C590"/>
                       </a:solidFill>
                       <a:prstDash val="solid"/>
                     </a:lnL>
                     <a:lnR w="9525" cap="flat" cmpd="sng" algn="ctr">
                       <a:solidFill>
-                        <a:srgbClr val="246B53"/>
+                        <a:srgbClr val="26C590"/>
                       </a:solidFill>
                       <a:prstDash val="solid"/>
                     </a:lnR>
                     <a:lnT w="9525" cap="flat" cmpd="sng" algn="ctr">
                       <a:solidFill>
-                        <a:srgbClr val="246B53"/>
+                        <a:srgbClr val="26C590"/>
                       </a:solidFill>
                       <a:prstDash val="solid"/>
                     </a:lnT>
                     <a:lnB w="9525" cap="flat" cmpd="sng" algn="ctr">
                       <a:solidFill>
-                        <a:srgbClr val="246B53"/>
+                        <a:srgbClr val="26C590"/>
                       </a:solidFill>
                       <a:prstDash val="solid"/>
                     </a:lnB>
                     <a:solidFill>
-                      <a:srgbClr val="246B53"/>
+                      <a:srgbClr val="26C590"/>
                     </a:solidFill>
                   </a:tcPr>
                 </a:tc>
@@ -5541,30 +5541,30 @@
                   <a:tcPr anchor="ctr" marL="73152" marR="73152">
                     <a:lnL w="9525" cap="flat" cmpd="sng" algn="ctr">
                       <a:solidFill>
-                        <a:srgbClr val="246B53"/>
+                        <a:srgbClr val="26C590"/>
                       </a:solidFill>
                       <a:prstDash val="solid"/>
                     </a:lnL>
                     <a:lnR w="9525" cap="flat" cmpd="sng" algn="ctr">
                       <a:solidFill>
-                        <a:srgbClr val="246B53"/>
+                        <a:srgbClr val="26C590"/>
                       </a:solidFill>
                       <a:prstDash val="solid"/>
                     </a:lnR>
                     <a:lnT w="9525" cap="flat" cmpd="sng" algn="ctr">
                       <a:solidFill>
-                        <a:srgbClr val="246B53"/>
+                        <a:srgbClr val="26C590"/>
                       </a:solidFill>
                       <a:prstDash val="solid"/>
                     </a:lnT>
                     <a:lnB w="9525" cap="flat" cmpd="sng" algn="ctr">
                       <a:solidFill>
-                        <a:srgbClr val="246B53"/>
+                        <a:srgbClr val="26C590"/>
                       </a:solidFill>
                       <a:prstDash val="solid"/>
                     </a:lnB>
                     <a:solidFill>
-                      <a:srgbClr val="246B53"/>
+                      <a:srgbClr val="26C590"/>
                     </a:solidFill>
                   </a:tcPr>
                 </a:tc>
@@ -5587,30 +5587,30 @@
                   <a:tcPr anchor="ctr" marL="73152" marR="73152">
                     <a:lnL w="9525" cap="flat" cmpd="sng" algn="ctr">
                       <a:solidFill>
-                        <a:srgbClr val="246B53"/>
+                        <a:srgbClr val="26C590"/>
                       </a:solidFill>
                       <a:prstDash val="solid"/>
                     </a:lnL>
                     <a:lnR w="9525" cap="flat" cmpd="sng" algn="ctr">
                       <a:solidFill>
-                        <a:srgbClr val="246B53"/>
+                        <a:srgbClr val="26C590"/>
                       </a:solidFill>
                       <a:prstDash val="solid"/>
                     </a:lnR>
                     <a:lnT w="9525" cap="flat" cmpd="sng" algn="ctr">
                       <a:solidFill>
-                        <a:srgbClr val="246B53"/>
+                        <a:srgbClr val="26C590"/>
                       </a:solidFill>
                       <a:prstDash val="solid"/>
                     </a:lnT>
                     <a:lnB w="9525" cap="flat" cmpd="sng" algn="ctr">
                       <a:solidFill>
-                        <a:srgbClr val="246B53"/>
+                        <a:srgbClr val="26C590"/>
                       </a:solidFill>
                       <a:prstDash val="solid"/>
                     </a:lnB>
                     <a:solidFill>
-                      <a:srgbClr val="246B53"/>
+                      <a:srgbClr val="26C590"/>
                     </a:solidFill>
                   </a:tcPr>
                 </a:tc>
@@ -5633,30 +5633,30 @@
                   <a:tcPr anchor="ctr" marL="73152" marR="73152">
                     <a:lnL w="9525" cap="flat" cmpd="sng" algn="ctr">
                       <a:solidFill>
-                        <a:srgbClr val="246B53"/>
+                        <a:srgbClr val="26C590"/>
                       </a:solidFill>
                       <a:prstDash val="solid"/>
                     </a:lnL>
                     <a:lnR w="9525" cap="flat" cmpd="sng" algn="ctr">
                       <a:solidFill>
-                        <a:srgbClr val="246B53"/>
+                        <a:srgbClr val="26C590"/>
                       </a:solidFill>
                       <a:prstDash val="solid"/>
                     </a:lnR>
                     <a:lnT w="9525" cap="flat" cmpd="sng" algn="ctr">
                       <a:solidFill>
-                        <a:srgbClr val="246B53"/>
+                        <a:srgbClr val="26C590"/>
                       </a:solidFill>
                       <a:prstDash val="solid"/>
                     </a:lnT>
                     <a:lnB w="9525" cap="flat" cmpd="sng" algn="ctr">
                       <a:solidFill>
-                        <a:srgbClr val="246B53"/>
+                        <a:srgbClr val="26C590"/>
                       </a:solidFill>
                       <a:prstDash val="solid"/>
                     </a:lnB>
                     <a:solidFill>
-                      <a:srgbClr val="246B53"/>
+                      <a:srgbClr val="26C590"/>
                     </a:solidFill>
                   </a:tcPr>
                 </a:tc>
@@ -5671,7 +5671,7 @@
                       <a:r>
                         <a:rPr sz="1500" b="1">
                           <a:solidFill>
-                            <a:srgbClr val="143D30"/>
+                            <a:srgbClr val="115F45"/>
                           </a:solidFill>
                         </a:rPr>
                         <a:t>1</a:t>
@@ -5681,30 +5681,30 @@
                   <a:tcPr anchor="ctr" marL="73152" marR="73152">
                     <a:lnL w="9525" cap="flat" cmpd="sng" algn="ctr">
                       <a:solidFill>
-                        <a:srgbClr val="D0F1E6"/>
+                        <a:srgbClr val="D1FAEC"/>
                       </a:solidFill>
                       <a:prstDash val="solid"/>
                     </a:lnL>
                     <a:lnR w="9525" cap="flat" cmpd="sng" algn="ctr">
                       <a:solidFill>
-                        <a:srgbClr val="D0F1E6"/>
+                        <a:srgbClr val="D1FAEC"/>
                       </a:solidFill>
                       <a:prstDash val="solid"/>
                     </a:lnR>
                     <a:lnT w="9525" cap="flat" cmpd="sng" algn="ctr">
                       <a:solidFill>
-                        <a:srgbClr val="D0F1E6"/>
+                        <a:srgbClr val="D1FAEC"/>
                       </a:solidFill>
                       <a:prstDash val="solid"/>
                     </a:lnT>
                     <a:lnB w="9525" cap="flat" cmpd="sng" algn="ctr">
                       <a:solidFill>
-                        <a:srgbClr val="D0F1E6"/>
+                        <a:srgbClr val="D1FAEC"/>
                       </a:solidFill>
                       <a:prstDash val="solid"/>
                     </a:lnB>
                     <a:solidFill>
-                      <a:srgbClr val="D0F1E6"/>
+                      <a:srgbClr val="D1FAEC"/>
                     </a:solidFill>
                   </a:tcPr>
                 </a:tc>
@@ -5727,25 +5727,25 @@
                   <a:tcPr anchor="ctr" marL="73152" marR="73152">
                     <a:lnL w="9525" cap="flat" cmpd="sng" algn="ctr">
                       <a:solidFill>
-                        <a:srgbClr val="D0F1E6"/>
+                        <a:srgbClr val="D1FAEC"/>
                       </a:solidFill>
                       <a:prstDash val="solid"/>
                     </a:lnL>
                     <a:lnR w="9525" cap="flat" cmpd="sng" algn="ctr">
                       <a:solidFill>
-                        <a:srgbClr val="D0F1E6"/>
+                        <a:srgbClr val="D1FAEC"/>
                       </a:solidFill>
                       <a:prstDash val="solid"/>
                     </a:lnR>
                     <a:lnT w="9525" cap="flat" cmpd="sng" algn="ctr">
                       <a:solidFill>
-                        <a:srgbClr val="D0F1E6"/>
+                        <a:srgbClr val="D1FAEC"/>
                       </a:solidFill>
                       <a:prstDash val="solid"/>
                     </a:lnT>
                     <a:lnB w="9525" cap="flat" cmpd="sng" algn="ctr">
                       <a:solidFill>
-                        <a:srgbClr val="D0F1E6"/>
+                        <a:srgbClr val="D1FAEC"/>
                       </a:solidFill>
                       <a:prstDash val="solid"/>
                     </a:lnB>
@@ -5773,25 +5773,25 @@
                   <a:tcPr anchor="ctr" marL="73152" marR="73152">
                     <a:lnL w="9525" cap="flat" cmpd="sng" algn="ctr">
                       <a:solidFill>
-                        <a:srgbClr val="D0F1E6"/>
+                        <a:srgbClr val="D1FAEC"/>
                       </a:solidFill>
                       <a:prstDash val="solid"/>
                     </a:lnL>
                     <a:lnR w="9525" cap="flat" cmpd="sng" algn="ctr">
                       <a:solidFill>
-                        <a:srgbClr val="D0F1E6"/>
+                        <a:srgbClr val="D1FAEC"/>
                       </a:solidFill>
                       <a:prstDash val="solid"/>
                     </a:lnR>
                     <a:lnT w="9525" cap="flat" cmpd="sng" algn="ctr">
                       <a:solidFill>
-                        <a:srgbClr val="D0F1E6"/>
+                        <a:srgbClr val="D1FAEC"/>
                       </a:solidFill>
                       <a:prstDash val="solid"/>
                     </a:lnT>
                     <a:lnB w="9525" cap="flat" cmpd="sng" algn="ctr">
                       <a:solidFill>
-                        <a:srgbClr val="D0F1E6"/>
+                        <a:srgbClr val="D1FAEC"/>
                       </a:solidFill>
                       <a:prstDash val="solid"/>
                     </a:lnB>
@@ -5819,25 +5819,25 @@
                   <a:tcPr anchor="ctr" marL="73152" marR="73152">
                     <a:lnL w="9525" cap="flat" cmpd="sng" algn="ctr">
                       <a:solidFill>
-                        <a:srgbClr val="D0F1E6"/>
+                        <a:srgbClr val="D1FAEC"/>
                       </a:solidFill>
                       <a:prstDash val="solid"/>
                     </a:lnL>
                     <a:lnR w="9525" cap="flat" cmpd="sng" algn="ctr">
                       <a:solidFill>
-                        <a:srgbClr val="D0F1E6"/>
+                        <a:srgbClr val="D1FAEC"/>
                       </a:solidFill>
                       <a:prstDash val="solid"/>
                     </a:lnR>
                     <a:lnT w="9525" cap="flat" cmpd="sng" algn="ctr">
                       <a:solidFill>
-                        <a:srgbClr val="D0F1E6"/>
+                        <a:srgbClr val="D1FAEC"/>
                       </a:solidFill>
                       <a:prstDash val="solid"/>
                     </a:lnT>
                     <a:lnB w="9525" cap="flat" cmpd="sng" algn="ctr">
                       <a:solidFill>
-                        <a:srgbClr val="D0F1E6"/>
+                        <a:srgbClr val="D1FAEC"/>
                       </a:solidFill>
                       <a:prstDash val="solid"/>
                     </a:lnB>
@@ -5857,7 +5857,7 @@
                       <a:r>
                         <a:rPr sz="1500" b="1">
                           <a:solidFill>
-                            <a:srgbClr val="143D30"/>
+                            <a:srgbClr val="115F45"/>
                           </a:solidFill>
                         </a:rPr>
                         <a:t>2</a:t>
@@ -5867,30 +5867,30 @@
                   <a:tcPr anchor="ctr" marL="73152" marR="73152">
                     <a:lnL w="9525" cap="flat" cmpd="sng" algn="ctr">
                       <a:solidFill>
-                        <a:srgbClr val="D0F1E6"/>
+                        <a:srgbClr val="D1FAEC"/>
                       </a:solidFill>
                       <a:prstDash val="solid"/>
                     </a:lnL>
                     <a:lnR w="9525" cap="flat" cmpd="sng" algn="ctr">
                       <a:solidFill>
-                        <a:srgbClr val="D0F1E6"/>
+                        <a:srgbClr val="D1FAEC"/>
                       </a:solidFill>
                       <a:prstDash val="solid"/>
                     </a:lnR>
                     <a:lnT w="9525" cap="flat" cmpd="sng" algn="ctr">
                       <a:solidFill>
-                        <a:srgbClr val="D0F1E6"/>
+                        <a:srgbClr val="D1FAEC"/>
                       </a:solidFill>
                       <a:prstDash val="solid"/>
                     </a:lnT>
                     <a:lnB w="9525" cap="flat" cmpd="sng" algn="ctr">
                       <a:solidFill>
-                        <a:srgbClr val="D0F1E6"/>
+                        <a:srgbClr val="D1FAEC"/>
                       </a:solidFill>
                       <a:prstDash val="solid"/>
                     </a:lnB>
                     <a:solidFill>
-                      <a:srgbClr val="D0F1E6"/>
+                      <a:srgbClr val="D1FAEC"/>
                     </a:solidFill>
                   </a:tcPr>
                 </a:tc>
@@ -5913,30 +5913,30 @@
                   <a:tcPr anchor="ctr" marL="73152" marR="73152">
                     <a:lnL w="9525" cap="flat" cmpd="sng" algn="ctr">
                       <a:solidFill>
-                        <a:srgbClr val="D0F1E6"/>
+                        <a:srgbClr val="D1FAEC"/>
                       </a:solidFill>
                       <a:prstDash val="solid"/>
                     </a:lnL>
                     <a:lnR w="9525" cap="flat" cmpd="sng" algn="ctr">
                       <a:solidFill>
-                        <a:srgbClr val="D0F1E6"/>
+                        <a:srgbClr val="D1FAEC"/>
                       </a:solidFill>
                       <a:prstDash val="solid"/>
                     </a:lnR>
                     <a:lnT w="9525" cap="flat" cmpd="sng" algn="ctr">
                       <a:solidFill>
-                        <a:srgbClr val="D0F1E6"/>
+                        <a:srgbClr val="D1FAEC"/>
                       </a:solidFill>
                       <a:prstDash val="solid"/>
                     </a:lnT>
                     <a:lnB w="9525" cap="flat" cmpd="sng" algn="ctr">
                       <a:solidFill>
-                        <a:srgbClr val="D0F1E6"/>
+                        <a:srgbClr val="D1FAEC"/>
                       </a:solidFill>
                       <a:prstDash val="solid"/>
                     </a:lnB>
                     <a:solidFill>
-                      <a:srgbClr val="F0FAF6"/>
+                      <a:srgbClr val="EEFCF7"/>
                     </a:solidFill>
                   </a:tcPr>
                 </a:tc>
@@ -5959,30 +5959,30 @@
                   <a:tcPr anchor="ctr" marL="73152" marR="73152">
                     <a:lnL w="9525" cap="flat" cmpd="sng" algn="ctr">
                       <a:solidFill>
-                        <a:srgbClr val="D0F1E6"/>
+                        <a:srgbClr val="D1FAEC"/>
                       </a:solidFill>
                       <a:prstDash val="solid"/>
                     </a:lnL>
                     <a:lnR w="9525" cap="flat" cmpd="sng" algn="ctr">
                       <a:solidFill>
-                        <a:srgbClr val="D0F1E6"/>
+                        <a:srgbClr val="D1FAEC"/>
                       </a:solidFill>
                       <a:prstDash val="solid"/>
                     </a:lnR>
                     <a:lnT w="9525" cap="flat" cmpd="sng" algn="ctr">
                       <a:solidFill>
-                        <a:srgbClr val="D0F1E6"/>
+                        <a:srgbClr val="D1FAEC"/>
                       </a:solidFill>
                       <a:prstDash val="solid"/>
                     </a:lnT>
                     <a:lnB w="9525" cap="flat" cmpd="sng" algn="ctr">
                       <a:solidFill>
-                        <a:srgbClr val="D0F1E6"/>
+                        <a:srgbClr val="D1FAEC"/>
                       </a:solidFill>
                       <a:prstDash val="solid"/>
                     </a:lnB>
                     <a:solidFill>
-                      <a:srgbClr val="F0FAF6"/>
+                      <a:srgbClr val="EEFCF7"/>
                     </a:solidFill>
                   </a:tcPr>
                 </a:tc>
@@ -6005,30 +6005,30 @@
                   <a:tcPr anchor="ctr" marL="73152" marR="73152">
                     <a:lnL w="9525" cap="flat" cmpd="sng" algn="ctr">
                       <a:solidFill>
-                        <a:srgbClr val="D0F1E6"/>
+                        <a:srgbClr val="D1FAEC"/>
                       </a:solidFill>
                       <a:prstDash val="solid"/>
                     </a:lnL>
                     <a:lnR w="9525" cap="flat" cmpd="sng" algn="ctr">
                       <a:solidFill>
-                        <a:srgbClr val="D0F1E6"/>
+                        <a:srgbClr val="D1FAEC"/>
                       </a:solidFill>
                       <a:prstDash val="solid"/>
                     </a:lnR>
                     <a:lnT w="9525" cap="flat" cmpd="sng" algn="ctr">
                       <a:solidFill>
-                        <a:srgbClr val="D0F1E6"/>
+                        <a:srgbClr val="D1FAEC"/>
                       </a:solidFill>
                       <a:prstDash val="solid"/>
                     </a:lnT>
                     <a:lnB w="9525" cap="flat" cmpd="sng" algn="ctr">
                       <a:solidFill>
-                        <a:srgbClr val="D0F1E6"/>
+                        <a:srgbClr val="D1FAEC"/>
                       </a:solidFill>
                       <a:prstDash val="solid"/>
                     </a:lnB>
                     <a:solidFill>
-                      <a:srgbClr val="F0FAF6"/>
+                      <a:srgbClr val="EEFCF7"/>
                     </a:solidFill>
                   </a:tcPr>
                 </a:tc>
@@ -6043,7 +6043,7 @@
                       <a:r>
                         <a:rPr sz="1500" b="1">
                           <a:solidFill>
-                            <a:srgbClr val="143D30"/>
+                            <a:srgbClr val="115F45"/>
                           </a:solidFill>
                         </a:rPr>
                         <a:t>3</a:t>
@@ -6053,30 +6053,30 @@
                   <a:tcPr anchor="ctr" marL="73152" marR="73152">
                     <a:lnL w="9525" cap="flat" cmpd="sng" algn="ctr">
                       <a:solidFill>
-                        <a:srgbClr val="D0F1E6"/>
+                        <a:srgbClr val="D1FAEC"/>
                       </a:solidFill>
                       <a:prstDash val="solid"/>
                     </a:lnL>
                     <a:lnR w="9525" cap="flat" cmpd="sng" algn="ctr">
                       <a:solidFill>
-                        <a:srgbClr val="D0F1E6"/>
+                        <a:srgbClr val="D1FAEC"/>
                       </a:solidFill>
                       <a:prstDash val="solid"/>
                     </a:lnR>
                     <a:lnT w="9525" cap="flat" cmpd="sng" algn="ctr">
                       <a:solidFill>
-                        <a:srgbClr val="D0F1E6"/>
+                        <a:srgbClr val="D1FAEC"/>
                       </a:solidFill>
                       <a:prstDash val="solid"/>
                     </a:lnT>
                     <a:lnB w="9525" cap="flat" cmpd="sng" algn="ctr">
                       <a:solidFill>
-                        <a:srgbClr val="D0F1E6"/>
+                        <a:srgbClr val="D1FAEC"/>
                       </a:solidFill>
                       <a:prstDash val="solid"/>
                     </a:lnB>
                     <a:solidFill>
-                      <a:srgbClr val="D0F1E6"/>
+                      <a:srgbClr val="D1FAEC"/>
                     </a:solidFill>
                   </a:tcPr>
                 </a:tc>
@@ -6099,25 +6099,25 @@
                   <a:tcPr anchor="ctr" marL="73152" marR="73152">
                     <a:lnL w="9525" cap="flat" cmpd="sng" algn="ctr">
                       <a:solidFill>
-                        <a:srgbClr val="D0F1E6"/>
+                        <a:srgbClr val="D1FAEC"/>
                       </a:solidFill>
                       <a:prstDash val="solid"/>
                     </a:lnL>
                     <a:lnR w="9525" cap="flat" cmpd="sng" algn="ctr">
                       <a:solidFill>
-                        <a:srgbClr val="D0F1E6"/>
+                        <a:srgbClr val="D1FAEC"/>
                       </a:solidFill>
                       <a:prstDash val="solid"/>
                     </a:lnR>
                     <a:lnT w="9525" cap="flat" cmpd="sng" algn="ctr">
                       <a:solidFill>
-                        <a:srgbClr val="D0F1E6"/>
+                        <a:srgbClr val="D1FAEC"/>
                       </a:solidFill>
                       <a:prstDash val="solid"/>
                     </a:lnT>
                     <a:lnB w="9525" cap="flat" cmpd="sng" algn="ctr">
                       <a:solidFill>
-                        <a:srgbClr val="D0F1E6"/>
+                        <a:srgbClr val="D1FAEC"/>
                       </a:solidFill>
                       <a:prstDash val="solid"/>
                     </a:lnB>
@@ -6145,25 +6145,25 @@
                   <a:tcPr anchor="ctr" marL="73152" marR="73152">
                     <a:lnL w="9525" cap="flat" cmpd="sng" algn="ctr">
                       <a:solidFill>
-                        <a:srgbClr val="D0F1E6"/>
+                        <a:srgbClr val="D1FAEC"/>
                       </a:solidFill>
                       <a:prstDash val="solid"/>
                     </a:lnL>
                     <a:lnR w="9525" cap="flat" cmpd="sng" algn="ctr">
                       <a:solidFill>
-                        <a:srgbClr val="D0F1E6"/>
+                        <a:srgbClr val="D1FAEC"/>
                       </a:solidFill>
                       <a:prstDash val="solid"/>
                     </a:lnR>
                     <a:lnT w="9525" cap="flat" cmpd="sng" algn="ctr">
                       <a:solidFill>
-                        <a:srgbClr val="D0F1E6"/>
+                        <a:srgbClr val="D1FAEC"/>
                       </a:solidFill>
                       <a:prstDash val="solid"/>
                     </a:lnT>
                     <a:lnB w="9525" cap="flat" cmpd="sng" algn="ctr">
                       <a:solidFill>
-                        <a:srgbClr val="D0F1E6"/>
+                        <a:srgbClr val="D1FAEC"/>
                       </a:solidFill>
                       <a:prstDash val="solid"/>
                     </a:lnB>
@@ -6191,25 +6191,25 @@
                   <a:tcPr anchor="ctr" marL="73152" marR="73152">
                     <a:lnL w="9525" cap="flat" cmpd="sng" algn="ctr">
                       <a:solidFill>
-                        <a:srgbClr val="D0F1E6"/>
+                        <a:srgbClr val="D1FAEC"/>
                       </a:solidFill>
                       <a:prstDash val="solid"/>
                     </a:lnL>
                     <a:lnR w="9525" cap="flat" cmpd="sng" algn="ctr">
                       <a:solidFill>
-                        <a:srgbClr val="D0F1E6"/>
+                        <a:srgbClr val="D1FAEC"/>
                       </a:solidFill>
                       <a:prstDash val="solid"/>
                     </a:lnR>
                     <a:lnT w="9525" cap="flat" cmpd="sng" algn="ctr">
                       <a:solidFill>
-                        <a:srgbClr val="D0F1E6"/>
+                        <a:srgbClr val="D1FAEC"/>
                       </a:solidFill>
                       <a:prstDash val="solid"/>
                     </a:lnT>
                     <a:lnB w="9525" cap="flat" cmpd="sng" algn="ctr">
                       <a:solidFill>
-                        <a:srgbClr val="D0F1E6"/>
+                        <a:srgbClr val="D1FAEC"/>
                       </a:solidFill>
                       <a:prstDash val="solid"/>
                     </a:lnB>
@@ -6229,7 +6229,7 @@
                       <a:r>
                         <a:rPr sz="1500" b="1">
                           <a:solidFill>
-                            <a:srgbClr val="143D30"/>
+                            <a:srgbClr val="115F45"/>
                           </a:solidFill>
                         </a:rPr>
                         <a:t>4</a:t>
@@ -6239,30 +6239,30 @@
                   <a:tcPr anchor="ctr" marL="73152" marR="73152">
                     <a:lnL w="9525" cap="flat" cmpd="sng" algn="ctr">
                       <a:solidFill>
-                        <a:srgbClr val="D0F1E6"/>
+                        <a:srgbClr val="D1FAEC"/>
                       </a:solidFill>
                       <a:prstDash val="solid"/>
                     </a:lnL>
                     <a:lnR w="9525" cap="flat" cmpd="sng" algn="ctr">
                       <a:solidFill>
-                        <a:srgbClr val="D0F1E6"/>
+                        <a:srgbClr val="D1FAEC"/>
                       </a:solidFill>
                       <a:prstDash val="solid"/>
                     </a:lnR>
                     <a:lnT w="9525" cap="flat" cmpd="sng" algn="ctr">
                       <a:solidFill>
-                        <a:srgbClr val="D0F1E6"/>
+                        <a:srgbClr val="D1FAEC"/>
                       </a:solidFill>
                       <a:prstDash val="solid"/>
                     </a:lnT>
                     <a:lnB w="9525" cap="flat" cmpd="sng" algn="ctr">
                       <a:solidFill>
-                        <a:srgbClr val="D0F1E6"/>
+                        <a:srgbClr val="D1FAEC"/>
                       </a:solidFill>
                       <a:prstDash val="solid"/>
                     </a:lnB>
                     <a:solidFill>
-                      <a:srgbClr val="D0F1E6"/>
+                      <a:srgbClr val="D1FAEC"/>
                     </a:solidFill>
                   </a:tcPr>
                 </a:tc>
@@ -6285,30 +6285,30 @@
                   <a:tcPr anchor="ctr" marL="73152" marR="73152">
                     <a:lnL w="9525" cap="flat" cmpd="sng" algn="ctr">
                       <a:solidFill>
-                        <a:srgbClr val="D0F1E6"/>
+                        <a:srgbClr val="D1FAEC"/>
                       </a:solidFill>
                       <a:prstDash val="solid"/>
                     </a:lnL>
                     <a:lnR w="9525" cap="flat" cmpd="sng" algn="ctr">
                       <a:solidFill>
-                        <a:srgbClr val="D0F1E6"/>
+                        <a:srgbClr val="D1FAEC"/>
                       </a:solidFill>
                       <a:prstDash val="solid"/>
                     </a:lnR>
                     <a:lnT w="9525" cap="flat" cmpd="sng" algn="ctr">
                       <a:solidFill>
-                        <a:srgbClr val="D0F1E6"/>
+                        <a:srgbClr val="D1FAEC"/>
                       </a:solidFill>
                       <a:prstDash val="solid"/>
                     </a:lnT>
                     <a:lnB w="9525" cap="flat" cmpd="sng" algn="ctr">
                       <a:solidFill>
-                        <a:srgbClr val="D0F1E6"/>
+                        <a:srgbClr val="D1FAEC"/>
                       </a:solidFill>
                       <a:prstDash val="solid"/>
                     </a:lnB>
                     <a:solidFill>
-                      <a:srgbClr val="F0FAF6"/>
+                      <a:srgbClr val="EEFCF7"/>
                     </a:solidFill>
                   </a:tcPr>
                 </a:tc>
@@ -6331,30 +6331,30 @@
                   <a:tcPr anchor="ctr" marL="73152" marR="73152">
                     <a:lnL w="9525" cap="flat" cmpd="sng" algn="ctr">
                       <a:solidFill>
-                        <a:srgbClr val="D0F1E6"/>
+                        <a:srgbClr val="D1FAEC"/>
                       </a:solidFill>
                       <a:prstDash val="solid"/>
                     </a:lnL>
                     <a:lnR w="9525" cap="flat" cmpd="sng" algn="ctr">
                       <a:solidFill>
-                        <a:srgbClr val="D0F1E6"/>
+                        <a:srgbClr val="D1FAEC"/>
                       </a:solidFill>
                       <a:prstDash val="solid"/>
                     </a:lnR>
                     <a:lnT w="9525" cap="flat" cmpd="sng" algn="ctr">
                       <a:solidFill>
-                        <a:srgbClr val="D0F1E6"/>
+                        <a:srgbClr val="D1FAEC"/>
                       </a:solidFill>
                       <a:prstDash val="solid"/>
                     </a:lnT>
                     <a:lnB w="9525" cap="flat" cmpd="sng" algn="ctr">
                       <a:solidFill>
-                        <a:srgbClr val="D0F1E6"/>
+                        <a:srgbClr val="D1FAEC"/>
                       </a:solidFill>
                       <a:prstDash val="solid"/>
                     </a:lnB>
                     <a:solidFill>
-                      <a:srgbClr val="F0FAF6"/>
+                      <a:srgbClr val="EEFCF7"/>
                     </a:solidFill>
                   </a:tcPr>
                 </a:tc>
@@ -6377,30 +6377,30 @@
                   <a:tcPr anchor="ctr" marL="73152" marR="73152">
                     <a:lnL w="9525" cap="flat" cmpd="sng" algn="ctr">
                       <a:solidFill>
-                        <a:srgbClr val="D0F1E6"/>
+                        <a:srgbClr val="D1FAEC"/>
                       </a:solidFill>
                       <a:prstDash val="solid"/>
                     </a:lnL>
                     <a:lnR w="9525" cap="flat" cmpd="sng" algn="ctr">
                       <a:solidFill>
-                        <a:srgbClr val="D0F1E6"/>
+                        <a:srgbClr val="D1FAEC"/>
                       </a:solidFill>
                       <a:prstDash val="solid"/>
                     </a:lnR>
                     <a:lnT w="9525" cap="flat" cmpd="sng" algn="ctr">
                       <a:solidFill>
-                        <a:srgbClr val="D0F1E6"/>
+                        <a:srgbClr val="D1FAEC"/>
                       </a:solidFill>
                       <a:prstDash val="solid"/>
                     </a:lnT>
                     <a:lnB w="9525" cap="flat" cmpd="sng" algn="ctr">
                       <a:solidFill>
-                        <a:srgbClr val="D0F1E6"/>
+                        <a:srgbClr val="D1FAEC"/>
                       </a:solidFill>
                       <a:prstDash val="solid"/>
                     </a:lnB>
                     <a:solidFill>
-                      <a:srgbClr val="F0FAF6"/>
+                      <a:srgbClr val="EEFCF7"/>
                     </a:solidFill>
                   </a:tcPr>
                 </a:tc>
@@ -6415,7 +6415,7 @@
                       <a:r>
                         <a:rPr sz="1500" b="1">
                           <a:solidFill>
-                            <a:srgbClr val="143D30"/>
+                            <a:srgbClr val="115F45"/>
                           </a:solidFill>
                         </a:rPr>
                         <a:t>5</a:t>
@@ -6425,30 +6425,30 @@
                   <a:tcPr anchor="ctr" marL="73152" marR="73152">
                     <a:lnL w="9525" cap="flat" cmpd="sng" algn="ctr">
                       <a:solidFill>
-                        <a:srgbClr val="D0F1E6"/>
+                        <a:srgbClr val="D1FAEC"/>
                       </a:solidFill>
                       <a:prstDash val="solid"/>
                     </a:lnL>
                     <a:lnR w="9525" cap="flat" cmpd="sng" algn="ctr">
                       <a:solidFill>
-                        <a:srgbClr val="D0F1E6"/>
+                        <a:srgbClr val="D1FAEC"/>
                       </a:solidFill>
                       <a:prstDash val="solid"/>
                     </a:lnR>
                     <a:lnT w="9525" cap="flat" cmpd="sng" algn="ctr">
                       <a:solidFill>
-                        <a:srgbClr val="D0F1E6"/>
+                        <a:srgbClr val="D1FAEC"/>
                       </a:solidFill>
                       <a:prstDash val="solid"/>
                     </a:lnT>
                     <a:lnB w="9525" cap="flat" cmpd="sng" algn="ctr">
                       <a:solidFill>
-                        <a:srgbClr val="D0F1E6"/>
+                        <a:srgbClr val="D1FAEC"/>
                       </a:solidFill>
                       <a:prstDash val="solid"/>
                     </a:lnB>
                     <a:solidFill>
-                      <a:srgbClr val="D0F1E6"/>
+                      <a:srgbClr val="D1FAEC"/>
                     </a:solidFill>
                   </a:tcPr>
                 </a:tc>
@@ -6471,25 +6471,25 @@
                   <a:tcPr anchor="ctr" marL="73152" marR="73152">
                     <a:lnL w="9525" cap="flat" cmpd="sng" algn="ctr">
                       <a:solidFill>
-                        <a:srgbClr val="D0F1E6"/>
+                        <a:srgbClr val="D1FAEC"/>
                       </a:solidFill>
                       <a:prstDash val="solid"/>
                     </a:lnL>
                     <a:lnR w="9525" cap="flat" cmpd="sng" algn="ctr">
                       <a:solidFill>
-                        <a:srgbClr val="D0F1E6"/>
+                        <a:srgbClr val="D1FAEC"/>
                       </a:solidFill>
                       <a:prstDash val="solid"/>
                     </a:lnR>
                     <a:lnT w="9525" cap="flat" cmpd="sng" algn="ctr">
                       <a:solidFill>
-                        <a:srgbClr val="D0F1E6"/>
+                        <a:srgbClr val="D1FAEC"/>
                       </a:solidFill>
                       <a:prstDash val="solid"/>
                     </a:lnT>
                     <a:lnB w="9525" cap="flat" cmpd="sng" algn="ctr">
                       <a:solidFill>
-                        <a:srgbClr val="D0F1E6"/>
+                        <a:srgbClr val="D1FAEC"/>
                       </a:solidFill>
                       <a:prstDash val="solid"/>
                     </a:lnB>
@@ -6517,25 +6517,25 @@
                   <a:tcPr anchor="ctr" marL="73152" marR="73152">
                     <a:lnL w="9525" cap="flat" cmpd="sng" algn="ctr">
                       <a:solidFill>
-                        <a:srgbClr val="D0F1E6"/>
+                        <a:srgbClr val="D1FAEC"/>
                       </a:solidFill>
                       <a:prstDash val="solid"/>
                     </a:lnL>
                     <a:lnR w="9525" cap="flat" cmpd="sng" algn="ctr">
                       <a:solidFill>
-                        <a:srgbClr val="D0F1E6"/>
+                        <a:srgbClr val="D1FAEC"/>
                       </a:solidFill>
                       <a:prstDash val="solid"/>
                     </a:lnR>
                     <a:lnT w="9525" cap="flat" cmpd="sng" algn="ctr">
                       <a:solidFill>
-                        <a:srgbClr val="D0F1E6"/>
+                        <a:srgbClr val="D1FAEC"/>
                       </a:solidFill>
                       <a:prstDash val="solid"/>
                     </a:lnT>
                     <a:lnB w="9525" cap="flat" cmpd="sng" algn="ctr">
                       <a:solidFill>
-                        <a:srgbClr val="D0F1E6"/>
+                        <a:srgbClr val="D1FAEC"/>
                       </a:solidFill>
                       <a:prstDash val="solid"/>
                     </a:lnB>
@@ -6563,25 +6563,25 @@
                   <a:tcPr anchor="ctr" marL="73152" marR="73152">
                     <a:lnL w="9525" cap="flat" cmpd="sng" algn="ctr">
                       <a:solidFill>
-                        <a:srgbClr val="D0F1E6"/>
+                        <a:srgbClr val="D1FAEC"/>
                       </a:solidFill>
                       <a:prstDash val="solid"/>
                     </a:lnL>
                     <a:lnR w="9525" cap="flat" cmpd="sng" algn="ctr">
                       <a:solidFill>
-                        <a:srgbClr val="D0F1E6"/>
+                        <a:srgbClr val="D1FAEC"/>
                       </a:solidFill>
                       <a:prstDash val="solid"/>
                     </a:lnR>
                     <a:lnT w="9525" cap="flat" cmpd="sng" algn="ctr">
                       <a:solidFill>
-                        <a:srgbClr val="D0F1E6"/>
+                        <a:srgbClr val="D1FAEC"/>
                       </a:solidFill>
                       <a:prstDash val="solid"/>
                     </a:lnT>
                     <a:lnB w="9525" cap="flat" cmpd="sng" algn="ctr">
                       <a:solidFill>
-                        <a:srgbClr val="D0F1E6"/>
+                        <a:srgbClr val="D1FAEC"/>
                       </a:solidFill>
                       <a:prstDash val="solid"/>
                     </a:lnB>
@@ -6667,7 +6667,7 @@
             <a:r>
               <a:rPr sz="3600" b="1" i="0">
                 <a:solidFill>
-                  <a:srgbClr val="143D30"/>
+                  <a:srgbClr val="115F45"/>
                 </a:solidFill>
               </a:rPr>
               <a:t>감사합니다</a:t>
@@ -6705,7 +6705,7 @@
             <a:r>
               <a:rPr sz="1700" b="0" i="1">
                 <a:solidFill>
-                  <a:srgbClr val="143D30"/>
+                  <a:srgbClr val="115F45"/>
                 </a:solidFill>
               </a:rPr>
               <a:t>끝까지 들어 주셔서 고맙습니다</a:t>
@@ -6770,34 +6770,34 @@
         <a:sysClr val="window" lastClr="FFFFFF"/>
       </a:lt1>
       <a:dk2>
-        <a:srgbClr val="143D30"/>
+        <a:srgbClr val="115F45"/>
       </a:dk2>
       <a:lt2>
-        <a:srgbClr val="F0FAF6"/>
+        <a:srgbClr val="EEFCF7"/>
       </a:lt2>
       <a:accent1>
-        <a:srgbClr val="246B53"/>
+        <a:srgbClr val="26C590"/>
       </a:accent1>
       <a:accent2>
-        <a:srgbClr val="913B83"/>
+        <a:srgbClr val="209DB6"/>
       </a:accent2>
       <a:accent3>
-        <a:srgbClr val="143D30"/>
+        <a:srgbClr val="115F45"/>
       </a:accent3>
       <a:accent4>
-        <a:srgbClr val="D0F1E6"/>
+        <a:srgbClr val="D1FAEC"/>
       </a:accent4>
       <a:accent5>
-        <a:srgbClr val="5A536B"/>
+        <a:srgbClr val="23B1A3"/>
       </a:accent5>
       <a:accent6>
-        <a:srgbClr val="728B83"/>
+        <a:srgbClr val="709F8F"/>
       </a:accent6>
       <a:hlink>
-        <a:srgbClr val="246B53"/>
+        <a:srgbClr val="26C590"/>
       </a:hlink>
       <a:folHlink>
-        <a:srgbClr val="143D30"/>
+        <a:srgbClr val="115F45"/>
       </a:folHlink>
     </a:clrScheme>
     <a:fontScheme name="Office">

--- a/public/fun/pack/pptx/talk/발표템플릿_19_모임·동호회소개_반딧불마을.pptx
+++ b/public/fun/pack/pptx/talk/발표템플릿_19_모임·동호회소개_반딧불마을.pptx
@@ -3286,6 +3286,14 @@
 <file path=ppt/slides/slide1.xml><?xml version="1.0" encoding="utf-8"?>
 <p:sld xmlns:a="http://schemas.openxmlformats.org/drawingml/2006/main" xmlns:p="http://schemas.openxmlformats.org/presentationml/2006/main" xmlns:r="http://schemas.openxmlformats.org/officeDocument/2006/relationships">
   <p:cSld>
+    <p:bg>
+      <p:bgPr>
+        <a:solidFill>
+          <a:srgbClr val="27493E"/>
+        </a:solidFill>
+        <a:effectLst/>
+      </p:bgPr>
+    </p:bg>
     <p:spTree>
       <p:nvGrpSpPr>
         <p:cNvPr id="1" name=""/>
@@ -3293,30 +3301,102 @@
         <p:nvPr/>
       </p:nvGrpSpPr>
       <p:grpSpPr/>
-      <p:pic>
-        <p:nvPicPr>
-          <p:cNvPr id="3" name="표지 그림" descr="talk-19.jpg"/>
-          <p:cNvPicPr>
-            <a:picLocks noChangeAspect="1"/>
-          </p:cNvPicPr>
+      <p:sp>
+        <p:nvSpPr>
+          <p:cNvPr id="3" name="장식"/>
+          <p:cNvSpPr/>
           <p:nvPr/>
-        </p:nvPicPr>
-        <p:blipFill>
-          <a:blip r:embed="rId2"/>
-          <a:stretch>
-            <a:fillRect/>
-          </a:stretch>
-        </p:blipFill>
-        <p:spPr>
-          <a:xfrm>
-            <a:off x="0" y="0"/>
-            <a:ext cx="12191695" cy="6858000"/>
+        </p:nvSpPr>
+        <p:spPr>
+          <a:xfrm>
+            <a:off x="7802684" y="0"/>
+            <a:ext cx="4389010" cy="6858000"/>
           </a:xfrm>
           <a:prstGeom prst="rect">
             <a:avLst/>
           </a:prstGeom>
-        </p:spPr>
-      </p:pic>
+          <a:solidFill>
+            <a:srgbClr val="7BEAC5"/>
+          </a:solidFill>
+          <a:ln>
+            <a:noFill/>
+          </a:ln>
+        </p:spPr>
+        <p:txBody>
+          <a:bodyPr rtlCol="0" anchor="ctr"/>
+          <a:lstStyle/>
+          <a:p>
+            <a:pPr algn="ctr"/>
+          </a:p>
+        </p:txBody>
+      </p:sp>
+      <p:sp>
+        <p:nvSpPr>
+          <p:cNvPr id="4" name="장식"/>
+          <p:cNvSpPr/>
+          <p:nvPr/>
+        </p:nvSpPr>
+        <p:spPr>
+          <a:xfrm>
+            <a:off x="8168435" y="365760"/>
+            <a:ext cx="3657508" cy="6126480"/>
+          </a:xfrm>
+          <a:prstGeom prst="rect">
+            <a:avLst/>
+          </a:prstGeom>
+          <a:noFill/>
+          <a:ln w="9525">
+            <a:solidFill>
+              <a:srgbClr val="FFFFFF"/>
+            </a:solidFill>
+          </a:ln>
+        </p:spPr>
+        <p:txBody>
+          <a:bodyPr rtlCol="0" anchor="ctr"/>
+          <a:lstStyle/>
+          <a:p>
+            <a:pPr algn="ctr"/>
+          </a:p>
+        </p:txBody>
+      </p:sp>
+      <p:sp>
+        <p:nvSpPr>
+          <p:cNvPr id="5" name="라벨"/>
+          <p:cNvSpPr txBox="1"/>
+          <p:nvPr/>
+        </p:nvSpPr>
+        <p:spPr>
+          <a:xfrm>
+            <a:off x="822960" y="2148840"/>
+            <a:ext cx="5608179" cy="274320"/>
+          </a:xfrm>
+          <a:prstGeom prst="rect">
+            <a:avLst/>
+          </a:prstGeom>
+          <a:noFill/>
+        </p:spPr>
+        <p:txBody>
+          <a:bodyPr wrap="square" lIns="54864" rIns="54864" tIns="27432" bIns="27432" anchor="t">
+            <a:noAutofit/>
+          </a:bodyPr>
+          <a:lstStyle/>
+          <a:p>
+            <a:pPr algn="l">
+              <a:lnSpc>
+                <a:spcPct val="115000"/>
+              </a:lnSpc>
+            </a:pPr>
+            <a:r>
+              <a:rPr sz="1000" b="1" i="0" spc="250">
+                <a:solidFill>
+                  <a:srgbClr val="FFFFFF"/>
+                </a:solidFill>
+              </a:rPr>
+              <a:t>PRESENTATION</a:t>
+            </a:r>
+          </a:p>
+        </p:txBody>
+      </p:sp>
       <p:sp>
         <p:nvSpPr>
           <p:cNvPr id="2" name="Title 1"/>
@@ -3329,8 +3409,8 @@
         </p:nvSpPr>
         <p:spPr>
           <a:xfrm>
-            <a:off x="853418" y="2057400"/>
-            <a:ext cx="6095847" cy="1554480"/>
+            <a:off x="822960" y="2606040"/>
+            <a:ext cx="5608179" cy="1188720"/>
           </a:xfrm>
         </p:spPr>
         <p:txBody>
@@ -3345,9 +3425,9 @@
               </a:lnSpc>
             </a:pPr>
             <a:r>
-              <a:rPr sz="3600" b="1" i="0">
+              <a:rPr sz="4000" b="1" i="0">
                 <a:solidFill>
-                  <a:srgbClr val="115F45"/>
+                  <a:srgbClr val="FFFFFF"/>
                 </a:solidFill>
               </a:rPr>
               <a:t>발표 제목을 입력하세요</a:t>
@@ -3357,14 +3437,14 @@
       </p:sp>
       <p:sp>
         <p:nvSpPr>
-          <p:cNvPr id="4" name="한 줄 문구"/>
+          <p:cNvPr id="6" name="한 줄 문구"/>
           <p:cNvSpPr txBox="1"/>
           <p:nvPr/>
         </p:nvSpPr>
         <p:spPr>
           <a:xfrm>
-            <a:off x="853418" y="3749039"/>
-            <a:ext cx="6095847" cy="822960"/>
+            <a:off x="822960" y="3886200"/>
+            <a:ext cx="5608179" cy="822960"/>
           </a:xfrm>
           <a:prstGeom prst="rect">
             <a:avLst/>
@@ -3383,26 +3463,26 @@
               </a:lnSpc>
             </a:pPr>
             <a:r>
-              <a:rPr sz="1700" b="0" i="1">
+              <a:rPr sz="1700" b="0" i="0">
                 <a:solidFill>
-                  <a:srgbClr val="115F45"/>
+                  <a:srgbClr val="FFFFFF"/>
                 </a:solidFill>
               </a:rPr>
-              <a:t>한 달에 한 번, 이렇게 모입니다</a:t>
-            </a:r>
-          </a:p>
-        </p:txBody>
-      </p:sp>
-      <p:sp>
-        <p:nvSpPr>
-          <p:cNvPr id="5" name="안내 문구"/>
+              <a:t>정해진 날마다 이렇게 모입니다</a:t>
+            </a:r>
+          </a:p>
+        </p:txBody>
+      </p:sp>
+      <p:sp>
+        <p:nvSpPr>
+          <p:cNvPr id="7" name="안내 문구"/>
           <p:cNvSpPr txBox="1"/>
           <p:nvPr/>
         </p:nvSpPr>
         <p:spPr>
           <a:xfrm>
-            <a:off x="853418" y="4617720"/>
-            <a:ext cx="6095847" cy="914400"/>
+            <a:off x="822960" y="4754880"/>
+            <a:ext cx="5608179" cy="914400"/>
           </a:xfrm>
           <a:prstGeom prst="rect">
             <a:avLst/>
@@ -3423,7 +3503,7 @@
             <a:r>
               <a:rPr sz="1400" b="0" i="0">
                 <a:solidFill>
-                  <a:srgbClr val="666666"/>
+                  <a:srgbClr val="FFFFFF"/>
                 </a:solidFill>
               </a:rPr>
               <a:t>모임·동호회 소개 · 발표자 이름</a:t>
@@ -3438,10 +3518,10 @@
             <a:r>
               <a:rPr sz="1400" b="0" i="0">
                 <a:solidFill>
-                  <a:srgbClr val="666666"/>
+                  <a:srgbClr val="FFFFFF"/>
                 </a:solidFill>
               </a:rPr>
-              <a:t>2027. 00. 00</a:t>
+              <a:t>날짜 입력</a:t>
             </a:r>
           </a:p>
         </p:txBody>
@@ -3460,7 +3540,7 @@
     <p:bg>
       <p:bgPr>
         <a:solidFill>
-          <a:srgbClr val="FFFFFF"/>
+          <a:srgbClr val="EAFDF7"/>
         </a:solidFill>
         <a:effectLst/>
       </p:bgPr>
@@ -3474,20 +3554,20 @@
       <p:grpSpPr/>
       <p:sp>
         <p:nvSpPr>
-          <p:cNvPr id="3" name="장식"/>
+          <p:cNvPr id="3" name="포인트"/>
           <p:cNvSpPr/>
           <p:nvPr/>
         </p:nvSpPr>
         <p:spPr>
           <a:xfrm>
-            <a:off x="9905695" y="-1463040"/>
-            <a:ext cx="3840480" cy="3840480"/>
-          </a:xfrm>
-          <a:prstGeom prst="ellipse">
+            <a:off x="5958687" y="246888"/>
+            <a:ext cx="274320" cy="274320"/>
+          </a:xfrm>
+          <a:prstGeom prst="heart">
             <a:avLst/>
           </a:prstGeom>
           <a:solidFill>
-            <a:srgbClr val="D1FAEC"/>
+            <a:srgbClr val="7BEAC5"/>
           </a:solidFill>
           <a:ln>
             <a:noFill/>
@@ -3509,14 +3589,14 @@
         </p:nvSpPr>
         <p:spPr>
           <a:xfrm>
-            <a:off x="11094415" y="274320"/>
-            <a:ext cx="411480" cy="411480"/>
-          </a:xfrm>
-          <a:prstGeom prst="ellipse">
+            <a:off x="5684367" y="1572768"/>
+            <a:ext cx="822960" cy="22860"/>
+          </a:xfrm>
+          <a:prstGeom prst="rect">
             <a:avLst/>
           </a:prstGeom>
           <a:solidFill>
-            <a:srgbClr val="26C590"/>
+            <a:srgbClr val="7BEAC5"/>
           </a:solidFill>
           <a:ln>
             <a:noFill/>
@@ -3527,6 +3607,44 @@
           <a:lstStyle/>
           <a:p>
             <a:pPr algn="ctr"/>
+          </a:p>
+        </p:txBody>
+      </p:sp>
+      <p:sp>
+        <p:nvSpPr>
+          <p:cNvPr id="5" name="상단 라벨"/>
+          <p:cNvSpPr txBox="1"/>
+          <p:nvPr/>
+        </p:nvSpPr>
+        <p:spPr>
+          <a:xfrm>
+            <a:off x="640080" y="182880"/>
+            <a:ext cx="3657600" cy="274320"/>
+          </a:xfrm>
+          <a:prstGeom prst="rect">
+            <a:avLst/>
+          </a:prstGeom>
+          <a:noFill/>
+        </p:spPr>
+        <p:txBody>
+          <a:bodyPr wrap="square" lIns="54864" rIns="54864" tIns="27432" bIns="27432" anchor="ctr">
+            <a:noAutofit/>
+          </a:bodyPr>
+          <a:lstStyle/>
+          <a:p>
+            <a:pPr algn="l">
+              <a:lnSpc>
+                <a:spcPct val="115000"/>
+              </a:lnSpc>
+            </a:pPr>
+            <a:r>
+              <a:rPr sz="800" b="1" i="0" spc="250">
+                <a:solidFill>
+                  <a:srgbClr val="8E8780"/>
+                </a:solidFill>
+              </a:rPr>
+              <a:t>PRESENTATION</a:t>
+            </a:r>
           </a:p>
         </p:txBody>
       </p:sp>
@@ -3542,8 +3660,8 @@
         </p:nvSpPr>
         <p:spPr>
           <a:xfrm>
-            <a:off x="640080" y="457200"/>
-            <a:ext cx="9722815" cy="868680"/>
+            <a:off x="1371600" y="640080"/>
+            <a:ext cx="9448495" cy="868680"/>
           </a:xfrm>
         </p:spPr>
         <p:txBody>
@@ -3552,7 +3670,7 @@
           </a:bodyPr>
           <a:lstStyle/>
           <a:p>
-            <a:pPr algn="l">
+            <a:pPr algn="ctr">
               <a:lnSpc>
                 <a:spcPct val="105000"/>
               </a:lnSpc>
@@ -3560,7 +3678,7 @@
             <a:r>
               <a:rPr sz="3000" b="1" i="0">
                 <a:solidFill>
-                  <a:srgbClr val="115F45"/>
+                  <a:srgbClr val="26231F"/>
                 </a:solidFill>
               </a:rPr>
               <a:t>목차</a:t>
@@ -3570,26 +3688,26 @@
       </p:sp>
       <p:sp>
         <p:nvSpPr>
-          <p:cNvPr id="5" name="줄 1"/>
+          <p:cNvPr id="6" name="줄 1"/>
           <p:cNvSpPr/>
           <p:nvPr/>
         </p:nvSpPr>
         <p:spPr>
           <a:xfrm>
-            <a:off x="640080" y="1600200"/>
+            <a:off x="640080" y="1783080"/>
             <a:ext cx="10911535" cy="914400"/>
           </a:xfrm>
           <a:prstGeom prst="roundRect">
             <a:avLst>
-              <a:gd name="adj" fmla="val 8000"/>
+              <a:gd name="adj" fmla="val 7000"/>
             </a:avLst>
           </a:prstGeom>
           <a:solidFill>
-            <a:srgbClr val="EEFCF7"/>
+            <a:srgbClr val="FFFFFF"/>
           </a:solidFill>
           <a:ln w="12700">
             <a:solidFill>
-              <a:srgbClr val="D1FAEC"/>
+              <a:srgbClr val="A5F3D9"/>
             </a:solidFill>
           </a:ln>
         </p:spPr>
@@ -3603,57 +3721,14 @@
       </p:sp>
       <p:sp>
         <p:nvSpPr>
-          <p:cNvPr id="6" name="번호 1"/>
-          <p:cNvSpPr/>
-          <p:nvPr/>
-        </p:nvSpPr>
-        <p:spPr>
-          <a:xfrm>
-            <a:off x="822959" y="1828800"/>
-            <a:ext cx="457200" cy="457200"/>
-          </a:xfrm>
-          <a:prstGeom prst="ellipse">
-            <a:avLst/>
-          </a:prstGeom>
-          <a:solidFill>
-            <a:srgbClr val="26C590"/>
-          </a:solidFill>
-          <a:ln>
-            <a:noFill/>
-          </a:ln>
-        </p:spPr>
-        <p:txBody>
-          <a:bodyPr rtlCol="0" anchor="ctr" wrap="square" lIns="54864" rIns="54864" tIns="27432" bIns="27432">
-            <a:noAutofit/>
-          </a:bodyPr>
-          <a:lstStyle/>
-          <a:p>
-            <a:pPr algn="ctr">
-              <a:lnSpc>
-                <a:spcPct val="100000"/>
-              </a:lnSpc>
-            </a:pPr>
-            <a:r>
-              <a:rPr sz="1600" b="1" i="0">
-                <a:solidFill>
-                  <a:srgbClr val="FFFFFF"/>
-                </a:solidFill>
-              </a:rPr>
-              <a:t>1</a:t>
-            </a:r>
-          </a:p>
-        </p:txBody>
-      </p:sp>
-      <p:sp>
-        <p:nvSpPr>
-          <p:cNvPr id="7" name="TextBox 6"/>
+          <p:cNvPr id="7" name="번호 1"/>
           <p:cNvSpPr txBox="1"/>
           <p:nvPr/>
         </p:nvSpPr>
         <p:spPr>
           <a:xfrm>
-            <a:off x="1508760" y="1645920"/>
-            <a:ext cx="2743200" cy="822960"/>
+            <a:off x="731519" y="1965960"/>
+            <a:ext cx="914400" cy="548640"/>
           </a:xfrm>
           <a:prstGeom prst="rect">
             <a:avLst/>
@@ -3672,12 +3747,12 @@
               </a:lnSpc>
             </a:pPr>
             <a:r>
-              <a:rPr sz="1800" b="1" i="0">
+              <a:rPr sz="2400" b="1" i="0">
                 <a:solidFill>
-                  <a:srgbClr val="115F45"/>
+                  <a:srgbClr val="7BEAC5"/>
                 </a:solidFill>
               </a:rPr>
-              <a:t>우리 모임 소개</a:t>
+              <a:t>01</a:t>
             </a:r>
           </a:p>
         </p:txBody>
@@ -3690,8 +3765,8 @@
         </p:nvSpPr>
         <p:spPr>
           <a:xfrm>
-            <a:off x="4297680" y="1645920"/>
-            <a:ext cx="7071055" cy="822960"/>
+            <a:off x="1508760" y="1828800"/>
+            <a:ext cx="2743200" cy="822960"/>
           </a:xfrm>
           <a:prstGeom prst="rect">
             <a:avLst/>
@@ -3710,102 +3785,26 @@
               </a:lnSpc>
             </a:pPr>
             <a:r>
-              <a:rPr sz="1500" b="0" i="0">
+              <a:rPr sz="1800" b="1" i="0">
                 <a:solidFill>
-                  <a:srgbClr val="2B2B2B"/>
+                  <a:srgbClr val="27493E"/>
                 </a:solidFill>
               </a:rPr>
-              <a:t>한 줄로 내용을 적어 주세요</a:t>
-            </a:r>
-          </a:p>
-        </p:txBody>
-      </p:sp>
-      <p:sp>
-        <p:nvSpPr>
-          <p:cNvPr id="9" name="줄 2"/>
-          <p:cNvSpPr/>
-          <p:nvPr/>
-        </p:nvSpPr>
-        <p:spPr>
-          <a:xfrm>
-            <a:off x="640080" y="2651760"/>
-            <a:ext cx="10911535" cy="914400"/>
-          </a:xfrm>
-          <a:prstGeom prst="roundRect">
-            <a:avLst>
-              <a:gd name="adj" fmla="val 8000"/>
-            </a:avLst>
-          </a:prstGeom>
-          <a:solidFill>
-            <a:srgbClr val="EEFCF7"/>
-          </a:solidFill>
-          <a:ln w="12700">
-            <a:solidFill>
-              <a:srgbClr val="D1FAEC"/>
-            </a:solidFill>
-          </a:ln>
-        </p:spPr>
-        <p:txBody>
-          <a:bodyPr rtlCol="0" anchor="ctr"/>
-          <a:lstStyle/>
-          <a:p>
-            <a:pPr algn="ctr"/>
-          </a:p>
-        </p:txBody>
-      </p:sp>
-      <p:sp>
-        <p:nvSpPr>
-          <p:cNvPr id="10" name="번호 2"/>
-          <p:cNvSpPr/>
-          <p:nvPr/>
-        </p:nvSpPr>
-        <p:spPr>
-          <a:xfrm>
-            <a:off x="822959" y="2880360"/>
-            <a:ext cx="457200" cy="457200"/>
-          </a:xfrm>
-          <a:prstGeom prst="ellipse">
-            <a:avLst/>
-          </a:prstGeom>
-          <a:solidFill>
-            <a:srgbClr val="26C590"/>
-          </a:solidFill>
-          <a:ln>
-            <a:noFill/>
-          </a:ln>
-        </p:spPr>
-        <p:txBody>
-          <a:bodyPr rtlCol="0" anchor="ctr" wrap="square" lIns="54864" rIns="54864" tIns="27432" bIns="27432">
-            <a:noAutofit/>
-          </a:bodyPr>
-          <a:lstStyle/>
-          <a:p>
-            <a:pPr algn="ctr">
-              <a:lnSpc>
-                <a:spcPct val="100000"/>
-              </a:lnSpc>
-            </a:pPr>
-            <a:r>
-              <a:rPr sz="1600" b="1" i="0">
-                <a:solidFill>
-                  <a:srgbClr val="FFFFFF"/>
-                </a:solidFill>
-              </a:rPr>
-              <a:t>2</a:t>
-            </a:r>
-          </a:p>
-        </p:txBody>
-      </p:sp>
-      <p:sp>
-        <p:nvSpPr>
-          <p:cNvPr id="11" name="TextBox 10"/>
+              <a:t>우리 모임 소개</a:t>
+            </a:r>
+          </a:p>
+        </p:txBody>
+      </p:sp>
+      <p:sp>
+        <p:nvSpPr>
+          <p:cNvPr id="9" name="TextBox 8"/>
           <p:cNvSpPr txBox="1"/>
           <p:nvPr/>
         </p:nvSpPr>
         <p:spPr>
           <a:xfrm>
-            <a:off x="1508760" y="2697479"/>
-            <a:ext cx="2743200" cy="822960"/>
+            <a:off x="4297680" y="1828800"/>
+            <a:ext cx="7071055" cy="822960"/>
           </a:xfrm>
           <a:prstGeom prst="rect">
             <a:avLst/>
@@ -3824,26 +3823,59 @@
               </a:lnSpc>
             </a:pPr>
             <a:r>
-              <a:rPr sz="1800" b="1" i="0">
+              <a:rPr sz="1500" b="0" i="0">
                 <a:solidFill>
-                  <a:srgbClr val="115F45"/>
+                  <a:srgbClr val="26231F"/>
                 </a:solidFill>
               </a:rPr>
-              <a:t>활동 이야기</a:t>
-            </a:r>
-          </a:p>
-        </p:txBody>
-      </p:sp>
-      <p:sp>
-        <p:nvSpPr>
-          <p:cNvPr id="12" name="TextBox 11"/>
+              <a:t>한 줄로 내용을 적어 주세요</a:t>
+            </a:r>
+          </a:p>
+        </p:txBody>
+      </p:sp>
+      <p:sp>
+        <p:nvSpPr>
+          <p:cNvPr id="10" name="줄 2"/>
+          <p:cNvSpPr/>
+          <p:nvPr/>
+        </p:nvSpPr>
+        <p:spPr>
+          <a:xfrm>
+            <a:off x="640080" y="2834639"/>
+            <a:ext cx="10911535" cy="914400"/>
+          </a:xfrm>
+          <a:prstGeom prst="roundRect">
+            <a:avLst>
+              <a:gd name="adj" fmla="val 7000"/>
+            </a:avLst>
+          </a:prstGeom>
+          <a:solidFill>
+            <a:srgbClr val="FFFFFF"/>
+          </a:solidFill>
+          <a:ln w="12700">
+            <a:solidFill>
+              <a:srgbClr val="A5F3D9"/>
+            </a:solidFill>
+          </a:ln>
+        </p:spPr>
+        <p:txBody>
+          <a:bodyPr rtlCol="0" anchor="ctr"/>
+          <a:lstStyle/>
+          <a:p>
+            <a:pPr algn="ctr"/>
+          </a:p>
+        </p:txBody>
+      </p:sp>
+      <p:sp>
+        <p:nvSpPr>
+          <p:cNvPr id="11" name="번호 2"/>
           <p:cNvSpPr txBox="1"/>
           <p:nvPr/>
         </p:nvSpPr>
         <p:spPr>
           <a:xfrm>
-            <a:off x="4297680" y="2697479"/>
-            <a:ext cx="7071055" cy="822960"/>
+            <a:off x="731519" y="3017520"/>
+            <a:ext cx="914400" cy="548640"/>
           </a:xfrm>
           <a:prstGeom prst="rect">
             <a:avLst/>
@@ -3862,101 +3894,25 @@
               </a:lnSpc>
             </a:pPr>
             <a:r>
-              <a:rPr sz="1500" b="0" i="0">
+              <a:rPr sz="2400" b="1" i="0">
                 <a:solidFill>
-                  <a:srgbClr val="2B2B2B"/>
+                  <a:srgbClr val="7BEAC5"/>
                 </a:solidFill>
               </a:rPr>
-              <a:t>한 줄로 내용을 적어 주세요</a:t>
-            </a:r>
-          </a:p>
-        </p:txBody>
-      </p:sp>
-      <p:sp>
-        <p:nvSpPr>
-          <p:cNvPr id="13" name="줄 3"/>
-          <p:cNvSpPr/>
-          <p:nvPr/>
-        </p:nvSpPr>
-        <p:spPr>
-          <a:xfrm>
-            <a:off x="640080" y="3703320"/>
-            <a:ext cx="10911535" cy="914400"/>
-          </a:xfrm>
-          <a:prstGeom prst="roundRect">
-            <a:avLst>
-              <a:gd name="adj" fmla="val 8000"/>
-            </a:avLst>
-          </a:prstGeom>
-          <a:solidFill>
-            <a:srgbClr val="EEFCF7"/>
-          </a:solidFill>
-          <a:ln w="12700">
-            <a:solidFill>
-              <a:srgbClr val="D1FAEC"/>
-            </a:solidFill>
-          </a:ln>
-        </p:spPr>
-        <p:txBody>
-          <a:bodyPr rtlCol="0" anchor="ctr"/>
-          <a:lstStyle/>
-          <a:p>
-            <a:pPr algn="ctr"/>
-          </a:p>
-        </p:txBody>
-      </p:sp>
-      <p:sp>
-        <p:nvSpPr>
-          <p:cNvPr id="14" name="번호 3"/>
-          <p:cNvSpPr/>
-          <p:nvPr/>
-        </p:nvSpPr>
-        <p:spPr>
-          <a:xfrm>
-            <a:off x="822959" y="3931920"/>
-            <a:ext cx="457200" cy="457200"/>
-          </a:xfrm>
-          <a:prstGeom prst="ellipse">
-            <a:avLst/>
-          </a:prstGeom>
-          <a:solidFill>
-            <a:srgbClr val="26C590"/>
-          </a:solidFill>
-          <a:ln>
-            <a:noFill/>
-          </a:ln>
-        </p:spPr>
-        <p:txBody>
-          <a:bodyPr rtlCol="0" anchor="ctr" wrap="square" lIns="54864" rIns="54864" tIns="27432" bIns="27432">
-            <a:noAutofit/>
-          </a:bodyPr>
-          <a:lstStyle/>
-          <a:p>
-            <a:pPr algn="ctr">
-              <a:lnSpc>
-                <a:spcPct val="100000"/>
-              </a:lnSpc>
-            </a:pPr>
-            <a:r>
-              <a:rPr sz="1600" b="1" i="0">
-                <a:solidFill>
-                  <a:srgbClr val="FFFFFF"/>
-                </a:solidFill>
-              </a:rPr>
-              <a:t>3</a:t>
-            </a:r>
-          </a:p>
-        </p:txBody>
-      </p:sp>
-      <p:sp>
-        <p:nvSpPr>
-          <p:cNvPr id="15" name="TextBox 14"/>
+              <a:t>02</a:t>
+            </a:r>
+          </a:p>
+        </p:txBody>
+      </p:sp>
+      <p:sp>
+        <p:nvSpPr>
+          <p:cNvPr id="12" name="TextBox 11"/>
           <p:cNvSpPr txBox="1"/>
           <p:nvPr/>
         </p:nvSpPr>
         <p:spPr>
           <a:xfrm>
-            <a:off x="1508760" y="3749039"/>
+            <a:off x="1508760" y="2880359"/>
             <a:ext cx="2743200" cy="822960"/>
           </a:xfrm>
           <a:prstGeom prst="rect">
@@ -3978,23 +3934,23 @@
             <a:r>
               <a:rPr sz="1800" b="1" i="0">
                 <a:solidFill>
-                  <a:srgbClr val="115F45"/>
+                  <a:srgbClr val="27493E"/>
                 </a:solidFill>
               </a:rPr>
-              <a:t>함께하는 사람들</a:t>
-            </a:r>
-          </a:p>
-        </p:txBody>
-      </p:sp>
-      <p:sp>
-        <p:nvSpPr>
-          <p:cNvPr id="16" name="TextBox 15"/>
+              <a:t>활동 이야기</a:t>
+            </a:r>
+          </a:p>
+        </p:txBody>
+      </p:sp>
+      <p:sp>
+        <p:nvSpPr>
+          <p:cNvPr id="13" name="TextBox 12"/>
           <p:cNvSpPr txBox="1"/>
           <p:nvPr/>
         </p:nvSpPr>
         <p:spPr>
           <a:xfrm>
-            <a:off x="4297680" y="3749039"/>
+            <a:off x="4297680" y="2880359"/>
             <a:ext cx="7071055" cy="822960"/>
           </a:xfrm>
           <a:prstGeom prst="rect">
@@ -4016,7 +3972,7 @@
             <a:r>
               <a:rPr sz="1500" b="0" i="0">
                 <a:solidFill>
-                  <a:srgbClr val="2B2B2B"/>
+                  <a:srgbClr val="26231F"/>
                 </a:solidFill>
               </a:rPr>
               <a:t>한 줄로 내용을 적어 주세요</a:t>
@@ -4026,26 +3982,26 @@
       </p:sp>
       <p:sp>
         <p:nvSpPr>
-          <p:cNvPr id="17" name="줄 4"/>
+          <p:cNvPr id="14" name="줄 3"/>
           <p:cNvSpPr/>
           <p:nvPr/>
         </p:nvSpPr>
         <p:spPr>
           <a:xfrm>
-            <a:off x="640080" y="4754879"/>
+            <a:off x="640080" y="3886200"/>
             <a:ext cx="10911535" cy="914400"/>
           </a:xfrm>
           <a:prstGeom prst="roundRect">
             <a:avLst>
-              <a:gd name="adj" fmla="val 8000"/>
+              <a:gd name="adj" fmla="val 7000"/>
             </a:avLst>
           </a:prstGeom>
           <a:solidFill>
-            <a:srgbClr val="EEFCF7"/>
+            <a:srgbClr val="FFFFFF"/>
           </a:solidFill>
           <a:ln w="12700">
             <a:solidFill>
-              <a:srgbClr val="D1FAEC"/>
+              <a:srgbClr val="A5F3D9"/>
             </a:solidFill>
           </a:ln>
         </p:spPr>
@@ -4059,57 +4015,14 @@
       </p:sp>
       <p:sp>
         <p:nvSpPr>
-          <p:cNvPr id="18" name="번호 4"/>
-          <p:cNvSpPr/>
-          <p:nvPr/>
-        </p:nvSpPr>
-        <p:spPr>
-          <a:xfrm>
-            <a:off x="822959" y="4983479"/>
-            <a:ext cx="457200" cy="457200"/>
-          </a:xfrm>
-          <a:prstGeom prst="ellipse">
-            <a:avLst/>
-          </a:prstGeom>
-          <a:solidFill>
-            <a:srgbClr val="26C590"/>
-          </a:solidFill>
-          <a:ln>
-            <a:noFill/>
-          </a:ln>
-        </p:spPr>
-        <p:txBody>
-          <a:bodyPr rtlCol="0" anchor="ctr" wrap="square" lIns="54864" rIns="54864" tIns="27432" bIns="27432">
-            <a:noAutofit/>
-          </a:bodyPr>
-          <a:lstStyle/>
-          <a:p>
-            <a:pPr algn="ctr">
-              <a:lnSpc>
-                <a:spcPct val="100000"/>
-              </a:lnSpc>
-            </a:pPr>
-            <a:r>
-              <a:rPr sz="1600" b="1" i="0">
-                <a:solidFill>
-                  <a:srgbClr val="FFFFFF"/>
-                </a:solidFill>
-              </a:rPr>
-              <a:t>4</a:t>
-            </a:r>
-          </a:p>
-        </p:txBody>
-      </p:sp>
-      <p:sp>
-        <p:nvSpPr>
-          <p:cNvPr id="19" name="TextBox 18"/>
+          <p:cNvPr id="15" name="번호 3"/>
           <p:cNvSpPr txBox="1"/>
           <p:nvPr/>
         </p:nvSpPr>
         <p:spPr>
           <a:xfrm>
-            <a:off x="1508760" y="4800599"/>
-            <a:ext cx="2743200" cy="822960"/>
+            <a:off x="731519" y="4069080"/>
+            <a:ext cx="914400" cy="548640"/>
           </a:xfrm>
           <a:prstGeom prst="rect">
             <a:avLst/>
@@ -4128,26 +4041,26 @@
               </a:lnSpc>
             </a:pPr>
             <a:r>
-              <a:rPr sz="1800" b="1" i="0">
+              <a:rPr sz="2400" b="1" i="0">
                 <a:solidFill>
-                  <a:srgbClr val="115F45"/>
+                  <a:srgbClr val="7BEAC5"/>
                 </a:solidFill>
               </a:rPr>
-              <a:t>참여 방법</a:t>
-            </a:r>
-          </a:p>
-        </p:txBody>
-      </p:sp>
-      <p:sp>
-        <p:nvSpPr>
-          <p:cNvPr id="20" name="TextBox 19"/>
+              <a:t>03</a:t>
+            </a:r>
+          </a:p>
+        </p:txBody>
+      </p:sp>
+      <p:sp>
+        <p:nvSpPr>
+          <p:cNvPr id="16" name="TextBox 15"/>
           <p:cNvSpPr txBox="1"/>
           <p:nvPr/>
         </p:nvSpPr>
         <p:spPr>
           <a:xfrm>
-            <a:off x="4297680" y="4800599"/>
-            <a:ext cx="7071055" cy="822960"/>
+            <a:off x="1508760" y="3931920"/>
+            <a:ext cx="2743200" cy="822960"/>
           </a:xfrm>
           <a:prstGeom prst="rect">
             <a:avLst/>
@@ -4166,9 +4079,194 @@
               </a:lnSpc>
             </a:pPr>
             <a:r>
+              <a:rPr sz="1800" b="1" i="0">
+                <a:solidFill>
+                  <a:srgbClr val="27493E"/>
+                </a:solidFill>
+              </a:rPr>
+              <a:t>함께하는 사람들</a:t>
+            </a:r>
+          </a:p>
+        </p:txBody>
+      </p:sp>
+      <p:sp>
+        <p:nvSpPr>
+          <p:cNvPr id="17" name="TextBox 16"/>
+          <p:cNvSpPr txBox="1"/>
+          <p:nvPr/>
+        </p:nvSpPr>
+        <p:spPr>
+          <a:xfrm>
+            <a:off x="4297680" y="3931920"/>
+            <a:ext cx="7071055" cy="822960"/>
+          </a:xfrm>
+          <a:prstGeom prst="rect">
+            <a:avLst/>
+          </a:prstGeom>
+          <a:noFill/>
+        </p:spPr>
+        <p:txBody>
+          <a:bodyPr wrap="square" lIns="54864" rIns="54864" tIns="27432" bIns="27432" anchor="ctr">
+            <a:noAutofit/>
+          </a:bodyPr>
+          <a:lstStyle/>
+          <a:p>
+            <a:pPr algn="l">
+              <a:lnSpc>
+                <a:spcPct val="115000"/>
+              </a:lnSpc>
+            </a:pPr>
+            <a:r>
               <a:rPr sz="1500" b="0" i="0">
                 <a:solidFill>
-                  <a:srgbClr val="2B2B2B"/>
+                  <a:srgbClr val="26231F"/>
+                </a:solidFill>
+              </a:rPr>
+              <a:t>한 줄로 내용을 적어 주세요</a:t>
+            </a:r>
+          </a:p>
+        </p:txBody>
+      </p:sp>
+      <p:sp>
+        <p:nvSpPr>
+          <p:cNvPr id="18" name="줄 4"/>
+          <p:cNvSpPr/>
+          <p:nvPr/>
+        </p:nvSpPr>
+        <p:spPr>
+          <a:xfrm>
+            <a:off x="640080" y="4937759"/>
+            <a:ext cx="10911535" cy="914400"/>
+          </a:xfrm>
+          <a:prstGeom prst="roundRect">
+            <a:avLst>
+              <a:gd name="adj" fmla="val 7000"/>
+            </a:avLst>
+          </a:prstGeom>
+          <a:solidFill>
+            <a:srgbClr val="FFFFFF"/>
+          </a:solidFill>
+          <a:ln w="12700">
+            <a:solidFill>
+              <a:srgbClr val="A5F3D9"/>
+            </a:solidFill>
+          </a:ln>
+        </p:spPr>
+        <p:txBody>
+          <a:bodyPr rtlCol="0" anchor="ctr"/>
+          <a:lstStyle/>
+          <a:p>
+            <a:pPr algn="ctr"/>
+          </a:p>
+        </p:txBody>
+      </p:sp>
+      <p:sp>
+        <p:nvSpPr>
+          <p:cNvPr id="19" name="번호 4"/>
+          <p:cNvSpPr txBox="1"/>
+          <p:nvPr/>
+        </p:nvSpPr>
+        <p:spPr>
+          <a:xfrm>
+            <a:off x="731519" y="5120640"/>
+            <a:ext cx="914400" cy="548640"/>
+          </a:xfrm>
+          <a:prstGeom prst="rect">
+            <a:avLst/>
+          </a:prstGeom>
+          <a:noFill/>
+        </p:spPr>
+        <p:txBody>
+          <a:bodyPr wrap="square" lIns="54864" rIns="54864" tIns="27432" bIns="27432" anchor="ctr">
+            <a:noAutofit/>
+          </a:bodyPr>
+          <a:lstStyle/>
+          <a:p>
+            <a:pPr algn="l">
+              <a:lnSpc>
+                <a:spcPct val="115000"/>
+              </a:lnSpc>
+            </a:pPr>
+            <a:r>
+              <a:rPr sz="2400" b="1" i="0">
+                <a:solidFill>
+                  <a:srgbClr val="7BEAC5"/>
+                </a:solidFill>
+              </a:rPr>
+              <a:t>04</a:t>
+            </a:r>
+          </a:p>
+        </p:txBody>
+      </p:sp>
+      <p:sp>
+        <p:nvSpPr>
+          <p:cNvPr id="20" name="TextBox 19"/>
+          <p:cNvSpPr txBox="1"/>
+          <p:nvPr/>
+        </p:nvSpPr>
+        <p:spPr>
+          <a:xfrm>
+            <a:off x="1508760" y="4983479"/>
+            <a:ext cx="2743200" cy="822960"/>
+          </a:xfrm>
+          <a:prstGeom prst="rect">
+            <a:avLst/>
+          </a:prstGeom>
+          <a:noFill/>
+        </p:spPr>
+        <p:txBody>
+          <a:bodyPr wrap="square" lIns="54864" rIns="54864" tIns="27432" bIns="27432" anchor="ctr">
+            <a:noAutofit/>
+          </a:bodyPr>
+          <a:lstStyle/>
+          <a:p>
+            <a:pPr algn="l">
+              <a:lnSpc>
+                <a:spcPct val="115000"/>
+              </a:lnSpc>
+            </a:pPr>
+            <a:r>
+              <a:rPr sz="1800" b="1" i="0">
+                <a:solidFill>
+                  <a:srgbClr val="27493E"/>
+                </a:solidFill>
+              </a:rPr>
+              <a:t>참여 방법</a:t>
+            </a:r>
+          </a:p>
+        </p:txBody>
+      </p:sp>
+      <p:sp>
+        <p:nvSpPr>
+          <p:cNvPr id="21" name="TextBox 20"/>
+          <p:cNvSpPr txBox="1"/>
+          <p:nvPr/>
+        </p:nvSpPr>
+        <p:spPr>
+          <a:xfrm>
+            <a:off x="4297680" y="4983479"/>
+            <a:ext cx="7071055" cy="822960"/>
+          </a:xfrm>
+          <a:prstGeom prst="rect">
+            <a:avLst/>
+          </a:prstGeom>
+          <a:noFill/>
+        </p:spPr>
+        <p:txBody>
+          <a:bodyPr wrap="square" lIns="54864" rIns="54864" tIns="27432" bIns="27432" anchor="ctr">
+            <a:noAutofit/>
+          </a:bodyPr>
+          <a:lstStyle/>
+          <a:p>
+            <a:pPr algn="l">
+              <a:lnSpc>
+                <a:spcPct val="115000"/>
+              </a:lnSpc>
+            </a:pPr>
+            <a:r>
+              <a:rPr sz="1500" b="0" i="0">
+                <a:solidFill>
+                  <a:srgbClr val="26231F"/>
                 </a:solidFill>
               </a:rPr>
               <a:t>한 줄로 내용을 적어 주세요</a:t>
@@ -4190,7 +4288,7 @@
     <p:bg>
       <p:bgPr>
         <a:solidFill>
-          <a:srgbClr val="FFFFFF"/>
+          <a:srgbClr val="EAFDF7"/>
         </a:solidFill>
         <a:effectLst/>
       </p:bgPr>
@@ -4204,20 +4302,20 @@
       <p:grpSpPr/>
       <p:sp>
         <p:nvSpPr>
-          <p:cNvPr id="3" name="장식"/>
+          <p:cNvPr id="3" name="포인트"/>
           <p:cNvSpPr/>
           <p:nvPr/>
         </p:nvSpPr>
         <p:spPr>
           <a:xfrm>
-            <a:off x="9905695" y="-1463040"/>
-            <a:ext cx="3840480" cy="3840480"/>
-          </a:xfrm>
-          <a:prstGeom prst="ellipse">
+            <a:off x="5958687" y="246888"/>
+            <a:ext cx="274320" cy="274320"/>
+          </a:xfrm>
+          <a:prstGeom prst="heart">
             <a:avLst/>
           </a:prstGeom>
           <a:solidFill>
-            <a:srgbClr val="D1FAEC"/>
+            <a:srgbClr val="7BEAC5"/>
           </a:solidFill>
           <a:ln>
             <a:noFill/>
@@ -4239,14 +4337,14 @@
         </p:nvSpPr>
         <p:spPr>
           <a:xfrm>
-            <a:off x="11094415" y="274320"/>
-            <a:ext cx="411480" cy="411480"/>
-          </a:xfrm>
-          <a:prstGeom prst="ellipse">
+            <a:off x="5684367" y="1572768"/>
+            <a:ext cx="822960" cy="22860"/>
+          </a:xfrm>
+          <a:prstGeom prst="rect">
             <a:avLst/>
           </a:prstGeom>
           <a:solidFill>
-            <a:srgbClr val="26C590"/>
+            <a:srgbClr val="7BEAC5"/>
           </a:solidFill>
           <a:ln>
             <a:noFill/>
@@ -4257,6 +4355,44 @@
           <a:lstStyle/>
           <a:p>
             <a:pPr algn="ctr"/>
+          </a:p>
+        </p:txBody>
+      </p:sp>
+      <p:sp>
+        <p:nvSpPr>
+          <p:cNvPr id="5" name="상단 라벨"/>
+          <p:cNvSpPr txBox="1"/>
+          <p:nvPr/>
+        </p:nvSpPr>
+        <p:spPr>
+          <a:xfrm>
+            <a:off x="640080" y="182880"/>
+            <a:ext cx="3657600" cy="274320"/>
+          </a:xfrm>
+          <a:prstGeom prst="rect">
+            <a:avLst/>
+          </a:prstGeom>
+          <a:noFill/>
+        </p:spPr>
+        <p:txBody>
+          <a:bodyPr wrap="square" lIns="54864" rIns="54864" tIns="27432" bIns="27432" anchor="ctr">
+            <a:noAutofit/>
+          </a:bodyPr>
+          <a:lstStyle/>
+          <a:p>
+            <a:pPr algn="l">
+              <a:lnSpc>
+                <a:spcPct val="115000"/>
+              </a:lnSpc>
+            </a:pPr>
+            <a:r>
+              <a:rPr sz="800" b="1" i="0" spc="250">
+                <a:solidFill>
+                  <a:srgbClr val="8E8780"/>
+                </a:solidFill>
+              </a:rPr>
+              <a:t>PRESENTATION</a:t>
+            </a:r>
           </a:p>
         </p:txBody>
       </p:sp>
@@ -4272,8 +4408,8 @@
         </p:nvSpPr>
         <p:spPr>
           <a:xfrm>
-            <a:off x="640080" y="457200"/>
-            <a:ext cx="9722815" cy="868680"/>
+            <a:off x="1371600" y="640080"/>
+            <a:ext cx="9448495" cy="868680"/>
           </a:xfrm>
         </p:spPr>
         <p:txBody>
@@ -4282,7 +4418,7 @@
           </a:bodyPr>
           <a:lstStyle/>
           <a:p>
-            <a:pPr algn="l">
+            <a:pPr algn="ctr">
               <a:lnSpc>
                 <a:spcPct val="105000"/>
               </a:lnSpc>
@@ -4290,7 +4426,7 @@
             <a:r>
               <a:rPr sz="3000" b="1" i="0">
                 <a:solidFill>
-                  <a:srgbClr val="115F45"/>
+                  <a:srgbClr val="26231F"/>
                 </a:solidFill>
               </a:rPr>
               <a:t>핵심 메시지</a:t>
@@ -4300,13 +4436,13 @@
       </p:sp>
       <p:sp>
         <p:nvSpPr>
-          <p:cNvPr id="5" name="핵심 문장"/>
+          <p:cNvPr id="6" name="핵심 문장"/>
           <p:cNvSpPr txBox="1"/>
           <p:nvPr/>
         </p:nvSpPr>
         <p:spPr>
           <a:xfrm>
-            <a:off x="640080" y="1600200"/>
+            <a:off x="640080" y="1783080"/>
             <a:ext cx="10911535" cy="1188720"/>
           </a:xfrm>
           <a:prstGeom prst="rect">
@@ -4328,7 +4464,7 @@
             <a:r>
               <a:rPr sz="2600" b="1" i="0">
                 <a:solidFill>
-                  <a:srgbClr val="115F45"/>
+                  <a:srgbClr val="27493E"/>
                 </a:solidFill>
               </a:rPr>
               <a:t>한 문장으로 말하면 — 여기에 핵심 메시지를 입력하세요</a:t>
@@ -4338,26 +4474,26 @@
       </p:sp>
       <p:sp>
         <p:nvSpPr>
-          <p:cNvPr id="6" name="카드 1"/>
+          <p:cNvPr id="7" name="카드 1"/>
           <p:cNvSpPr/>
           <p:nvPr/>
         </p:nvSpPr>
         <p:spPr>
           <a:xfrm>
-            <a:off x="640080" y="3063240"/>
+            <a:off x="640080" y="3246120"/>
             <a:ext cx="3484778" cy="3017520"/>
           </a:xfrm>
           <a:prstGeom prst="roundRect">
             <a:avLst>
-              <a:gd name="adj" fmla="val 8000"/>
+              <a:gd name="adj" fmla="val 7000"/>
             </a:avLst>
           </a:prstGeom>
           <a:solidFill>
-            <a:srgbClr val="EEFCF7"/>
+            <a:srgbClr val="FFFFFF"/>
           </a:solidFill>
-          <a:ln w="15875">
+          <a:ln w="12700">
             <a:solidFill>
-              <a:srgbClr val="D1FAEC"/>
+              <a:srgbClr val="A5F3D9"/>
             </a:solidFill>
           </a:ln>
         </p:spPr>
@@ -4371,57 +4507,14 @@
       </p:sp>
       <p:sp>
         <p:nvSpPr>
-          <p:cNvPr id="7" name="번호 1"/>
-          <p:cNvSpPr/>
-          <p:nvPr/>
-        </p:nvSpPr>
-        <p:spPr>
-          <a:xfrm>
-            <a:off x="822959" y="3246120"/>
-            <a:ext cx="457200" cy="457200"/>
-          </a:xfrm>
-          <a:prstGeom prst="ellipse">
-            <a:avLst/>
-          </a:prstGeom>
-          <a:solidFill>
-            <a:srgbClr val="26C590"/>
-          </a:solidFill>
-          <a:ln>
-            <a:noFill/>
-          </a:ln>
-        </p:spPr>
-        <p:txBody>
-          <a:bodyPr rtlCol="0" anchor="ctr" wrap="square" lIns="54864" rIns="54864" tIns="27432" bIns="27432">
-            <a:noAutofit/>
-          </a:bodyPr>
-          <a:lstStyle/>
-          <a:p>
-            <a:pPr algn="ctr">
-              <a:lnSpc>
-                <a:spcPct val="100000"/>
-              </a:lnSpc>
-            </a:pPr>
-            <a:r>
-              <a:rPr sz="1600" b="1" i="0">
-                <a:solidFill>
-                  <a:srgbClr val="FFFFFF"/>
-                </a:solidFill>
-              </a:rPr>
-              <a:t>1</a:t>
-            </a:r>
-          </a:p>
-        </p:txBody>
-      </p:sp>
-      <p:sp>
-        <p:nvSpPr>
-          <p:cNvPr id="8" name="TextBox 7"/>
+          <p:cNvPr id="8" name="번호 1"/>
           <p:cNvSpPr txBox="1"/>
           <p:nvPr/>
         </p:nvSpPr>
         <p:spPr>
           <a:xfrm>
-            <a:off x="777240" y="3840480"/>
-            <a:ext cx="3210458" cy="640080"/>
+            <a:off x="731519" y="3383280"/>
+            <a:ext cx="914400" cy="548640"/>
           </a:xfrm>
           <a:prstGeom prst="rect">
             <a:avLst/>
@@ -4440,9 +4533,47 @@
               </a:lnSpc>
             </a:pPr>
             <a:r>
+              <a:rPr sz="2400" b="1" i="0">
+                <a:solidFill>
+                  <a:srgbClr val="7BEAC5"/>
+                </a:solidFill>
+              </a:rPr>
+              <a:t>01</a:t>
+            </a:r>
+          </a:p>
+        </p:txBody>
+      </p:sp>
+      <p:sp>
+        <p:nvSpPr>
+          <p:cNvPr id="9" name="TextBox 8"/>
+          <p:cNvSpPr txBox="1"/>
+          <p:nvPr/>
+        </p:nvSpPr>
+        <p:spPr>
+          <a:xfrm>
+            <a:off x="777240" y="4023360"/>
+            <a:ext cx="3210458" cy="640080"/>
+          </a:xfrm>
+          <a:prstGeom prst="rect">
+            <a:avLst/>
+          </a:prstGeom>
+          <a:noFill/>
+        </p:spPr>
+        <p:txBody>
+          <a:bodyPr wrap="square" lIns="54864" rIns="54864" tIns="27432" bIns="27432" anchor="ctr">
+            <a:noAutofit/>
+          </a:bodyPr>
+          <a:lstStyle/>
+          <a:p>
+            <a:pPr algn="l">
+              <a:lnSpc>
+                <a:spcPct val="115000"/>
+              </a:lnSpc>
+            </a:pPr>
+            <a:r>
               <a:rPr sz="1800" b="1" i="0">
                 <a:solidFill>
-                  <a:srgbClr val="115F45"/>
+                  <a:srgbClr val="27493E"/>
                 </a:solidFill>
               </a:rPr>
               <a:t>모임의 취지</a:t>
@@ -4452,13 +4583,13 @@
       </p:sp>
       <p:sp>
         <p:nvSpPr>
-          <p:cNvPr id="9" name="TextBox 8"/>
+          <p:cNvPr id="10" name="TextBox 9"/>
           <p:cNvSpPr txBox="1"/>
           <p:nvPr/>
         </p:nvSpPr>
         <p:spPr>
           <a:xfrm>
-            <a:off x="777240" y="4526280"/>
+            <a:off x="777240" y="4709160"/>
             <a:ext cx="3210458" cy="1417319"/>
           </a:xfrm>
           <a:prstGeom prst="rect">
@@ -4480,7 +4611,7 @@
             <a:r>
               <a:rPr sz="1600" b="0" i="0">
                 <a:solidFill>
-                  <a:srgbClr val="2B2B2B"/>
+                  <a:srgbClr val="26231F"/>
                 </a:solidFill>
               </a:rPr>
               <a:t>내용을 입력하세요</a:t>
@@ -4495,7 +4626,7 @@
             <a:r>
               <a:rPr sz="1600" b="0" i="0">
                 <a:solidFill>
-                  <a:srgbClr val="2B2B2B"/>
+                  <a:srgbClr val="26231F"/>
                 </a:solidFill>
               </a:rPr>
               <a:t>내용을 입력하세요</a:t>
@@ -4505,26 +4636,26 @@
       </p:sp>
       <p:sp>
         <p:nvSpPr>
-          <p:cNvPr id="10" name="카드 2"/>
+          <p:cNvPr id="11" name="카드 2"/>
           <p:cNvSpPr/>
           <p:nvPr/>
         </p:nvSpPr>
         <p:spPr>
           <a:xfrm>
-            <a:off x="4353458" y="3063240"/>
+            <a:off x="4353458" y="3246120"/>
             <a:ext cx="3484778" cy="3017520"/>
           </a:xfrm>
           <a:prstGeom prst="roundRect">
             <a:avLst>
-              <a:gd name="adj" fmla="val 8000"/>
+              <a:gd name="adj" fmla="val 7000"/>
             </a:avLst>
           </a:prstGeom>
           <a:solidFill>
-            <a:srgbClr val="EEFCF7"/>
+            <a:srgbClr val="FFFFFF"/>
           </a:solidFill>
-          <a:ln w="15875">
+          <a:ln w="12700">
             <a:solidFill>
-              <a:srgbClr val="D1FAEC"/>
+              <a:srgbClr val="A5F3D9"/>
             </a:solidFill>
           </a:ln>
         </p:spPr>
@@ -4538,57 +4669,14 @@
       </p:sp>
       <p:sp>
         <p:nvSpPr>
-          <p:cNvPr id="11" name="번호 2"/>
-          <p:cNvSpPr/>
-          <p:nvPr/>
-        </p:nvSpPr>
-        <p:spPr>
-          <a:xfrm>
-            <a:off x="4536338" y="3246120"/>
-            <a:ext cx="457200" cy="457200"/>
-          </a:xfrm>
-          <a:prstGeom prst="ellipse">
-            <a:avLst/>
-          </a:prstGeom>
-          <a:solidFill>
-            <a:srgbClr val="26C590"/>
-          </a:solidFill>
-          <a:ln>
-            <a:noFill/>
-          </a:ln>
-        </p:spPr>
-        <p:txBody>
-          <a:bodyPr rtlCol="0" anchor="ctr" wrap="square" lIns="54864" rIns="54864" tIns="27432" bIns="27432">
-            <a:noAutofit/>
-          </a:bodyPr>
-          <a:lstStyle/>
-          <a:p>
-            <a:pPr algn="ctr">
-              <a:lnSpc>
-                <a:spcPct val="100000"/>
-              </a:lnSpc>
-            </a:pPr>
-            <a:r>
-              <a:rPr sz="1600" b="1" i="0">
-                <a:solidFill>
-                  <a:srgbClr val="FFFFFF"/>
-                </a:solidFill>
-              </a:rPr>
-              <a:t>2</a:t>
-            </a:r>
-          </a:p>
-        </p:txBody>
-      </p:sp>
-      <p:sp>
-        <p:nvSpPr>
-          <p:cNvPr id="12" name="TextBox 11"/>
+          <p:cNvPr id="12" name="번호 2"/>
           <p:cNvSpPr txBox="1"/>
           <p:nvPr/>
         </p:nvSpPr>
         <p:spPr>
           <a:xfrm>
-            <a:off x="4490618" y="3840480"/>
-            <a:ext cx="3210458" cy="640080"/>
+            <a:off x="4444898" y="3383280"/>
+            <a:ext cx="914400" cy="548640"/>
           </a:xfrm>
           <a:prstGeom prst="rect">
             <a:avLst/>
@@ -4607,9 +4695,47 @@
               </a:lnSpc>
             </a:pPr>
             <a:r>
+              <a:rPr sz="2400" b="1" i="0">
+                <a:solidFill>
+                  <a:srgbClr val="7BEAC5"/>
+                </a:solidFill>
+              </a:rPr>
+              <a:t>02</a:t>
+            </a:r>
+          </a:p>
+        </p:txBody>
+      </p:sp>
+      <p:sp>
+        <p:nvSpPr>
+          <p:cNvPr id="13" name="TextBox 12"/>
+          <p:cNvSpPr txBox="1"/>
+          <p:nvPr/>
+        </p:nvSpPr>
+        <p:spPr>
+          <a:xfrm>
+            <a:off x="4490618" y="4023360"/>
+            <a:ext cx="3210458" cy="640080"/>
+          </a:xfrm>
+          <a:prstGeom prst="rect">
+            <a:avLst/>
+          </a:prstGeom>
+          <a:noFill/>
+        </p:spPr>
+        <p:txBody>
+          <a:bodyPr wrap="square" lIns="54864" rIns="54864" tIns="27432" bIns="27432" anchor="ctr">
+            <a:noAutofit/>
+          </a:bodyPr>
+          <a:lstStyle/>
+          <a:p>
+            <a:pPr algn="l">
+              <a:lnSpc>
+                <a:spcPct val="115000"/>
+              </a:lnSpc>
+            </a:pPr>
+            <a:r>
               <a:rPr sz="1800" b="1" i="0">
                 <a:solidFill>
-                  <a:srgbClr val="115F45"/>
+                  <a:srgbClr val="27493E"/>
                 </a:solidFill>
               </a:rPr>
               <a:t>활동 내용</a:t>
@@ -4619,13 +4745,13 @@
       </p:sp>
       <p:sp>
         <p:nvSpPr>
-          <p:cNvPr id="13" name="TextBox 12"/>
+          <p:cNvPr id="14" name="TextBox 13"/>
           <p:cNvSpPr txBox="1"/>
           <p:nvPr/>
         </p:nvSpPr>
         <p:spPr>
           <a:xfrm>
-            <a:off x="4490618" y="4526280"/>
+            <a:off x="4490618" y="4709160"/>
             <a:ext cx="3210458" cy="1417319"/>
           </a:xfrm>
           <a:prstGeom prst="rect">
@@ -4647,7 +4773,7 @@
             <a:r>
               <a:rPr sz="1600" b="0" i="0">
                 <a:solidFill>
-                  <a:srgbClr val="2B2B2B"/>
+                  <a:srgbClr val="26231F"/>
                 </a:solidFill>
               </a:rPr>
               <a:t>내용을 입력하세요</a:t>
@@ -4662,7 +4788,7 @@
             <a:r>
               <a:rPr sz="1600" b="0" i="0">
                 <a:solidFill>
-                  <a:srgbClr val="2B2B2B"/>
+                  <a:srgbClr val="26231F"/>
                 </a:solidFill>
               </a:rPr>
               <a:t>내용을 입력하세요</a:t>
@@ -4672,26 +4798,26 @@
       </p:sp>
       <p:sp>
         <p:nvSpPr>
-          <p:cNvPr id="14" name="카드 3"/>
+          <p:cNvPr id="15" name="카드 3"/>
           <p:cNvSpPr/>
           <p:nvPr/>
         </p:nvSpPr>
         <p:spPr>
           <a:xfrm>
-            <a:off x="8066836" y="3063240"/>
+            <a:off x="8066836" y="3246120"/>
             <a:ext cx="3484778" cy="3017520"/>
           </a:xfrm>
           <a:prstGeom prst="roundRect">
             <a:avLst>
-              <a:gd name="adj" fmla="val 8000"/>
+              <a:gd name="adj" fmla="val 7000"/>
             </a:avLst>
           </a:prstGeom>
           <a:solidFill>
-            <a:srgbClr val="EEFCF7"/>
+            <a:srgbClr val="FFFFFF"/>
           </a:solidFill>
-          <a:ln w="15875">
+          <a:ln w="12700">
             <a:solidFill>
-              <a:srgbClr val="D1FAEC"/>
+              <a:srgbClr val="A5F3D9"/>
             </a:solidFill>
           </a:ln>
         </p:spPr>
@@ -4705,57 +4831,14 @@
       </p:sp>
       <p:sp>
         <p:nvSpPr>
-          <p:cNvPr id="15" name="번호 3"/>
-          <p:cNvSpPr/>
-          <p:nvPr/>
-        </p:nvSpPr>
-        <p:spPr>
-          <a:xfrm>
-            <a:off x="8249716" y="3246120"/>
-            <a:ext cx="457200" cy="457200"/>
-          </a:xfrm>
-          <a:prstGeom prst="ellipse">
-            <a:avLst/>
-          </a:prstGeom>
-          <a:solidFill>
-            <a:srgbClr val="26C590"/>
-          </a:solidFill>
-          <a:ln>
-            <a:noFill/>
-          </a:ln>
-        </p:spPr>
-        <p:txBody>
-          <a:bodyPr rtlCol="0" anchor="ctr" wrap="square" lIns="54864" rIns="54864" tIns="27432" bIns="27432">
-            <a:noAutofit/>
-          </a:bodyPr>
-          <a:lstStyle/>
-          <a:p>
-            <a:pPr algn="ctr">
-              <a:lnSpc>
-                <a:spcPct val="100000"/>
-              </a:lnSpc>
-            </a:pPr>
-            <a:r>
-              <a:rPr sz="1600" b="1" i="0">
-                <a:solidFill>
-                  <a:srgbClr val="FFFFFF"/>
-                </a:solidFill>
-              </a:rPr>
-              <a:t>3</a:t>
-            </a:r>
-          </a:p>
-        </p:txBody>
-      </p:sp>
-      <p:sp>
-        <p:nvSpPr>
-          <p:cNvPr id="16" name="TextBox 15"/>
+          <p:cNvPr id="16" name="번호 3"/>
           <p:cNvSpPr txBox="1"/>
           <p:nvPr/>
         </p:nvSpPr>
         <p:spPr>
           <a:xfrm>
-            <a:off x="8203996" y="3840480"/>
-            <a:ext cx="3210458" cy="640080"/>
+            <a:off x="8158276" y="3383280"/>
+            <a:ext cx="914400" cy="548640"/>
           </a:xfrm>
           <a:prstGeom prst="rect">
             <a:avLst/>
@@ -4774,9 +4857,47 @@
               </a:lnSpc>
             </a:pPr>
             <a:r>
+              <a:rPr sz="2400" b="1" i="0">
+                <a:solidFill>
+                  <a:srgbClr val="7BEAC5"/>
+                </a:solidFill>
+              </a:rPr>
+              <a:t>03</a:t>
+            </a:r>
+          </a:p>
+        </p:txBody>
+      </p:sp>
+      <p:sp>
+        <p:nvSpPr>
+          <p:cNvPr id="17" name="TextBox 16"/>
+          <p:cNvSpPr txBox="1"/>
+          <p:nvPr/>
+        </p:nvSpPr>
+        <p:spPr>
+          <a:xfrm>
+            <a:off x="8203996" y="4023360"/>
+            <a:ext cx="3210458" cy="640080"/>
+          </a:xfrm>
+          <a:prstGeom prst="rect">
+            <a:avLst/>
+          </a:prstGeom>
+          <a:noFill/>
+        </p:spPr>
+        <p:txBody>
+          <a:bodyPr wrap="square" lIns="54864" rIns="54864" tIns="27432" bIns="27432" anchor="ctr">
+            <a:noAutofit/>
+          </a:bodyPr>
+          <a:lstStyle/>
+          <a:p>
+            <a:pPr algn="l">
+              <a:lnSpc>
+                <a:spcPct val="115000"/>
+              </a:lnSpc>
+            </a:pPr>
+            <a:r>
               <a:rPr sz="1800" b="1" i="0">
                 <a:solidFill>
-                  <a:srgbClr val="115F45"/>
+                  <a:srgbClr val="27493E"/>
                 </a:solidFill>
               </a:rPr>
               <a:t>참여 혜택</a:t>
@@ -4786,13 +4907,13 @@
       </p:sp>
       <p:sp>
         <p:nvSpPr>
-          <p:cNvPr id="17" name="TextBox 16"/>
+          <p:cNvPr id="18" name="TextBox 17"/>
           <p:cNvSpPr txBox="1"/>
           <p:nvPr/>
         </p:nvSpPr>
         <p:spPr>
           <a:xfrm>
-            <a:off x="8203996" y="4526280"/>
+            <a:off x="8203996" y="4709160"/>
             <a:ext cx="3210458" cy="1417319"/>
           </a:xfrm>
           <a:prstGeom prst="rect">
@@ -4814,7 +4935,7 @@
             <a:r>
               <a:rPr sz="1600" b="0" i="0">
                 <a:solidFill>
-                  <a:srgbClr val="2B2B2B"/>
+                  <a:srgbClr val="26231F"/>
                 </a:solidFill>
               </a:rPr>
               <a:t>내용을 입력하세요</a:t>
@@ -4829,7 +4950,7 @@
             <a:r>
               <a:rPr sz="1600" b="0" i="0">
                 <a:solidFill>
-                  <a:srgbClr val="2B2B2B"/>
+                  <a:srgbClr val="26231F"/>
                 </a:solidFill>
               </a:rPr>
               <a:t>내용을 입력하세요</a:t>
@@ -4851,7 +4972,7 @@
     <p:bg>
       <p:bgPr>
         <a:solidFill>
-          <a:srgbClr val="FFFFFF"/>
+          <a:srgbClr val="EAFDF7"/>
         </a:solidFill>
         <a:effectLst/>
       </p:bgPr>
@@ -4865,20 +4986,20 @@
       <p:grpSpPr/>
       <p:sp>
         <p:nvSpPr>
-          <p:cNvPr id="3" name="장식"/>
+          <p:cNvPr id="3" name="포인트"/>
           <p:cNvSpPr/>
           <p:nvPr/>
         </p:nvSpPr>
         <p:spPr>
           <a:xfrm>
-            <a:off x="9905695" y="-1463040"/>
-            <a:ext cx="3840480" cy="3840480"/>
-          </a:xfrm>
-          <a:prstGeom prst="ellipse">
+            <a:off x="5958687" y="246888"/>
+            <a:ext cx="274320" cy="274320"/>
+          </a:xfrm>
+          <a:prstGeom prst="heart">
             <a:avLst/>
           </a:prstGeom>
           <a:solidFill>
-            <a:srgbClr val="D1FAEC"/>
+            <a:srgbClr val="7BEAC5"/>
           </a:solidFill>
           <a:ln>
             <a:noFill/>
@@ -4900,14 +5021,14 @@
         </p:nvSpPr>
         <p:spPr>
           <a:xfrm>
-            <a:off x="11094415" y="274320"/>
-            <a:ext cx="411480" cy="411480"/>
-          </a:xfrm>
-          <a:prstGeom prst="ellipse">
+            <a:off x="5684367" y="1572768"/>
+            <a:ext cx="822960" cy="22860"/>
+          </a:xfrm>
+          <a:prstGeom prst="rect">
             <a:avLst/>
           </a:prstGeom>
           <a:solidFill>
-            <a:srgbClr val="26C590"/>
+            <a:srgbClr val="7BEAC5"/>
           </a:solidFill>
           <a:ln>
             <a:noFill/>
@@ -4918,6 +5039,44 @@
           <a:lstStyle/>
           <a:p>
             <a:pPr algn="ctr"/>
+          </a:p>
+        </p:txBody>
+      </p:sp>
+      <p:sp>
+        <p:nvSpPr>
+          <p:cNvPr id="5" name="상단 라벨"/>
+          <p:cNvSpPr txBox="1"/>
+          <p:nvPr/>
+        </p:nvSpPr>
+        <p:spPr>
+          <a:xfrm>
+            <a:off x="640080" y="182880"/>
+            <a:ext cx="3657600" cy="274320"/>
+          </a:xfrm>
+          <a:prstGeom prst="rect">
+            <a:avLst/>
+          </a:prstGeom>
+          <a:noFill/>
+        </p:spPr>
+        <p:txBody>
+          <a:bodyPr wrap="square" lIns="54864" rIns="54864" tIns="27432" bIns="27432" anchor="ctr">
+            <a:noAutofit/>
+          </a:bodyPr>
+          <a:lstStyle/>
+          <a:p>
+            <a:pPr algn="l">
+              <a:lnSpc>
+                <a:spcPct val="115000"/>
+              </a:lnSpc>
+            </a:pPr>
+            <a:r>
+              <a:rPr sz="800" b="1" i="0" spc="250">
+                <a:solidFill>
+                  <a:srgbClr val="8E8780"/>
+                </a:solidFill>
+              </a:rPr>
+              <a:t>PRESENTATION</a:t>
+            </a:r>
           </a:p>
         </p:txBody>
       </p:sp>
@@ -4933,8 +5092,8 @@
         </p:nvSpPr>
         <p:spPr>
           <a:xfrm>
-            <a:off x="640080" y="457200"/>
-            <a:ext cx="9722815" cy="868680"/>
+            <a:off x="1371600" y="640080"/>
+            <a:ext cx="9448495" cy="868680"/>
           </a:xfrm>
         </p:spPr>
         <p:txBody>
@@ -4943,7 +5102,7 @@
           </a:bodyPr>
           <a:lstStyle/>
           <a:p>
-            <a:pPr algn="l">
+            <a:pPr algn="ctr">
               <a:lnSpc>
                 <a:spcPct val="105000"/>
               </a:lnSpc>
@@ -4951,7 +5110,7 @@
             <a:r>
               <a:rPr sz="3000" b="1" i="0">
                 <a:solidFill>
-                  <a:srgbClr val="115F45"/>
+                  <a:srgbClr val="26231F"/>
                 </a:solidFill>
               </a:rPr>
               <a:t>한눈에 비교</a:t>
@@ -4961,26 +5120,26 @@
       </p:sp>
       <p:sp>
         <p:nvSpPr>
-          <p:cNvPr id="5" name="왼쪽 칸"/>
+          <p:cNvPr id="6" name="왼쪽 칸"/>
           <p:cNvSpPr/>
           <p:nvPr/>
         </p:nvSpPr>
         <p:spPr>
           <a:xfrm>
-            <a:off x="640080" y="1600200"/>
-            <a:ext cx="5272887" cy="4800600"/>
+            <a:off x="640080" y="1783080"/>
+            <a:ext cx="5272887" cy="3291840"/>
           </a:xfrm>
           <a:prstGeom prst="roundRect">
             <a:avLst>
-              <a:gd name="adj" fmla="val 8000"/>
+              <a:gd name="adj" fmla="val 7000"/>
             </a:avLst>
           </a:prstGeom>
           <a:solidFill>
-            <a:srgbClr val="EEFCF7"/>
+            <a:srgbClr val="FFFFFF"/>
           </a:solidFill>
           <a:ln w="12700">
             <a:solidFill>
-              <a:srgbClr val="D1FAEC"/>
+              <a:srgbClr val="A5F3D9"/>
             </a:solidFill>
           </a:ln>
         </p:spPr>
@@ -4994,13 +5153,13 @@
       </p:sp>
       <p:sp>
         <p:nvSpPr>
-          <p:cNvPr id="6" name="칸 제목 바"/>
+          <p:cNvPr id="7" name="칸 제목 바"/>
           <p:cNvSpPr/>
           <p:nvPr/>
         </p:nvSpPr>
         <p:spPr>
           <a:xfrm>
-            <a:off x="640080" y="1600200"/>
+            <a:off x="640080" y="1783080"/>
             <a:ext cx="5272887" cy="640080"/>
           </a:xfrm>
           <a:prstGeom prst="roundRect">
@@ -5009,7 +5168,7 @@
             </a:avLst>
           </a:prstGeom>
           <a:solidFill>
-            <a:srgbClr val="26C590"/>
+            <a:srgbClr val="7BEAC5"/>
           </a:solidFill>
           <a:ln>
             <a:noFill/>
@@ -5025,13 +5184,13 @@
       </p:sp>
       <p:sp>
         <p:nvSpPr>
-          <p:cNvPr id="7" name="TextBox 6"/>
+          <p:cNvPr id="8" name="TextBox 7"/>
           <p:cNvSpPr txBox="1"/>
           <p:nvPr/>
         </p:nvSpPr>
         <p:spPr>
           <a:xfrm>
-            <a:off x="822959" y="1600200"/>
+            <a:off x="822959" y="1783080"/>
             <a:ext cx="4907127" cy="640080"/>
           </a:xfrm>
           <a:prstGeom prst="rect">
@@ -5053,7 +5212,7 @@
             <a:r>
               <a:rPr sz="1800" b="1" i="0">
                 <a:solidFill>
-                  <a:srgbClr val="FFFFFF"/>
+                  <a:srgbClr val="26231F"/>
                 </a:solidFill>
               </a:rPr>
               <a:t>처음</a:t>
@@ -5063,14 +5222,14 @@
       </p:sp>
       <p:sp>
         <p:nvSpPr>
-          <p:cNvPr id="8" name="TextBox 7"/>
+          <p:cNvPr id="9" name="TextBox 8"/>
           <p:cNvSpPr txBox="1"/>
           <p:nvPr/>
         </p:nvSpPr>
         <p:spPr>
           <a:xfrm>
-            <a:off x="868680" y="2423160"/>
-            <a:ext cx="4815687" cy="3886200"/>
+            <a:off x="868680" y="2606040"/>
+            <a:ext cx="4815687" cy="2377440"/>
           </a:xfrm>
           <a:prstGeom prst="rect">
             <a:avLst/>
@@ -5096,7 +5255,7 @@
             <a:r>
               <a:rPr sz="1500" b="0" i="0">
                 <a:solidFill>
-                  <a:srgbClr val="2B2B2B"/>
+                  <a:srgbClr val="26231F"/>
                 </a:solidFill>
               </a:rPr>
               <a:t>내용을 입력하세요</a:t>
@@ -5116,7 +5275,7 @@
             <a:r>
               <a:rPr sz="1500" b="0" i="0">
                 <a:solidFill>
-                  <a:srgbClr val="2B2B2B"/>
+                  <a:srgbClr val="26231F"/>
                 </a:solidFill>
               </a:rPr>
               <a:t>내용을 입력하세요</a:t>
@@ -5136,7 +5295,7 @@
             <a:r>
               <a:rPr sz="1500" b="0" i="0">
                 <a:solidFill>
-                  <a:srgbClr val="2B2B2B"/>
+                  <a:srgbClr val="26231F"/>
                 </a:solidFill>
               </a:rPr>
               <a:t>내용을 입력하세요</a:t>
@@ -5146,26 +5305,26 @@
       </p:sp>
       <p:sp>
         <p:nvSpPr>
-          <p:cNvPr id="9" name="오른쪽 칸"/>
+          <p:cNvPr id="10" name="오른쪽 칸"/>
           <p:cNvSpPr/>
           <p:nvPr/>
         </p:nvSpPr>
         <p:spPr>
           <a:xfrm>
-            <a:off x="6278727" y="1600200"/>
-            <a:ext cx="5272887" cy="4800600"/>
+            <a:off x="6278727" y="1783080"/>
+            <a:ext cx="5272887" cy="3291840"/>
           </a:xfrm>
           <a:prstGeom prst="roundRect">
             <a:avLst>
-              <a:gd name="adj" fmla="val 8000"/>
+              <a:gd name="adj" fmla="val 7000"/>
             </a:avLst>
           </a:prstGeom>
           <a:solidFill>
-            <a:srgbClr val="D1FAEC"/>
+            <a:srgbClr val="FFFFFF"/>
           </a:solidFill>
           <a:ln w="12700">
             <a:solidFill>
-              <a:srgbClr val="D1FAEC"/>
+              <a:srgbClr val="A5F3D9"/>
             </a:solidFill>
           </a:ln>
         </p:spPr>
@@ -5179,13 +5338,13 @@
       </p:sp>
       <p:sp>
         <p:nvSpPr>
-          <p:cNvPr id="10" name="칸 제목 바"/>
+          <p:cNvPr id="11" name="칸 제목 바"/>
           <p:cNvSpPr/>
           <p:nvPr/>
         </p:nvSpPr>
         <p:spPr>
           <a:xfrm>
-            <a:off x="6278727" y="1600200"/>
+            <a:off x="6278727" y="1783080"/>
             <a:ext cx="5272887" cy="640080"/>
           </a:xfrm>
           <a:prstGeom prst="roundRect">
@@ -5194,7 +5353,7 @@
             </a:avLst>
           </a:prstGeom>
           <a:solidFill>
-            <a:srgbClr val="115F45"/>
+            <a:srgbClr val="27493E"/>
           </a:solidFill>
           <a:ln>
             <a:noFill/>
@@ -5210,13 +5369,13 @@
       </p:sp>
       <p:sp>
         <p:nvSpPr>
-          <p:cNvPr id="11" name="TextBox 10"/>
+          <p:cNvPr id="12" name="TextBox 11"/>
           <p:cNvSpPr txBox="1"/>
           <p:nvPr/>
         </p:nvSpPr>
         <p:spPr>
           <a:xfrm>
-            <a:off x="6461607" y="1600200"/>
+            <a:off x="6461607" y="1783080"/>
             <a:ext cx="4907127" cy="640080"/>
           </a:xfrm>
           <a:prstGeom prst="rect">
@@ -5248,14 +5407,14 @@
       </p:sp>
       <p:sp>
         <p:nvSpPr>
-          <p:cNvPr id="12" name="TextBox 11"/>
+          <p:cNvPr id="13" name="TextBox 12"/>
           <p:cNvSpPr txBox="1"/>
           <p:nvPr/>
         </p:nvSpPr>
         <p:spPr>
           <a:xfrm>
-            <a:off x="6507327" y="2423160"/>
-            <a:ext cx="4815687" cy="3886200"/>
+            <a:off x="6507327" y="2606040"/>
+            <a:ext cx="4815687" cy="2377440"/>
           </a:xfrm>
           <a:prstGeom prst="rect">
             <a:avLst/>
@@ -5281,7 +5440,7 @@
             <a:r>
               <a:rPr sz="1500" b="0" i="0">
                 <a:solidFill>
-                  <a:srgbClr val="2B2B2B"/>
+                  <a:srgbClr val="26231F"/>
                 </a:solidFill>
               </a:rPr>
               <a:t>내용을 입력하세요</a:t>
@@ -5301,7 +5460,7 @@
             <a:r>
               <a:rPr sz="1500" b="0" i="0">
                 <a:solidFill>
-                  <a:srgbClr val="2B2B2B"/>
+                  <a:srgbClr val="26231F"/>
                 </a:solidFill>
               </a:rPr>
               <a:t>내용을 입력하세요</a:t>
@@ -5321,7 +5480,7 @@
             <a:r>
               <a:rPr sz="1500" b="0" i="0">
                 <a:solidFill>
-                  <a:srgbClr val="2B2B2B"/>
+                  <a:srgbClr val="26231F"/>
                 </a:solidFill>
               </a:rPr>
               <a:t>내용을 입력하세요</a:t>
@@ -5343,7 +5502,7 @@
     <p:bg>
       <p:bgPr>
         <a:solidFill>
-          <a:srgbClr val="FFFFFF"/>
+          <a:srgbClr val="EAFDF7"/>
         </a:solidFill>
         <a:effectLst/>
       </p:bgPr>
@@ -5357,20 +5516,20 @@
       <p:grpSpPr/>
       <p:sp>
         <p:nvSpPr>
-          <p:cNvPr id="3" name="장식"/>
+          <p:cNvPr id="3" name="포인트"/>
           <p:cNvSpPr/>
           <p:nvPr/>
         </p:nvSpPr>
         <p:spPr>
           <a:xfrm>
-            <a:off x="9905695" y="-1463040"/>
-            <a:ext cx="3840480" cy="3840480"/>
-          </a:xfrm>
-          <a:prstGeom prst="ellipse">
+            <a:off x="5958687" y="246888"/>
+            <a:ext cx="274320" cy="274320"/>
+          </a:xfrm>
+          <a:prstGeom prst="heart">
             <a:avLst/>
           </a:prstGeom>
           <a:solidFill>
-            <a:srgbClr val="D1FAEC"/>
+            <a:srgbClr val="7BEAC5"/>
           </a:solidFill>
           <a:ln>
             <a:noFill/>
@@ -5392,14 +5551,14 @@
         </p:nvSpPr>
         <p:spPr>
           <a:xfrm>
-            <a:off x="11094415" y="274320"/>
-            <a:ext cx="411480" cy="411480"/>
-          </a:xfrm>
-          <a:prstGeom prst="ellipse">
+            <a:off x="5684367" y="1572768"/>
+            <a:ext cx="822960" cy="22860"/>
+          </a:xfrm>
+          <a:prstGeom prst="rect">
             <a:avLst/>
           </a:prstGeom>
           <a:solidFill>
-            <a:srgbClr val="26C590"/>
+            <a:srgbClr val="7BEAC5"/>
           </a:solidFill>
           <a:ln>
             <a:noFill/>
@@ -5410,6 +5569,44 @@
           <a:lstStyle/>
           <a:p>
             <a:pPr algn="ctr"/>
+          </a:p>
+        </p:txBody>
+      </p:sp>
+      <p:sp>
+        <p:nvSpPr>
+          <p:cNvPr id="5" name="상단 라벨"/>
+          <p:cNvSpPr txBox="1"/>
+          <p:nvPr/>
+        </p:nvSpPr>
+        <p:spPr>
+          <a:xfrm>
+            <a:off x="640080" y="182880"/>
+            <a:ext cx="3657600" cy="274320"/>
+          </a:xfrm>
+          <a:prstGeom prst="rect">
+            <a:avLst/>
+          </a:prstGeom>
+          <a:noFill/>
+        </p:spPr>
+        <p:txBody>
+          <a:bodyPr wrap="square" lIns="54864" rIns="54864" tIns="27432" bIns="27432" anchor="ctr">
+            <a:noAutofit/>
+          </a:bodyPr>
+          <a:lstStyle/>
+          <a:p>
+            <a:pPr algn="l">
+              <a:lnSpc>
+                <a:spcPct val="115000"/>
+              </a:lnSpc>
+            </a:pPr>
+            <a:r>
+              <a:rPr sz="800" b="1" i="0" spc="250">
+                <a:solidFill>
+                  <a:srgbClr val="8E8780"/>
+                </a:solidFill>
+              </a:rPr>
+              <a:t>PRESENTATION</a:t>
+            </a:r>
           </a:p>
         </p:txBody>
       </p:sp>
@@ -5425,8 +5622,8 @@
         </p:nvSpPr>
         <p:spPr>
           <a:xfrm>
-            <a:off x="640080" y="457200"/>
-            <a:ext cx="9722815" cy="868680"/>
+            <a:off x="1371600" y="640080"/>
+            <a:ext cx="9448495" cy="868680"/>
           </a:xfrm>
         </p:spPr>
         <p:txBody>
@@ -5435,7 +5632,7 @@
           </a:bodyPr>
           <a:lstStyle/>
           <a:p>
-            <a:pPr algn="l">
+            <a:pPr algn="ctr">
               <a:lnSpc>
                 <a:spcPct val="105000"/>
               </a:lnSpc>
@@ -5443,7 +5640,7 @@
             <a:r>
               <a:rPr sz="3000" b="1" i="0">
                 <a:solidFill>
-                  <a:srgbClr val="115F45"/>
+                  <a:srgbClr val="26231F"/>
                 </a:solidFill>
               </a:rPr>
               <a:t>일정·현황</a:t>
@@ -5453,14 +5650,14 @@
       </p:sp>
       <p:graphicFrame>
         <p:nvGraphicFramePr>
-          <p:cNvPr id="5" name="표"/>
+          <p:cNvPr id="6" name="표"/>
           <p:cNvGraphicFramePr>
             <a:graphicFrameLocks noGrp="1"/>
           </p:cNvGraphicFramePr>
           <p:nvPr/>
         </p:nvGraphicFramePr>
         <p:xfrm>
-          <a:off x="640080" y="1600200"/>
+          <a:off x="640080" y="1783080"/>
           <a:ext cx="10911532" cy="3840480"/>
         </p:xfrm>
         <a:graphic>
@@ -5485,7 +5682,7 @@
                       <a:r>
                         <a:rPr sz="1500" b="1">
                           <a:solidFill>
-                            <a:srgbClr val="FFFFFF"/>
+                            <a:srgbClr val="26231F"/>
                           </a:solidFill>
                         </a:rPr>
                         <a:t>날짜</a:t>
@@ -5495,30 +5692,30 @@
                   <a:tcPr anchor="ctr" marL="73152" marR="73152">
                     <a:lnL w="9525" cap="flat" cmpd="sng" algn="ctr">
                       <a:solidFill>
-                        <a:srgbClr val="26C590"/>
+                        <a:srgbClr val="7BEAC5"/>
                       </a:solidFill>
                       <a:prstDash val="solid"/>
                     </a:lnL>
                     <a:lnR w="9525" cap="flat" cmpd="sng" algn="ctr">
                       <a:solidFill>
-                        <a:srgbClr val="26C590"/>
+                        <a:srgbClr val="7BEAC5"/>
                       </a:solidFill>
                       <a:prstDash val="solid"/>
                     </a:lnR>
                     <a:lnT w="9525" cap="flat" cmpd="sng" algn="ctr">
                       <a:solidFill>
-                        <a:srgbClr val="26C590"/>
+                        <a:srgbClr val="7BEAC5"/>
                       </a:solidFill>
                       <a:prstDash val="solid"/>
                     </a:lnT>
                     <a:lnB w="9525" cap="flat" cmpd="sng" algn="ctr">
                       <a:solidFill>
-                        <a:srgbClr val="26C590"/>
+                        <a:srgbClr val="7BEAC5"/>
                       </a:solidFill>
                       <a:prstDash val="solid"/>
                     </a:lnB>
                     <a:solidFill>
-                      <a:srgbClr val="26C590"/>
+                      <a:srgbClr val="7BEAC5"/>
                     </a:solidFill>
                   </a:tcPr>
                 </a:tc>
@@ -5531,7 +5728,7 @@
                       <a:r>
                         <a:rPr sz="1500" b="1">
                           <a:solidFill>
-                            <a:srgbClr val="FFFFFF"/>
+                            <a:srgbClr val="26231F"/>
                           </a:solidFill>
                         </a:rPr>
                         <a:t>활동</a:t>
@@ -5541,30 +5738,30 @@
                   <a:tcPr anchor="ctr" marL="73152" marR="73152">
                     <a:lnL w="9525" cap="flat" cmpd="sng" algn="ctr">
                       <a:solidFill>
-                        <a:srgbClr val="26C590"/>
+                        <a:srgbClr val="7BEAC5"/>
                       </a:solidFill>
                       <a:prstDash val="solid"/>
                     </a:lnL>
                     <a:lnR w="9525" cap="flat" cmpd="sng" algn="ctr">
                       <a:solidFill>
-                        <a:srgbClr val="26C590"/>
+                        <a:srgbClr val="7BEAC5"/>
                       </a:solidFill>
                       <a:prstDash val="solid"/>
                     </a:lnR>
                     <a:lnT w="9525" cap="flat" cmpd="sng" algn="ctr">
                       <a:solidFill>
-                        <a:srgbClr val="26C590"/>
+                        <a:srgbClr val="7BEAC5"/>
                       </a:solidFill>
                       <a:prstDash val="solid"/>
                     </a:lnT>
                     <a:lnB w="9525" cap="flat" cmpd="sng" algn="ctr">
                       <a:solidFill>
-                        <a:srgbClr val="26C590"/>
+                        <a:srgbClr val="7BEAC5"/>
                       </a:solidFill>
                       <a:prstDash val="solid"/>
                     </a:lnB>
                     <a:solidFill>
-                      <a:srgbClr val="26C590"/>
+                      <a:srgbClr val="7BEAC5"/>
                     </a:solidFill>
                   </a:tcPr>
                 </a:tc>
@@ -5577,7 +5774,7 @@
                       <a:r>
                         <a:rPr sz="1500" b="1">
                           <a:solidFill>
-                            <a:srgbClr val="FFFFFF"/>
+                            <a:srgbClr val="26231F"/>
                           </a:solidFill>
                         </a:rPr>
                         <a:t>장소</a:t>
@@ -5587,30 +5784,30 @@
                   <a:tcPr anchor="ctr" marL="73152" marR="73152">
                     <a:lnL w="9525" cap="flat" cmpd="sng" algn="ctr">
                       <a:solidFill>
-                        <a:srgbClr val="26C590"/>
+                        <a:srgbClr val="7BEAC5"/>
                       </a:solidFill>
                       <a:prstDash val="solid"/>
                     </a:lnL>
                     <a:lnR w="9525" cap="flat" cmpd="sng" algn="ctr">
                       <a:solidFill>
-                        <a:srgbClr val="26C590"/>
+                        <a:srgbClr val="7BEAC5"/>
                       </a:solidFill>
                       <a:prstDash val="solid"/>
                     </a:lnR>
                     <a:lnT w="9525" cap="flat" cmpd="sng" algn="ctr">
                       <a:solidFill>
-                        <a:srgbClr val="26C590"/>
+                        <a:srgbClr val="7BEAC5"/>
                       </a:solidFill>
                       <a:prstDash val="solid"/>
                     </a:lnT>
                     <a:lnB w="9525" cap="flat" cmpd="sng" algn="ctr">
                       <a:solidFill>
-                        <a:srgbClr val="26C590"/>
+                        <a:srgbClr val="7BEAC5"/>
                       </a:solidFill>
                       <a:prstDash val="solid"/>
                     </a:lnB>
                     <a:solidFill>
-                      <a:srgbClr val="26C590"/>
+                      <a:srgbClr val="7BEAC5"/>
                     </a:solidFill>
                   </a:tcPr>
                 </a:tc>
@@ -5623,7 +5820,7 @@
                       <a:r>
                         <a:rPr sz="1500" b="1">
                           <a:solidFill>
-                            <a:srgbClr val="FFFFFF"/>
+                            <a:srgbClr val="26231F"/>
                           </a:solidFill>
                         </a:rPr>
                         <a:t>참석</a:t>
@@ -5633,30 +5830,30 @@
                   <a:tcPr anchor="ctr" marL="73152" marR="73152">
                     <a:lnL w="9525" cap="flat" cmpd="sng" algn="ctr">
                       <a:solidFill>
-                        <a:srgbClr val="26C590"/>
+                        <a:srgbClr val="7BEAC5"/>
                       </a:solidFill>
                       <a:prstDash val="solid"/>
                     </a:lnL>
                     <a:lnR w="9525" cap="flat" cmpd="sng" algn="ctr">
                       <a:solidFill>
-                        <a:srgbClr val="26C590"/>
+                        <a:srgbClr val="7BEAC5"/>
                       </a:solidFill>
                       <a:prstDash val="solid"/>
                     </a:lnR>
                     <a:lnT w="9525" cap="flat" cmpd="sng" algn="ctr">
                       <a:solidFill>
-                        <a:srgbClr val="26C590"/>
+                        <a:srgbClr val="7BEAC5"/>
                       </a:solidFill>
                       <a:prstDash val="solid"/>
                     </a:lnT>
                     <a:lnB w="9525" cap="flat" cmpd="sng" algn="ctr">
                       <a:solidFill>
-                        <a:srgbClr val="26C590"/>
+                        <a:srgbClr val="7BEAC5"/>
                       </a:solidFill>
                       <a:prstDash val="solid"/>
                     </a:lnB>
                     <a:solidFill>
-                      <a:srgbClr val="26C590"/>
+                      <a:srgbClr val="7BEAC5"/>
                     </a:solidFill>
                   </a:tcPr>
                 </a:tc>
@@ -5671,7 +5868,7 @@
                       <a:r>
                         <a:rPr sz="1500" b="1">
                           <a:solidFill>
-                            <a:srgbClr val="115F45"/>
+                            <a:srgbClr val="27493E"/>
                           </a:solidFill>
                         </a:rPr>
                         <a:t>1</a:t>
@@ -5717,7 +5914,7 @@
                       <a:r>
                         <a:rPr sz="1500" b="0">
                           <a:solidFill>
-                            <a:srgbClr val="2B2B2B"/>
+                            <a:srgbClr val="26231F"/>
                           </a:solidFill>
                         </a:rPr>
                         <a:t>내용 입력</a:t>
@@ -5763,7 +5960,7 @@
                       <a:r>
                         <a:rPr sz="1500" b="0">
                           <a:solidFill>
-                            <a:srgbClr val="2B2B2B"/>
+                            <a:srgbClr val="26231F"/>
                           </a:solidFill>
                         </a:rPr>
                         <a:t/>
@@ -5809,7 +6006,7 @@
                       <a:r>
                         <a:rPr sz="1500" b="0">
                           <a:solidFill>
-                            <a:srgbClr val="2B2B2B"/>
+                            <a:srgbClr val="26231F"/>
                           </a:solidFill>
                         </a:rPr>
                         <a:t/>
@@ -5857,7 +6054,7 @@
                       <a:r>
                         <a:rPr sz="1500" b="1">
                           <a:solidFill>
-                            <a:srgbClr val="115F45"/>
+                            <a:srgbClr val="27493E"/>
                           </a:solidFill>
                         </a:rPr>
                         <a:t>2</a:t>
@@ -5903,7 +6100,7 @@
                       <a:r>
                         <a:rPr sz="1500" b="0">
                           <a:solidFill>
-                            <a:srgbClr val="2B2B2B"/>
+                            <a:srgbClr val="26231F"/>
                           </a:solidFill>
                         </a:rPr>
                         <a:t>내용 입력</a:t>
@@ -5936,7 +6133,7 @@
                       <a:prstDash val="solid"/>
                     </a:lnB>
                     <a:solidFill>
-                      <a:srgbClr val="EEFCF7"/>
+                      <a:srgbClr val="EAFDF7"/>
                     </a:solidFill>
                   </a:tcPr>
                 </a:tc>
@@ -5949,7 +6146,7 @@
                       <a:r>
                         <a:rPr sz="1500" b="0">
                           <a:solidFill>
-                            <a:srgbClr val="2B2B2B"/>
+                            <a:srgbClr val="26231F"/>
                           </a:solidFill>
                         </a:rPr>
                         <a:t/>
@@ -5982,7 +6179,7 @@
                       <a:prstDash val="solid"/>
                     </a:lnB>
                     <a:solidFill>
-                      <a:srgbClr val="EEFCF7"/>
+                      <a:srgbClr val="EAFDF7"/>
                     </a:solidFill>
                   </a:tcPr>
                 </a:tc>
@@ -5995,7 +6192,7 @@
                       <a:r>
                         <a:rPr sz="1500" b="0">
                           <a:solidFill>
-                            <a:srgbClr val="2B2B2B"/>
+                            <a:srgbClr val="26231F"/>
                           </a:solidFill>
                         </a:rPr>
                         <a:t/>
@@ -6028,7 +6225,7 @@
                       <a:prstDash val="solid"/>
                     </a:lnB>
                     <a:solidFill>
-                      <a:srgbClr val="EEFCF7"/>
+                      <a:srgbClr val="EAFDF7"/>
                     </a:solidFill>
                   </a:tcPr>
                 </a:tc>
@@ -6043,7 +6240,7 @@
                       <a:r>
                         <a:rPr sz="1500" b="1">
                           <a:solidFill>
-                            <a:srgbClr val="115F45"/>
+                            <a:srgbClr val="27493E"/>
                           </a:solidFill>
                         </a:rPr>
                         <a:t>3</a:t>
@@ -6089,7 +6286,7 @@
                       <a:r>
                         <a:rPr sz="1500" b="0">
                           <a:solidFill>
-                            <a:srgbClr val="2B2B2B"/>
+                            <a:srgbClr val="26231F"/>
                           </a:solidFill>
                         </a:rPr>
                         <a:t>내용 입력</a:t>
@@ -6135,7 +6332,7 @@
                       <a:r>
                         <a:rPr sz="1500" b="0">
                           <a:solidFill>
-                            <a:srgbClr val="2B2B2B"/>
+                            <a:srgbClr val="26231F"/>
                           </a:solidFill>
                         </a:rPr>
                         <a:t/>
@@ -6181,7 +6378,7 @@
                       <a:r>
                         <a:rPr sz="1500" b="0">
                           <a:solidFill>
-                            <a:srgbClr val="2B2B2B"/>
+                            <a:srgbClr val="26231F"/>
                           </a:solidFill>
                         </a:rPr>
                         <a:t/>
@@ -6229,7 +6426,7 @@
                       <a:r>
                         <a:rPr sz="1500" b="1">
                           <a:solidFill>
-                            <a:srgbClr val="115F45"/>
+                            <a:srgbClr val="27493E"/>
                           </a:solidFill>
                         </a:rPr>
                         <a:t>4</a:t>
@@ -6275,7 +6472,7 @@
                       <a:r>
                         <a:rPr sz="1500" b="0">
                           <a:solidFill>
-                            <a:srgbClr val="2B2B2B"/>
+                            <a:srgbClr val="26231F"/>
                           </a:solidFill>
                         </a:rPr>
                         <a:t>내용 입력</a:t>
@@ -6308,7 +6505,7 @@
                       <a:prstDash val="solid"/>
                     </a:lnB>
                     <a:solidFill>
-                      <a:srgbClr val="EEFCF7"/>
+                      <a:srgbClr val="EAFDF7"/>
                     </a:solidFill>
                   </a:tcPr>
                 </a:tc>
@@ -6321,7 +6518,7 @@
                       <a:r>
                         <a:rPr sz="1500" b="0">
                           <a:solidFill>
-                            <a:srgbClr val="2B2B2B"/>
+                            <a:srgbClr val="26231F"/>
                           </a:solidFill>
                         </a:rPr>
                         <a:t/>
@@ -6354,7 +6551,7 @@
                       <a:prstDash val="solid"/>
                     </a:lnB>
                     <a:solidFill>
-                      <a:srgbClr val="EEFCF7"/>
+                      <a:srgbClr val="EAFDF7"/>
                     </a:solidFill>
                   </a:tcPr>
                 </a:tc>
@@ -6367,7 +6564,7 @@
                       <a:r>
                         <a:rPr sz="1500" b="0">
                           <a:solidFill>
-                            <a:srgbClr val="2B2B2B"/>
+                            <a:srgbClr val="26231F"/>
                           </a:solidFill>
                         </a:rPr>
                         <a:t/>
@@ -6400,7 +6597,7 @@
                       <a:prstDash val="solid"/>
                     </a:lnB>
                     <a:solidFill>
-                      <a:srgbClr val="EEFCF7"/>
+                      <a:srgbClr val="EAFDF7"/>
                     </a:solidFill>
                   </a:tcPr>
                 </a:tc>
@@ -6415,7 +6612,7 @@
                       <a:r>
                         <a:rPr sz="1500" b="1">
                           <a:solidFill>
-                            <a:srgbClr val="115F45"/>
+                            <a:srgbClr val="27493E"/>
                           </a:solidFill>
                         </a:rPr>
                         <a:t>5</a:t>
@@ -6461,7 +6658,7 @@
                       <a:r>
                         <a:rPr sz="1500" b="0">
                           <a:solidFill>
-                            <a:srgbClr val="2B2B2B"/>
+                            <a:srgbClr val="26231F"/>
                           </a:solidFill>
                         </a:rPr>
                         <a:t>내용 입력</a:t>
@@ -6507,7 +6704,7 @@
                       <a:r>
                         <a:rPr sz="1500" b="0">
                           <a:solidFill>
-                            <a:srgbClr val="2B2B2B"/>
+                            <a:srgbClr val="26231F"/>
                           </a:solidFill>
                         </a:rPr>
                         <a:t/>
@@ -6553,7 +6750,7 @@
                       <a:r>
                         <a:rPr sz="1500" b="0">
                           <a:solidFill>
-                            <a:srgbClr val="2B2B2B"/>
+                            <a:srgbClr val="26231F"/>
                           </a:solidFill>
                         </a:rPr>
                         <a:t/>
@@ -6606,6 +6803,14 @@
 <file path=ppt/slides/slide6.xml><?xml version="1.0" encoding="utf-8"?>
 <p:sld xmlns:a="http://schemas.openxmlformats.org/drawingml/2006/main" xmlns:p="http://schemas.openxmlformats.org/presentationml/2006/main" xmlns:r="http://schemas.openxmlformats.org/officeDocument/2006/relationships">
   <p:cSld>
+    <p:bg>
+      <p:bgPr>
+        <a:solidFill>
+          <a:srgbClr val="27493E"/>
+        </a:solidFill>
+        <a:effectLst/>
+      </p:bgPr>
+    </p:bg>
     <p:spTree>
       <p:nvGrpSpPr>
         <p:cNvPr id="1" name=""/>
@@ -6613,30 +6818,102 @@
         <p:nvPr/>
       </p:nvGrpSpPr>
       <p:grpSpPr/>
-      <p:pic>
-        <p:nvPicPr>
-          <p:cNvPr id="3" name="표지 그림" descr="talk-19.jpg"/>
-          <p:cNvPicPr>
-            <a:picLocks noChangeAspect="1"/>
-          </p:cNvPicPr>
+      <p:sp>
+        <p:nvSpPr>
+          <p:cNvPr id="3" name="장식"/>
+          <p:cNvSpPr/>
           <p:nvPr/>
-        </p:nvPicPr>
-        <p:blipFill>
-          <a:blip r:embed="rId2"/>
-          <a:stretch>
-            <a:fillRect/>
-          </a:stretch>
-        </p:blipFill>
-        <p:spPr>
-          <a:xfrm>
-            <a:off x="0" y="0"/>
-            <a:ext cx="12191695" cy="6858000"/>
+        </p:nvSpPr>
+        <p:spPr>
+          <a:xfrm>
+            <a:off x="7802684" y="0"/>
+            <a:ext cx="4389010" cy="6858000"/>
           </a:xfrm>
           <a:prstGeom prst="rect">
             <a:avLst/>
           </a:prstGeom>
-        </p:spPr>
-      </p:pic>
+          <a:solidFill>
+            <a:srgbClr val="7BEAC5"/>
+          </a:solidFill>
+          <a:ln>
+            <a:noFill/>
+          </a:ln>
+        </p:spPr>
+        <p:txBody>
+          <a:bodyPr rtlCol="0" anchor="ctr"/>
+          <a:lstStyle/>
+          <a:p>
+            <a:pPr algn="ctr"/>
+          </a:p>
+        </p:txBody>
+      </p:sp>
+      <p:sp>
+        <p:nvSpPr>
+          <p:cNvPr id="4" name="장식"/>
+          <p:cNvSpPr/>
+          <p:nvPr/>
+        </p:nvSpPr>
+        <p:spPr>
+          <a:xfrm>
+            <a:off x="8168435" y="365760"/>
+            <a:ext cx="3657508" cy="6126480"/>
+          </a:xfrm>
+          <a:prstGeom prst="rect">
+            <a:avLst/>
+          </a:prstGeom>
+          <a:noFill/>
+          <a:ln w="9525">
+            <a:solidFill>
+              <a:srgbClr val="FFFFFF"/>
+            </a:solidFill>
+          </a:ln>
+        </p:spPr>
+        <p:txBody>
+          <a:bodyPr rtlCol="0" anchor="ctr"/>
+          <a:lstStyle/>
+          <a:p>
+            <a:pPr algn="ctr"/>
+          </a:p>
+        </p:txBody>
+      </p:sp>
+      <p:sp>
+        <p:nvSpPr>
+          <p:cNvPr id="5" name="라벨"/>
+          <p:cNvSpPr txBox="1"/>
+          <p:nvPr/>
+        </p:nvSpPr>
+        <p:spPr>
+          <a:xfrm>
+            <a:off x="822960" y="2148840"/>
+            <a:ext cx="5608179" cy="274320"/>
+          </a:xfrm>
+          <a:prstGeom prst="rect">
+            <a:avLst/>
+          </a:prstGeom>
+          <a:noFill/>
+        </p:spPr>
+        <p:txBody>
+          <a:bodyPr wrap="square" lIns="54864" rIns="54864" tIns="27432" bIns="27432" anchor="t">
+            <a:noAutofit/>
+          </a:bodyPr>
+          <a:lstStyle/>
+          <a:p>
+            <a:pPr algn="l">
+              <a:lnSpc>
+                <a:spcPct val="115000"/>
+              </a:lnSpc>
+            </a:pPr>
+            <a:r>
+              <a:rPr sz="1000" b="1" i="0" spc="250">
+                <a:solidFill>
+                  <a:srgbClr val="FFFFFF"/>
+                </a:solidFill>
+              </a:rPr>
+              <a:t>PRESENTATION</a:t>
+            </a:r>
+          </a:p>
+        </p:txBody>
+      </p:sp>
       <p:sp>
         <p:nvSpPr>
           <p:cNvPr id="2" name="Title 1"/>
@@ -6649,8 +6926,8 @@
         </p:nvSpPr>
         <p:spPr>
           <a:xfrm>
-            <a:off x="853418" y="2057400"/>
-            <a:ext cx="6095847" cy="1554480"/>
+            <a:off x="822960" y="2606040"/>
+            <a:ext cx="5608179" cy="1188720"/>
           </a:xfrm>
         </p:spPr>
         <p:txBody>
@@ -6665,9 +6942,9 @@
               </a:lnSpc>
             </a:pPr>
             <a:r>
-              <a:rPr sz="3600" b="1" i="0">
+              <a:rPr sz="4000" b="1" i="0">
                 <a:solidFill>
-                  <a:srgbClr val="115F45"/>
+                  <a:srgbClr val="FFFFFF"/>
                 </a:solidFill>
               </a:rPr>
               <a:t>감사합니다</a:t>
@@ -6677,14 +6954,14 @@
       </p:sp>
       <p:sp>
         <p:nvSpPr>
-          <p:cNvPr id="4" name="한 줄 문구"/>
+          <p:cNvPr id="6" name="한 줄 문구"/>
           <p:cNvSpPr txBox="1"/>
           <p:nvPr/>
         </p:nvSpPr>
         <p:spPr>
           <a:xfrm>
-            <a:off x="853418" y="3749039"/>
-            <a:ext cx="6095847" cy="822960"/>
+            <a:off x="822960" y="3886200"/>
+            <a:ext cx="5608179" cy="822960"/>
           </a:xfrm>
           <a:prstGeom prst="rect">
             <a:avLst/>
@@ -6703,9 +6980,9 @@
               </a:lnSpc>
             </a:pPr>
             <a:r>
-              <a:rPr sz="1700" b="0" i="1">
+              <a:rPr sz="1700" b="0" i="0">
                 <a:solidFill>
-                  <a:srgbClr val="115F45"/>
+                  <a:srgbClr val="FFFFFF"/>
                 </a:solidFill>
               </a:rPr>
               <a:t>끝까지 들어 주셔서 고맙습니다</a:t>
@@ -6715,14 +6992,14 @@
       </p:sp>
       <p:sp>
         <p:nvSpPr>
-          <p:cNvPr id="5" name="안내 문구"/>
+          <p:cNvPr id="7" name="안내 문구"/>
           <p:cNvSpPr txBox="1"/>
           <p:nvPr/>
         </p:nvSpPr>
         <p:spPr>
           <a:xfrm>
-            <a:off x="853418" y="4617720"/>
-            <a:ext cx="6095847" cy="914400"/>
+            <a:off x="822960" y="4754880"/>
+            <a:ext cx="5608179" cy="914400"/>
           </a:xfrm>
           <a:prstGeom prst="rect">
             <a:avLst/>
@@ -6743,7 +7020,7 @@
             <a:r>
               <a:rPr sz="1400" b="0" i="0">
                 <a:solidFill>
-                  <a:srgbClr val="666666"/>
+                  <a:srgbClr val="FFFFFF"/>
                 </a:solidFill>
               </a:rPr>
               <a:t>문의 · 연락처를 입력하세요</a:t>
@@ -6770,34 +7047,34 @@
         <a:sysClr val="window" lastClr="FFFFFF"/>
       </a:lt1>
       <a:dk2>
-        <a:srgbClr val="115F45"/>
+        <a:srgbClr val="27493E"/>
       </a:dk2>
       <a:lt2>
-        <a:srgbClr val="EEFCF7"/>
+        <a:srgbClr val="EAFDF7"/>
       </a:lt2>
       <a:accent1>
-        <a:srgbClr val="26C590"/>
+        <a:srgbClr val="7BEAC5"/>
       </a:accent1>
       <a:accent2>
-        <a:srgbClr val="209DB6"/>
+        <a:srgbClr val="9FE5EF"/>
       </a:accent2>
       <a:accent3>
-        <a:srgbClr val="115F45"/>
+        <a:srgbClr val="27493E"/>
       </a:accent3>
       <a:accent4>
         <a:srgbClr val="D1FAEC"/>
       </a:accent4>
       <a:accent5>
-        <a:srgbClr val="23B1A3"/>
+        <a:srgbClr val="8DE8DA"/>
       </a:accent5>
       <a:accent6>
-        <a:srgbClr val="709F8F"/>
+        <a:srgbClr val="7D928B"/>
       </a:accent6>
       <a:hlink>
-        <a:srgbClr val="26C590"/>
+        <a:srgbClr val="7BEAC5"/>
       </a:hlink>
       <a:folHlink>
-        <a:srgbClr val="115F45"/>
+        <a:srgbClr val="27493E"/>
       </a:folHlink>
     </a:clrScheme>
     <a:fontScheme name="Office">
